--- a/clases/Cap05_Evaluacion/presentations/PAT05_Performance.pptx
+++ b/clases/Cap05_Evaluacion/presentations/PAT05_Performance.pptx
@@ -5,7 +5,7 @@
     <p:sldMasterId id="2147483648" r:id="rId1"/>
   </p:sldMasterIdLst>
   <p:notesMasterIdLst>
-    <p:notesMasterId r:id="rId44"/>
+    <p:notesMasterId r:id="rId46"/>
   </p:notesMasterIdLst>
   <p:sldIdLst>
     <p:sldId id="257" r:id="rId2"/>
@@ -13,43 +13,45 @@
     <p:sldId id="334" r:id="rId4"/>
     <p:sldId id="335" r:id="rId5"/>
     <p:sldId id="354" r:id="rId6"/>
-    <p:sldId id="353" r:id="rId7"/>
-    <p:sldId id="345" r:id="rId8"/>
-    <p:sldId id="343" r:id="rId9"/>
-    <p:sldId id="342" r:id="rId10"/>
-    <p:sldId id="341" r:id="rId11"/>
-    <p:sldId id="355" r:id="rId12"/>
-    <p:sldId id="358" r:id="rId13"/>
-    <p:sldId id="336" r:id="rId14"/>
-    <p:sldId id="337" r:id="rId15"/>
-    <p:sldId id="338" r:id="rId16"/>
-    <p:sldId id="487" r:id="rId17"/>
-    <p:sldId id="488" r:id="rId18"/>
-    <p:sldId id="489" r:id="rId19"/>
-    <p:sldId id="339" r:id="rId20"/>
-    <p:sldId id="491" r:id="rId21"/>
-    <p:sldId id="344" r:id="rId22"/>
-    <p:sldId id="348" r:id="rId23"/>
-    <p:sldId id="357" r:id="rId24"/>
-    <p:sldId id="356" r:id="rId25"/>
-    <p:sldId id="346" r:id="rId26"/>
-    <p:sldId id="347" r:id="rId27"/>
-    <p:sldId id="352" r:id="rId28"/>
-    <p:sldId id="349" r:id="rId29"/>
-    <p:sldId id="351" r:id="rId30"/>
-    <p:sldId id="486" r:id="rId31"/>
-    <p:sldId id="447" r:id="rId32"/>
-    <p:sldId id="474" r:id="rId33"/>
-    <p:sldId id="475" r:id="rId34"/>
-    <p:sldId id="484" r:id="rId35"/>
-    <p:sldId id="481" r:id="rId36"/>
-    <p:sldId id="482" r:id="rId37"/>
-    <p:sldId id="485" r:id="rId38"/>
-    <p:sldId id="483" r:id="rId39"/>
-    <p:sldId id="476" r:id="rId40"/>
-    <p:sldId id="477" r:id="rId41"/>
-    <p:sldId id="478" r:id="rId42"/>
-    <p:sldId id="479" r:id="rId43"/>
+    <p:sldId id="492" r:id="rId7"/>
+    <p:sldId id="493" r:id="rId8"/>
+    <p:sldId id="353" r:id="rId9"/>
+    <p:sldId id="345" r:id="rId10"/>
+    <p:sldId id="343" r:id="rId11"/>
+    <p:sldId id="342" r:id="rId12"/>
+    <p:sldId id="341" r:id="rId13"/>
+    <p:sldId id="355" r:id="rId14"/>
+    <p:sldId id="358" r:id="rId15"/>
+    <p:sldId id="336" r:id="rId16"/>
+    <p:sldId id="337" r:id="rId17"/>
+    <p:sldId id="338" r:id="rId18"/>
+    <p:sldId id="487" r:id="rId19"/>
+    <p:sldId id="488" r:id="rId20"/>
+    <p:sldId id="489" r:id="rId21"/>
+    <p:sldId id="339" r:id="rId22"/>
+    <p:sldId id="491" r:id="rId23"/>
+    <p:sldId id="344" r:id="rId24"/>
+    <p:sldId id="348" r:id="rId25"/>
+    <p:sldId id="357" r:id="rId26"/>
+    <p:sldId id="356" r:id="rId27"/>
+    <p:sldId id="346" r:id="rId28"/>
+    <p:sldId id="347" r:id="rId29"/>
+    <p:sldId id="352" r:id="rId30"/>
+    <p:sldId id="349" r:id="rId31"/>
+    <p:sldId id="351" r:id="rId32"/>
+    <p:sldId id="486" r:id="rId33"/>
+    <p:sldId id="447" r:id="rId34"/>
+    <p:sldId id="474" r:id="rId35"/>
+    <p:sldId id="475" r:id="rId36"/>
+    <p:sldId id="484" r:id="rId37"/>
+    <p:sldId id="481" r:id="rId38"/>
+    <p:sldId id="482" r:id="rId39"/>
+    <p:sldId id="485" r:id="rId40"/>
+    <p:sldId id="483" r:id="rId41"/>
+    <p:sldId id="476" r:id="rId42"/>
+    <p:sldId id="477" r:id="rId43"/>
+    <p:sldId id="478" r:id="rId44"/>
+    <p:sldId id="479" r:id="rId45"/>
   </p:sldIdLst>
   <p:sldSz cx="12192000" cy="6858000"/>
   <p:notesSz cx="6858000" cy="9144000"/>
@@ -243,7 +245,7 @@
             <a:fld id="{1249748F-0FE7-C64C-B0B9-9306A54D4824}" type="datetimeFigureOut">
               <a:rPr lang="en-CL" smtClean="0"/>
               <a:pPr/>
-              <a:t>03-06-26</a:t>
+              <a:t>04-06-26</a:t>
             </a:fld>
             <a:endParaRPr lang="en-CL" dirty="0"/>
           </a:p>
@@ -501,7 +503,7 @@
           <a:p>
             <a:fld id="{427E9996-E95A-6C4A-95EE-D7EBED57F47A}" type="slidenum">
               <a:rPr lang="en-US" smtClean="0"/>
-              <a:t>15</a:t>
+              <a:t>17</a:t>
             </a:fld>
             <a:endParaRPr lang="en-US"/>
           </a:p>
@@ -609,7 +611,7 @@
           <a:p>
             <a:fld id="{427E9996-E95A-6C4A-95EE-D7EBED57F47A}" type="slidenum">
               <a:rPr lang="en-US" smtClean="0"/>
-              <a:t>16</a:t>
+              <a:t>18</a:t>
             </a:fld>
             <a:endParaRPr lang="en-US"/>
           </a:p>
@@ -717,7 +719,7 @@
           <a:p>
             <a:fld id="{427E9996-E95A-6C4A-95EE-D7EBED57F47A}" type="slidenum">
               <a:rPr lang="en-US" smtClean="0"/>
-              <a:t>17</a:t>
+              <a:t>19</a:t>
             </a:fld>
             <a:endParaRPr lang="en-US"/>
           </a:p>
@@ -825,7 +827,7 @@
           <a:p>
             <a:fld id="{427E9996-E95A-6C4A-95EE-D7EBED57F47A}" type="slidenum">
               <a:rPr lang="en-US" smtClean="0"/>
-              <a:t>18</a:t>
+              <a:t>20</a:t>
             </a:fld>
             <a:endParaRPr lang="en-US"/>
           </a:p>
@@ -909,7 +911,7 @@
           <a:p>
             <a:fld id="{427E9996-E95A-6C4A-95EE-D7EBED57F47A}" type="slidenum">
               <a:rPr lang="en-US" smtClean="0"/>
-              <a:t>22</a:t>
+              <a:t>24</a:t>
             </a:fld>
             <a:endParaRPr lang="en-US"/>
           </a:p>
@@ -993,7 +995,7 @@
           <a:p>
             <a:fld id="{427E9996-E95A-6C4A-95EE-D7EBED57F47A}" type="slidenum">
               <a:rPr lang="en-US" smtClean="0"/>
-              <a:t>35</a:t>
+              <a:t>37</a:t>
             </a:fld>
             <a:endParaRPr lang="en-US"/>
           </a:p>
@@ -1077,7 +1079,7 @@
           <a:p>
             <a:fld id="{427E9996-E95A-6C4A-95EE-D7EBED57F47A}" type="slidenum">
               <a:rPr lang="en-US" smtClean="0"/>
-              <a:t>36</a:t>
+              <a:t>38</a:t>
             </a:fld>
             <a:endParaRPr lang="en-US"/>
           </a:p>
@@ -1161,7 +1163,7 @@
           <a:p>
             <a:fld id="{427E9996-E95A-6C4A-95EE-D7EBED57F47A}" type="slidenum">
               <a:rPr lang="en-US" smtClean="0"/>
-              <a:t>39</a:t>
+              <a:t>41</a:t>
             </a:fld>
             <a:endParaRPr lang="en-US"/>
           </a:p>
@@ -1329,7 +1331,7 @@
           <a:p>
             <a:fld id="{2C457589-72F1-974D-B204-6AE212262628}" type="datetimeFigureOut">
               <a:rPr lang="en-CL" smtClean="0"/>
-              <a:t>03-06-26</a:t>
+              <a:t>04-06-26</a:t>
             </a:fld>
             <a:endParaRPr lang="en-CL"/>
           </a:p>
@@ -1529,7 +1531,7 @@
           <a:p>
             <a:fld id="{2C457589-72F1-974D-B204-6AE212262628}" type="datetimeFigureOut">
               <a:rPr lang="en-CL" smtClean="0"/>
-              <a:t>03-06-26</a:t>
+              <a:t>04-06-26</a:t>
             </a:fld>
             <a:endParaRPr lang="en-CL"/>
           </a:p>
@@ -1739,7 +1741,7 @@
           <a:p>
             <a:fld id="{2C457589-72F1-974D-B204-6AE212262628}" type="datetimeFigureOut">
               <a:rPr lang="en-CL" smtClean="0"/>
-              <a:t>03-06-26</a:t>
+              <a:t>04-06-26</a:t>
             </a:fld>
             <a:endParaRPr lang="en-CL"/>
           </a:p>
@@ -1939,7 +1941,7 @@
           <a:p>
             <a:fld id="{2C457589-72F1-974D-B204-6AE212262628}" type="datetimeFigureOut">
               <a:rPr lang="en-CL" smtClean="0"/>
-              <a:t>03-06-26</a:t>
+              <a:t>04-06-26</a:t>
             </a:fld>
             <a:endParaRPr lang="en-CL"/>
           </a:p>
@@ -2215,7 +2217,7 @@
           <a:p>
             <a:fld id="{2C457589-72F1-974D-B204-6AE212262628}" type="datetimeFigureOut">
               <a:rPr lang="en-CL" smtClean="0"/>
-              <a:t>03-06-26</a:t>
+              <a:t>04-06-26</a:t>
             </a:fld>
             <a:endParaRPr lang="en-CL"/>
           </a:p>
@@ -2483,7 +2485,7 @@
           <a:p>
             <a:fld id="{2C457589-72F1-974D-B204-6AE212262628}" type="datetimeFigureOut">
               <a:rPr lang="en-CL" smtClean="0"/>
-              <a:t>03-06-26</a:t>
+              <a:t>04-06-26</a:t>
             </a:fld>
             <a:endParaRPr lang="en-CL"/>
           </a:p>
@@ -2898,7 +2900,7 @@
           <a:p>
             <a:fld id="{2C457589-72F1-974D-B204-6AE212262628}" type="datetimeFigureOut">
               <a:rPr lang="en-CL" smtClean="0"/>
-              <a:t>03-06-26</a:t>
+              <a:t>04-06-26</a:t>
             </a:fld>
             <a:endParaRPr lang="en-CL"/>
           </a:p>
@@ -3040,7 +3042,7 @@
           <a:p>
             <a:fld id="{2C457589-72F1-974D-B204-6AE212262628}" type="datetimeFigureOut">
               <a:rPr lang="en-CL" smtClean="0"/>
-              <a:t>03-06-26</a:t>
+              <a:t>04-06-26</a:t>
             </a:fld>
             <a:endParaRPr lang="en-CL"/>
           </a:p>
@@ -3153,7 +3155,7 @@
           <a:p>
             <a:fld id="{2C457589-72F1-974D-B204-6AE212262628}" type="datetimeFigureOut">
               <a:rPr lang="en-CL" smtClean="0"/>
-              <a:t>03-06-26</a:t>
+              <a:t>04-06-26</a:t>
             </a:fld>
             <a:endParaRPr lang="en-CL"/>
           </a:p>
@@ -3466,7 +3468,7 @@
           <a:p>
             <a:fld id="{2C457589-72F1-974D-B204-6AE212262628}" type="datetimeFigureOut">
               <a:rPr lang="en-CL" smtClean="0"/>
-              <a:t>03-06-26</a:t>
+              <a:t>04-06-26</a:t>
             </a:fld>
             <a:endParaRPr lang="en-CL"/>
           </a:p>
@@ -3755,7 +3757,7 @@
           <a:p>
             <a:fld id="{2C457589-72F1-974D-B204-6AE212262628}" type="datetimeFigureOut">
               <a:rPr lang="en-CL" smtClean="0"/>
-              <a:t>03-06-26</a:t>
+              <a:t>04-06-26</a:t>
             </a:fld>
             <a:endParaRPr lang="en-CL"/>
           </a:p>
@@ -4000,7 +4002,7 @@
             <a:fld id="{2C457589-72F1-974D-B204-6AE212262628}" type="datetimeFigureOut">
               <a:rPr lang="en-CL" smtClean="0"/>
               <a:pPr/>
-              <a:t>03-06-26</a:t>
+              <a:t>04-06-26</a:t>
             </a:fld>
             <a:endParaRPr lang="en-CL" dirty="0"/>
           </a:p>
@@ -5925,8 +5927,8 @@
         </p:nvSpPr>
         <p:spPr>
           <a:xfrm>
-            <a:off x="5596513" y="564444"/>
-            <a:ext cx="4605107" cy="1323439"/>
+            <a:off x="4427668" y="5991371"/>
+            <a:ext cx="3267241" cy="369332"/>
           </a:xfrm>
           <a:prstGeom prst="rect">
             <a:avLst/>
@@ -5939,431 +5941,203 @@
           </a:bodyPr>
           <a:lstStyle/>
           <a:p>
-            <a:pPr algn="r"/>
-            <a:r>
-              <a:rPr lang="en-US" sz="2000" dirty="0" err="1">
+            <a:r>
+              <a:rPr lang="en-US" dirty="0" err="1">
                 <a:latin typeface="Gill Sans MT" panose="020B0502020104020203" pitchFamily="34" charset="77"/>
                 <a:ea typeface="Trebuchet MS" charset="0"/>
                 <a:cs typeface="Trebuchet MS" charset="0"/>
               </a:rPr>
-              <a:t>Píxeles</a:t>
-            </a:r>
-            <a:r>
-              <a:rPr lang="en-US" sz="2000" dirty="0">
+              <a:t>Detección</a:t>
+            </a:r>
+            <a:r>
+              <a:rPr lang="en-US" dirty="0">
                 <a:latin typeface="Gill Sans MT" panose="020B0502020104020203" pitchFamily="34" charset="77"/>
                 <a:ea typeface="Trebuchet MS" charset="0"/>
                 <a:cs typeface="Trebuchet MS" charset="0"/>
               </a:rPr>
-              <a:t> magenta: </a:t>
-            </a:r>
-            <a:r>
-              <a:rPr lang="en-US" sz="2000" dirty="0" err="1">
+              <a:t> </a:t>
+            </a:r>
+            <a:r>
+              <a:rPr lang="en-US" dirty="0" err="1">
                 <a:latin typeface="Gill Sans MT" panose="020B0502020104020203" pitchFamily="34" charset="77"/>
                 <a:ea typeface="Trebuchet MS" charset="0"/>
                 <a:cs typeface="Trebuchet MS" charset="0"/>
               </a:rPr>
-              <a:t>Verdareos</a:t>
-            </a:r>
-            <a:r>
-              <a:rPr lang="en-US" sz="2000" dirty="0">
+              <a:t>usando</a:t>
+            </a:r>
+            <a:r>
+              <a:rPr lang="en-US" dirty="0">
                 <a:latin typeface="Gill Sans MT" panose="020B0502020104020203" pitchFamily="34" charset="77"/>
                 <a:ea typeface="Trebuchet MS" charset="0"/>
                 <a:cs typeface="Trebuchet MS" charset="0"/>
               </a:rPr>
-              <a:t> </a:t>
-            </a:r>
-            <a:r>
-              <a:rPr lang="en-US" sz="2000" dirty="0" err="1">
+              <a:t> un </a:t>
+            </a:r>
+            <a:r>
+              <a:rPr lang="en-US" dirty="0" err="1">
                 <a:latin typeface="Gill Sans MT" panose="020B0502020104020203" pitchFamily="34" charset="77"/>
                 <a:ea typeface="Trebuchet MS" charset="0"/>
                 <a:cs typeface="Trebuchet MS" charset="0"/>
               </a:rPr>
-              <a:t>Positivos</a:t>
-            </a:r>
-            <a:r>
-              <a:rPr lang="en-US" sz="2000" dirty="0">
+              <a:t>clasificador</a:t>
+            </a:r>
+            <a:endParaRPr lang="en-US" dirty="0">
+              <a:latin typeface="Gill Sans MT" panose="020B0502020104020203" pitchFamily="34" charset="77"/>
+              <a:ea typeface="Trebuchet MS" charset="0"/>
+              <a:cs typeface="Trebuchet MS" charset="0"/>
+            </a:endParaRPr>
+          </a:p>
+        </p:txBody>
+      </p:sp>
+      <p:sp>
+        <p:nvSpPr>
+          <p:cNvPr id="9" name="TextBox 8"/>
+          <p:cNvSpPr txBox="1"/>
+          <p:nvPr/>
+        </p:nvSpPr>
+        <p:spPr>
+          <a:xfrm>
+            <a:off x="8468139" y="2796883"/>
+            <a:ext cx="1539204" cy="369332"/>
+          </a:xfrm>
+          <a:prstGeom prst="rect">
+            <a:avLst/>
+          </a:prstGeom>
+          <a:noFill/>
+        </p:spPr>
+        <p:txBody>
+          <a:bodyPr wrap="none" rtlCol="0">
+            <a:spAutoFit/>
+          </a:bodyPr>
+          <a:lstStyle/>
+          <a:p>
+            <a:r>
+              <a:rPr lang="en-US">
                 <a:latin typeface="Gill Sans MT" panose="020B0502020104020203" pitchFamily="34" charset="77"/>
                 <a:ea typeface="Trebuchet MS" charset="0"/>
                 <a:cs typeface="Trebuchet MS" charset="0"/>
               </a:rPr>
-              <a:t> (TP)
-</a:t>
-            </a:r>
-            <a:r>
-              <a:rPr lang="en-US" sz="2000" dirty="0" err="1">
+              <a:t>Detección (D)</a:t>
+            </a:r>
+            <a:endParaRPr lang="en-US" dirty="0">
+              <a:latin typeface="Gill Sans MT" panose="020B0502020104020203" pitchFamily="34" charset="77"/>
+              <a:ea typeface="Trebuchet MS" charset="0"/>
+              <a:cs typeface="Trebuchet MS" charset="0"/>
+            </a:endParaRPr>
+          </a:p>
+        </p:txBody>
+      </p:sp>
+      <p:cxnSp>
+        <p:nvCxnSpPr>
+          <p:cNvPr id="10" name="Straight Connector 9"/>
+          <p:cNvCxnSpPr/>
+          <p:nvPr/>
+        </p:nvCxnSpPr>
+        <p:spPr>
+          <a:xfrm flipH="1">
+            <a:off x="6544302" y="3166216"/>
+            <a:ext cx="1935698" cy="122417"/>
+          </a:xfrm>
+          <a:prstGeom prst="line">
+            <a:avLst/>
+          </a:prstGeom>
+          <a:ln w="12700">
+            <a:solidFill>
+              <a:schemeClr val="tx1"/>
+            </a:solidFill>
+            <a:prstDash val="solid"/>
+          </a:ln>
+        </p:spPr>
+        <p:style>
+          <a:lnRef idx="2">
+            <a:schemeClr val="accent1"/>
+          </a:lnRef>
+          <a:fillRef idx="0">
+            <a:schemeClr val="accent1"/>
+          </a:fillRef>
+          <a:effectRef idx="1">
+            <a:schemeClr val="accent1"/>
+          </a:effectRef>
+          <a:fontRef idx="minor">
+            <a:schemeClr val="tx1"/>
+          </a:fontRef>
+        </p:style>
+      </p:cxnSp>
+      <p:sp>
+        <p:nvSpPr>
+          <p:cNvPr id="11" name="TextBox 10"/>
+          <p:cNvSpPr txBox="1"/>
+          <p:nvPr/>
+        </p:nvSpPr>
+        <p:spPr>
+          <a:xfrm>
+            <a:off x="1898897" y="3879724"/>
+            <a:ext cx="1461297" cy="369332"/>
+          </a:xfrm>
+          <a:prstGeom prst="rect">
+            <a:avLst/>
+          </a:prstGeom>
+          <a:noFill/>
+        </p:spPr>
+        <p:txBody>
+          <a:bodyPr wrap="none" rtlCol="0">
+            <a:spAutoFit/>
+          </a:bodyPr>
+          <a:lstStyle/>
+          <a:p>
+            <a:r>
+              <a:rPr lang="en-US" dirty="0">
                 <a:latin typeface="Gill Sans MT" panose="020B0502020104020203" pitchFamily="34" charset="77"/>
                 <a:ea typeface="Trebuchet MS" charset="0"/>
                 <a:cs typeface="Trebuchet MS" charset="0"/>
               </a:rPr>
-              <a:t>Píxeles</a:t>
-            </a:r>
-            <a:r>
-              <a:rPr lang="en-US" sz="2000" dirty="0">
-                <a:latin typeface="Gill Sans MT" panose="020B0502020104020203" pitchFamily="34" charset="77"/>
-                <a:ea typeface="Trebuchet MS" charset="0"/>
-                <a:cs typeface="Trebuchet MS" charset="0"/>
-              </a:rPr>
-              <a:t> </a:t>
-            </a:r>
-            <a:r>
-              <a:rPr lang="en-US" sz="2000" dirty="0" err="1">
-                <a:latin typeface="Gill Sans MT" panose="020B0502020104020203" pitchFamily="34" charset="77"/>
-                <a:ea typeface="Trebuchet MS" charset="0"/>
-                <a:cs typeface="Trebuchet MS" charset="0"/>
-              </a:rPr>
-              <a:t>azules</a:t>
-            </a:r>
-            <a:r>
-              <a:rPr lang="en-US" sz="2000" dirty="0">
-                <a:latin typeface="Gill Sans MT" panose="020B0502020104020203" pitchFamily="34" charset="77"/>
-                <a:ea typeface="Trebuchet MS" charset="0"/>
-                <a:cs typeface="Trebuchet MS" charset="0"/>
-              </a:rPr>
-              <a:t>: </a:t>
-            </a:r>
-            <a:r>
-              <a:rPr lang="en-US" sz="2000" dirty="0" err="1">
-                <a:latin typeface="Gill Sans MT" panose="020B0502020104020203" pitchFamily="34" charset="77"/>
-                <a:ea typeface="Trebuchet MS" charset="0"/>
-                <a:cs typeface="Trebuchet MS" charset="0"/>
-              </a:rPr>
-              <a:t>falsos</a:t>
-            </a:r>
-            <a:r>
-              <a:rPr lang="en-US" sz="2000" dirty="0">
-                <a:latin typeface="Gill Sans MT" panose="020B0502020104020203" pitchFamily="34" charset="77"/>
-                <a:ea typeface="Trebuchet MS" charset="0"/>
-                <a:cs typeface="Trebuchet MS" charset="0"/>
-              </a:rPr>
-              <a:t> </a:t>
-            </a:r>
-            <a:r>
-              <a:rPr lang="en-US" sz="2000" dirty="0" err="1">
-                <a:latin typeface="Gill Sans MT" panose="020B0502020104020203" pitchFamily="34" charset="77"/>
-                <a:ea typeface="Trebuchet MS" charset="0"/>
-                <a:cs typeface="Trebuchet MS" charset="0"/>
-              </a:rPr>
-              <a:t>positivos</a:t>
-            </a:r>
-            <a:r>
-              <a:rPr lang="en-US" sz="2000" dirty="0">
-                <a:latin typeface="Gill Sans MT" panose="020B0502020104020203" pitchFamily="34" charset="77"/>
-                <a:ea typeface="Trebuchet MS" charset="0"/>
-                <a:cs typeface="Trebuchet MS" charset="0"/>
-              </a:rPr>
-              <a:t> (FP)
-</a:t>
-            </a:r>
-            <a:r>
-              <a:rPr lang="en-US" sz="2000" dirty="0" err="1">
-                <a:latin typeface="Gill Sans MT" panose="020B0502020104020203" pitchFamily="34" charset="77"/>
-                <a:ea typeface="Trebuchet MS" charset="0"/>
-                <a:cs typeface="Trebuchet MS" charset="0"/>
-              </a:rPr>
-              <a:t>Píxeles</a:t>
-            </a:r>
-            <a:r>
-              <a:rPr lang="en-US" sz="2000" dirty="0">
-                <a:latin typeface="Gill Sans MT" panose="020B0502020104020203" pitchFamily="34" charset="77"/>
-                <a:ea typeface="Trebuchet MS" charset="0"/>
-                <a:cs typeface="Trebuchet MS" charset="0"/>
-              </a:rPr>
-              <a:t> </a:t>
-            </a:r>
-            <a:r>
-              <a:rPr lang="en-US" sz="2000" dirty="0" err="1">
-                <a:latin typeface="Gill Sans MT" panose="020B0502020104020203" pitchFamily="34" charset="77"/>
-                <a:ea typeface="Trebuchet MS" charset="0"/>
-                <a:cs typeface="Trebuchet MS" charset="0"/>
-              </a:rPr>
-              <a:t>rojos</a:t>
-            </a:r>
-            <a:r>
-              <a:rPr lang="en-US" sz="2000" dirty="0">
-                <a:latin typeface="Gill Sans MT" panose="020B0502020104020203" pitchFamily="34" charset="77"/>
-                <a:ea typeface="Trebuchet MS" charset="0"/>
-                <a:cs typeface="Trebuchet MS" charset="0"/>
-              </a:rPr>
-              <a:t>: </a:t>
-            </a:r>
-            <a:r>
-              <a:rPr lang="en-US" sz="2000" dirty="0" err="1">
-                <a:latin typeface="Gill Sans MT" panose="020B0502020104020203" pitchFamily="34" charset="77"/>
-                <a:ea typeface="Trebuchet MS" charset="0"/>
-                <a:cs typeface="Trebuchet MS" charset="0"/>
-              </a:rPr>
-              <a:t>falsos</a:t>
-            </a:r>
-            <a:r>
-              <a:rPr lang="en-US" sz="2000" dirty="0">
-                <a:latin typeface="Gill Sans MT" panose="020B0502020104020203" pitchFamily="34" charset="77"/>
-                <a:ea typeface="Trebuchet MS" charset="0"/>
-                <a:cs typeface="Trebuchet MS" charset="0"/>
-              </a:rPr>
-              <a:t> </a:t>
-            </a:r>
-            <a:r>
-              <a:rPr lang="en-US" sz="2000" dirty="0" err="1">
-                <a:latin typeface="Gill Sans MT" panose="020B0502020104020203" pitchFamily="34" charset="77"/>
-                <a:ea typeface="Trebuchet MS" charset="0"/>
-                <a:cs typeface="Trebuchet MS" charset="0"/>
-              </a:rPr>
-              <a:t>negativos</a:t>
-            </a:r>
-            <a:r>
-              <a:rPr lang="en-US" sz="2000" dirty="0">
-                <a:latin typeface="Gill Sans MT" panose="020B0502020104020203" pitchFamily="34" charset="77"/>
-                <a:ea typeface="Trebuchet MS" charset="0"/>
-                <a:cs typeface="Trebuchet MS" charset="0"/>
-              </a:rPr>
-              <a:t> (FN)
-</a:t>
-            </a:r>
-            <a:r>
-              <a:rPr lang="en-US" sz="2000" dirty="0" err="1">
-                <a:latin typeface="Gill Sans MT" panose="020B0502020104020203" pitchFamily="34" charset="77"/>
-                <a:ea typeface="Trebuchet MS" charset="0"/>
-                <a:cs typeface="Trebuchet MS" charset="0"/>
-              </a:rPr>
-              <a:t>Píxeles</a:t>
-            </a:r>
-            <a:r>
-              <a:rPr lang="en-US" sz="2000" dirty="0">
-                <a:latin typeface="Gill Sans MT" panose="020B0502020104020203" pitchFamily="34" charset="77"/>
-                <a:ea typeface="Trebuchet MS" charset="0"/>
-                <a:cs typeface="Trebuchet MS" charset="0"/>
-              </a:rPr>
-              <a:t> </a:t>
-            </a:r>
-            <a:r>
-              <a:rPr lang="en-US" sz="2000" dirty="0" err="1">
-                <a:latin typeface="Gill Sans MT" panose="020B0502020104020203" pitchFamily="34" charset="77"/>
-                <a:ea typeface="Trebuchet MS" charset="0"/>
-                <a:cs typeface="Trebuchet MS" charset="0"/>
-              </a:rPr>
-              <a:t>blancos</a:t>
-            </a:r>
-            <a:r>
-              <a:rPr lang="en-US" sz="2000" dirty="0">
-                <a:latin typeface="Gill Sans MT" panose="020B0502020104020203" pitchFamily="34" charset="77"/>
-                <a:ea typeface="Trebuchet MS" charset="0"/>
-                <a:cs typeface="Trebuchet MS" charset="0"/>
-              </a:rPr>
-              <a:t>: Verdaderos </a:t>
-            </a:r>
-            <a:r>
-              <a:rPr lang="en-US" sz="2000" dirty="0" err="1">
-                <a:latin typeface="Gill Sans MT" panose="020B0502020104020203" pitchFamily="34" charset="77"/>
-                <a:ea typeface="Trebuchet MS" charset="0"/>
-                <a:cs typeface="Trebuchet MS" charset="0"/>
-              </a:rPr>
-              <a:t>negativos</a:t>
-            </a:r>
-            <a:r>
-              <a:rPr lang="en-US" sz="2000" dirty="0">
-                <a:latin typeface="Gill Sans MT" panose="020B0502020104020203" pitchFamily="34" charset="77"/>
-                <a:ea typeface="Trebuchet MS" charset="0"/>
-                <a:cs typeface="Trebuchet MS" charset="0"/>
-              </a:rPr>
-              <a:t> (TN)</a:t>
-            </a:r>
-          </a:p>
-        </p:txBody>
-      </p:sp>
-      <p:sp>
-        <p:nvSpPr>
-          <p:cNvPr id="9" name="Rectangle 8"/>
-          <p:cNvSpPr/>
-          <p:nvPr/>
-        </p:nvSpPr>
-        <p:spPr>
-          <a:xfrm>
-            <a:off x="10208155" y="626555"/>
-            <a:ext cx="245904" cy="252070"/>
-          </a:xfrm>
-          <a:prstGeom prst="rect">
-            <a:avLst/>
-          </a:prstGeom>
-          <a:solidFill>
-            <a:srgbClr val="9D2E5D"/>
-          </a:solidFill>
-          <a:ln>
-            <a:noFill/>
+              <a:t>Ground Truth</a:t>
+            </a:r>
+          </a:p>
+        </p:txBody>
+      </p:sp>
+      <p:cxnSp>
+        <p:nvCxnSpPr>
+          <p:cNvPr id="12" name="Straight Connector 11"/>
+          <p:cNvCxnSpPr/>
+          <p:nvPr/>
+        </p:nvCxnSpPr>
+        <p:spPr>
+          <a:xfrm flipH="1">
+            <a:off x="2894723" y="4249057"/>
+            <a:ext cx="1935698" cy="122417"/>
+          </a:xfrm>
+          <a:prstGeom prst="line">
+            <a:avLst/>
+          </a:prstGeom>
+          <a:ln w="12700">
+            <a:solidFill>
+              <a:schemeClr val="tx1"/>
+            </a:solidFill>
+            <a:prstDash val="solid"/>
           </a:ln>
         </p:spPr>
         <p:style>
-          <a:lnRef idx="1">
+          <a:lnRef idx="2">
             <a:schemeClr val="accent1"/>
           </a:lnRef>
-          <a:fillRef idx="3">
+          <a:fillRef idx="0">
             <a:schemeClr val="accent1"/>
           </a:fillRef>
-          <a:effectRef idx="2">
+          <a:effectRef idx="1">
             <a:schemeClr val="accent1"/>
           </a:effectRef>
           <a:fontRef idx="minor">
-            <a:schemeClr val="lt1"/>
+            <a:schemeClr val="tx1"/>
           </a:fontRef>
         </p:style>
-        <p:txBody>
-          <a:bodyPr rtlCol="0" anchor="ctr"/>
-          <a:lstStyle/>
-          <a:p>
-            <a:pPr algn="ctr"/>
-            <a:endParaRPr lang="en-US" dirty="0">
-              <a:latin typeface="Gill Sans MT" panose="020B0502020104020203" pitchFamily="34" charset="77"/>
-            </a:endParaRPr>
-          </a:p>
-        </p:txBody>
-      </p:sp>
-      <p:sp>
-        <p:nvSpPr>
-          <p:cNvPr id="10" name="Rectangle 9"/>
-          <p:cNvSpPr/>
-          <p:nvPr/>
-        </p:nvSpPr>
-        <p:spPr>
-          <a:xfrm>
-            <a:off x="10208155" y="935100"/>
-            <a:ext cx="245904" cy="252070"/>
-          </a:xfrm>
-          <a:prstGeom prst="rect">
-            <a:avLst/>
-          </a:prstGeom>
-          <a:solidFill>
-            <a:srgbClr val="9AABDA"/>
-          </a:solidFill>
-          <a:ln>
-            <a:noFill/>
-          </a:ln>
-        </p:spPr>
-        <p:style>
-          <a:lnRef idx="1">
-            <a:schemeClr val="accent1"/>
-          </a:lnRef>
-          <a:fillRef idx="3">
-            <a:schemeClr val="accent1"/>
-          </a:fillRef>
-          <a:effectRef idx="2">
-            <a:schemeClr val="accent1"/>
-          </a:effectRef>
-          <a:fontRef idx="minor">
-            <a:schemeClr val="lt1"/>
-          </a:fontRef>
-        </p:style>
-        <p:txBody>
-          <a:bodyPr rtlCol="0" anchor="ctr"/>
-          <a:lstStyle/>
-          <a:p>
-            <a:pPr algn="ctr"/>
-            <a:endParaRPr lang="en-US" dirty="0">
-              <a:latin typeface="Gill Sans MT" panose="020B0502020104020203" pitchFamily="34" charset="77"/>
-            </a:endParaRPr>
-          </a:p>
-        </p:txBody>
-      </p:sp>
-      <p:sp>
-        <p:nvSpPr>
-          <p:cNvPr id="11" name="Rectangle 10"/>
-          <p:cNvSpPr/>
-          <p:nvPr/>
-        </p:nvSpPr>
-        <p:spPr>
-          <a:xfrm>
-            <a:off x="10203732" y="1241090"/>
-            <a:ext cx="245904" cy="252070"/>
-          </a:xfrm>
-          <a:prstGeom prst="rect">
-            <a:avLst/>
-          </a:prstGeom>
-          <a:solidFill>
-            <a:srgbClr val="FF0000"/>
-          </a:solidFill>
-          <a:ln>
-            <a:noFill/>
-          </a:ln>
-        </p:spPr>
-        <p:style>
-          <a:lnRef idx="1">
-            <a:schemeClr val="accent1"/>
-          </a:lnRef>
-          <a:fillRef idx="3">
-            <a:schemeClr val="accent1"/>
-          </a:fillRef>
-          <a:effectRef idx="2">
-            <a:schemeClr val="accent1"/>
-          </a:effectRef>
-          <a:fontRef idx="minor">
-            <a:schemeClr val="lt1"/>
-          </a:fontRef>
-        </p:style>
-        <p:txBody>
-          <a:bodyPr rtlCol="0" anchor="ctr"/>
-          <a:lstStyle/>
-          <a:p>
-            <a:pPr algn="ctr"/>
-            <a:endParaRPr lang="en-US" dirty="0">
-              <a:latin typeface="Gill Sans MT" panose="020B0502020104020203" pitchFamily="34" charset="77"/>
-            </a:endParaRPr>
-          </a:p>
-        </p:txBody>
-      </p:sp>
-      <p:sp>
-        <p:nvSpPr>
-          <p:cNvPr id="12" name="Rectangle 11"/>
-          <p:cNvSpPr/>
-          <p:nvPr/>
-        </p:nvSpPr>
-        <p:spPr>
-          <a:xfrm>
-            <a:off x="10203732" y="1567121"/>
-            <a:ext cx="245904" cy="252070"/>
-          </a:xfrm>
-          <a:prstGeom prst="rect">
-            <a:avLst/>
-          </a:prstGeom>
-          <a:solidFill>
-            <a:schemeClr val="bg1"/>
-          </a:solidFill>
-          <a:ln>
-            <a:solidFill>
-              <a:schemeClr val="bg1">
-                <a:lumMod val="65000"/>
-              </a:schemeClr>
-            </a:solidFill>
-          </a:ln>
-        </p:spPr>
-        <p:style>
-          <a:lnRef idx="1">
-            <a:schemeClr val="accent1"/>
-          </a:lnRef>
-          <a:fillRef idx="3">
-            <a:schemeClr val="accent1"/>
-          </a:fillRef>
-          <a:effectRef idx="2">
-            <a:schemeClr val="accent1"/>
-          </a:effectRef>
-          <a:fontRef idx="minor">
-            <a:schemeClr val="lt1"/>
-          </a:fontRef>
-        </p:style>
-        <p:txBody>
-          <a:bodyPr rtlCol="0" anchor="ctr"/>
-          <a:lstStyle/>
-          <a:p>
-            <a:pPr algn="ctr"/>
-            <a:endParaRPr lang="en-US" dirty="0">
-              <a:latin typeface="Gill Sans MT" panose="020B0502020104020203" pitchFamily="34" charset="77"/>
-            </a:endParaRPr>
-          </a:p>
-        </p:txBody>
-      </p:sp>
+      </p:cxnSp>
       <p:sp>
         <p:nvSpPr>
           <p:cNvPr id="2" name="Slide Number Placeholder 1">
             <a:extLst>
               <a:ext uri="{FF2B5EF4-FFF2-40B4-BE49-F238E27FC236}">
-                <a16:creationId xmlns:a16="http://schemas.microsoft.com/office/drawing/2014/main" id="{7E3D98C5-FF0D-884F-9493-F438E9BBD711}"/>
+                <a16:creationId xmlns:a16="http://schemas.microsoft.com/office/drawing/2014/main" id="{629EC51D-8E69-7248-B6D2-713DC2C7BD60}"/>
               </a:ext>
             </a:extLst>
           </p:cNvPr>
@@ -6389,177 +6163,10 @@
       </p:sp>
       <p:sp>
         <p:nvSpPr>
-          <p:cNvPr id="14" name="TextBox 13">
+          <p:cNvPr id="3" name="TextBox 2">
             <a:extLst>
               <a:ext uri="{FF2B5EF4-FFF2-40B4-BE49-F238E27FC236}">
-                <a16:creationId xmlns:a16="http://schemas.microsoft.com/office/drawing/2014/main" id="{6131F7A4-785B-8641-A05F-7AAC3DE1D68A}"/>
-              </a:ext>
-            </a:extLst>
-          </p:cNvPr>
-          <p:cNvSpPr txBox="1"/>
-          <p:nvPr/>
-        </p:nvSpPr>
-        <p:spPr>
-          <a:xfrm>
-            <a:off x="8468139" y="2796883"/>
-            <a:ext cx="1539204" cy="369332"/>
-          </a:xfrm>
-          <a:prstGeom prst="rect">
-            <a:avLst/>
-          </a:prstGeom>
-          <a:noFill/>
-        </p:spPr>
-        <p:txBody>
-          <a:bodyPr wrap="none" rtlCol="0">
-            <a:spAutoFit/>
-          </a:bodyPr>
-          <a:lstStyle/>
-          <a:p>
-            <a:r>
-              <a:rPr lang="en-US">
-                <a:latin typeface="Gill Sans MT" panose="020B0502020104020203" pitchFamily="34" charset="77"/>
-                <a:ea typeface="Trebuchet MS" charset="0"/>
-                <a:cs typeface="Trebuchet MS" charset="0"/>
-              </a:rPr>
-              <a:t>Detección (D)</a:t>
-            </a:r>
-            <a:endParaRPr lang="en-US" dirty="0">
-              <a:latin typeface="Gill Sans MT" panose="020B0502020104020203" pitchFamily="34" charset="77"/>
-              <a:ea typeface="Trebuchet MS" charset="0"/>
-              <a:cs typeface="Trebuchet MS" charset="0"/>
-            </a:endParaRPr>
-          </a:p>
-        </p:txBody>
-      </p:sp>
-      <p:cxnSp>
-        <p:nvCxnSpPr>
-          <p:cNvPr id="15" name="Straight Connector 14">
-            <a:extLst>
-              <a:ext uri="{FF2B5EF4-FFF2-40B4-BE49-F238E27FC236}">
-                <a16:creationId xmlns:a16="http://schemas.microsoft.com/office/drawing/2014/main" id="{FC2317E2-7C9B-B648-BE61-96D87F389CFB}"/>
-              </a:ext>
-            </a:extLst>
-          </p:cNvPr>
-          <p:cNvCxnSpPr/>
-          <p:nvPr/>
-        </p:nvCxnSpPr>
-        <p:spPr>
-          <a:xfrm flipH="1">
-            <a:off x="6544302" y="3166216"/>
-            <a:ext cx="1935698" cy="122417"/>
-          </a:xfrm>
-          <a:prstGeom prst="line">
-            <a:avLst/>
-          </a:prstGeom>
-          <a:ln w="12700">
-            <a:solidFill>
-              <a:schemeClr val="tx1"/>
-            </a:solidFill>
-            <a:prstDash val="solid"/>
-          </a:ln>
-        </p:spPr>
-        <p:style>
-          <a:lnRef idx="2">
-            <a:schemeClr val="accent1"/>
-          </a:lnRef>
-          <a:fillRef idx="0">
-            <a:schemeClr val="accent1"/>
-          </a:fillRef>
-          <a:effectRef idx="1">
-            <a:schemeClr val="accent1"/>
-          </a:effectRef>
-          <a:fontRef idx="minor">
-            <a:schemeClr val="tx1"/>
-          </a:fontRef>
-        </p:style>
-      </p:cxnSp>
-      <p:sp>
-        <p:nvSpPr>
-          <p:cNvPr id="16" name="TextBox 15">
-            <a:extLst>
-              <a:ext uri="{FF2B5EF4-FFF2-40B4-BE49-F238E27FC236}">
-                <a16:creationId xmlns:a16="http://schemas.microsoft.com/office/drawing/2014/main" id="{D3C45CFA-9B61-3443-A594-9D1F0E21F685}"/>
-              </a:ext>
-            </a:extLst>
-          </p:cNvPr>
-          <p:cNvSpPr txBox="1"/>
-          <p:nvPr/>
-        </p:nvSpPr>
-        <p:spPr>
-          <a:xfrm>
-            <a:off x="1898897" y="3879724"/>
-            <a:ext cx="1461297" cy="369332"/>
-          </a:xfrm>
-          <a:prstGeom prst="rect">
-            <a:avLst/>
-          </a:prstGeom>
-          <a:noFill/>
-        </p:spPr>
-        <p:txBody>
-          <a:bodyPr wrap="none" rtlCol="0">
-            <a:spAutoFit/>
-          </a:bodyPr>
-          <a:lstStyle/>
-          <a:p>
-            <a:r>
-              <a:rPr lang="en-US" dirty="0">
-                <a:latin typeface="Gill Sans MT" panose="020B0502020104020203" pitchFamily="34" charset="77"/>
-                <a:ea typeface="Trebuchet MS" charset="0"/>
-                <a:cs typeface="Trebuchet MS" charset="0"/>
-              </a:rPr>
-              <a:t>Ground Truth</a:t>
-            </a:r>
-          </a:p>
-        </p:txBody>
-      </p:sp>
-      <p:cxnSp>
-        <p:nvCxnSpPr>
-          <p:cNvPr id="17" name="Straight Connector 16">
-            <a:extLst>
-              <a:ext uri="{FF2B5EF4-FFF2-40B4-BE49-F238E27FC236}">
-                <a16:creationId xmlns:a16="http://schemas.microsoft.com/office/drawing/2014/main" id="{96326107-3E36-BA42-A9DE-6CFF3C948475}"/>
-              </a:ext>
-            </a:extLst>
-          </p:cNvPr>
-          <p:cNvCxnSpPr/>
-          <p:nvPr/>
-        </p:nvCxnSpPr>
-        <p:spPr>
-          <a:xfrm flipH="1">
-            <a:off x="2894723" y="4249057"/>
-            <a:ext cx="1935698" cy="122417"/>
-          </a:xfrm>
-          <a:prstGeom prst="line">
-            <a:avLst/>
-          </a:prstGeom>
-          <a:ln w="12700">
-            <a:solidFill>
-              <a:schemeClr val="tx1"/>
-            </a:solidFill>
-            <a:prstDash val="solid"/>
-          </a:ln>
-        </p:spPr>
-        <p:style>
-          <a:lnRef idx="2">
-            <a:schemeClr val="accent1"/>
-          </a:lnRef>
-          <a:fillRef idx="0">
-            <a:schemeClr val="accent1"/>
-          </a:fillRef>
-          <a:effectRef idx="1">
-            <a:schemeClr val="accent1"/>
-          </a:effectRef>
-          <a:fontRef idx="minor">
-            <a:schemeClr val="tx1"/>
-          </a:fontRef>
-        </p:style>
-      </p:cxnSp>
-      <p:sp>
-        <p:nvSpPr>
-          <p:cNvPr id="3" name="TextBox 2">
-            <a:extLst>
-              <a:ext uri="{FF2B5EF4-FFF2-40B4-BE49-F238E27FC236}">
-                <a16:creationId xmlns:a16="http://schemas.microsoft.com/office/drawing/2014/main" id="{F96000AC-D2AD-0BBC-E293-1873B51076A9}"/>
+                <a16:creationId xmlns:a16="http://schemas.microsoft.com/office/drawing/2014/main" id="{A9AE4155-9271-8466-9555-4D70A3EBB7AD}"/>
               </a:ext>
             </a:extLst>
           </p:cNvPr>
@@ -6607,7 +6214,7 @@
     </p:spTree>
     <p:extLst>
       <p:ext uri="{BB962C8B-B14F-4D97-AF65-F5344CB8AC3E}">
-        <p14:creationId xmlns:p14="http://schemas.microsoft.com/office/powerpoint/2010/main" val="1689893819"/>
+        <p14:creationId xmlns:p14="http://schemas.microsoft.com/office/powerpoint/2010/main" val="45036021"/>
       </p:ext>
     </p:extLst>
   </p:cSld>
@@ -6770,9 +6377,10 @@
               </a:path>
             </a:pathLst>
           </a:custGeom>
-          <a:solidFill>
-            <a:srgbClr val="FF0000"/>
-          </a:solidFill>
+          <a:noFill/>
+          <a:ln>
+            <a:prstDash val="dash"/>
+          </a:ln>
         </p:spPr>
         <p:style>
           <a:lnRef idx="1">
@@ -7009,168 +6617,153 @@
       </p:sp>
       <p:sp>
         <p:nvSpPr>
-          <p:cNvPr id="2" name="Rectangle 1"/>
-          <p:cNvSpPr/>
-          <p:nvPr/>
-        </p:nvSpPr>
-        <p:spPr>
-          <a:xfrm>
-            <a:off x="5926813" y="3954021"/>
-            <a:ext cx="388248" cy="307777"/>
+          <p:cNvPr id="9" name="TextBox 8"/>
+          <p:cNvSpPr txBox="1"/>
+          <p:nvPr/>
+        </p:nvSpPr>
+        <p:spPr>
+          <a:xfrm>
+            <a:off x="8468139" y="2796883"/>
+            <a:ext cx="1539204" cy="369332"/>
           </a:xfrm>
           <a:prstGeom prst="rect">
             <a:avLst/>
           </a:prstGeom>
-        </p:spPr>
-        <p:txBody>
-          <a:bodyPr wrap="none">
+          <a:noFill/>
+        </p:spPr>
+        <p:txBody>
+          <a:bodyPr wrap="none" rtlCol="0">
             <a:spAutoFit/>
           </a:bodyPr>
           <a:lstStyle/>
           <a:p>
             <a:r>
-              <a:rPr lang="en-US" sz="1400" dirty="0">
-                <a:solidFill>
-                  <a:schemeClr val="bg1"/>
-                </a:solidFill>
+              <a:rPr lang="en-US">
                 <a:latin typeface="Gill Sans MT" panose="020B0502020104020203" pitchFamily="34" charset="77"/>
                 <a:ea typeface="Trebuchet MS" charset="0"/>
                 <a:cs typeface="Trebuchet MS" charset="0"/>
               </a:rPr>
-              <a:t>TP</a:t>
-            </a:r>
-            <a:endParaRPr lang="en-US" sz="1400" dirty="0">
-              <a:solidFill>
-                <a:schemeClr val="bg1"/>
-              </a:solidFill>
+              <a:t>Detección (D)</a:t>
+            </a:r>
+            <a:endParaRPr lang="en-US" dirty="0">
               <a:latin typeface="Gill Sans MT" panose="020B0502020104020203" pitchFamily="34" charset="77"/>
+              <a:ea typeface="Trebuchet MS" charset="0"/>
+              <a:cs typeface="Trebuchet MS" charset="0"/>
             </a:endParaRPr>
           </a:p>
         </p:txBody>
       </p:sp>
-      <p:sp>
-        <p:nvSpPr>
-          <p:cNvPr id="9" name="Rectangle 8"/>
-          <p:cNvSpPr/>
-          <p:nvPr/>
-        </p:nvSpPr>
-        <p:spPr>
-          <a:xfrm>
-            <a:off x="6925375" y="4529509"/>
-            <a:ext cx="360996" cy="307777"/>
+      <p:cxnSp>
+        <p:nvCxnSpPr>
+          <p:cNvPr id="3" name="Straight Connector 2"/>
+          <p:cNvCxnSpPr/>
+          <p:nvPr/>
+        </p:nvCxnSpPr>
+        <p:spPr>
+          <a:xfrm flipH="1">
+            <a:off x="6544302" y="3166216"/>
+            <a:ext cx="1935698" cy="122417"/>
+          </a:xfrm>
+          <a:prstGeom prst="line">
+            <a:avLst/>
+          </a:prstGeom>
+          <a:ln w="12700">
+            <a:solidFill>
+              <a:schemeClr val="tx1"/>
+            </a:solidFill>
+            <a:prstDash val="solid"/>
+          </a:ln>
+        </p:spPr>
+        <p:style>
+          <a:lnRef idx="2">
+            <a:schemeClr val="accent1"/>
+          </a:lnRef>
+          <a:fillRef idx="0">
+            <a:schemeClr val="accent1"/>
+          </a:fillRef>
+          <a:effectRef idx="1">
+            <a:schemeClr val="accent1"/>
+          </a:effectRef>
+          <a:fontRef idx="minor">
+            <a:schemeClr val="tx1"/>
+          </a:fontRef>
+        </p:style>
+      </p:cxnSp>
+      <p:sp>
+        <p:nvSpPr>
+          <p:cNvPr id="11" name="TextBox 10"/>
+          <p:cNvSpPr txBox="1"/>
+          <p:nvPr/>
+        </p:nvSpPr>
+        <p:spPr>
+          <a:xfrm>
+            <a:off x="1898897" y="3879724"/>
+            <a:ext cx="1461297" cy="369332"/>
           </a:xfrm>
           <a:prstGeom prst="rect">
             <a:avLst/>
           </a:prstGeom>
-        </p:spPr>
-        <p:txBody>
-          <a:bodyPr wrap="none">
+          <a:noFill/>
+        </p:spPr>
+        <p:txBody>
+          <a:bodyPr wrap="none" rtlCol="0">
             <a:spAutoFit/>
           </a:bodyPr>
           <a:lstStyle/>
           <a:p>
             <a:r>
-              <a:rPr lang="en-US" sz="1400" dirty="0">
-                <a:solidFill>
-                  <a:schemeClr val="bg1"/>
-                </a:solidFill>
+              <a:rPr lang="en-US" dirty="0">
                 <a:latin typeface="Gill Sans MT" panose="020B0502020104020203" pitchFamily="34" charset="77"/>
                 <a:ea typeface="Trebuchet MS" charset="0"/>
                 <a:cs typeface="Trebuchet MS" charset="0"/>
               </a:rPr>
-              <a:t>FP</a:t>
-            </a:r>
-            <a:endParaRPr lang="en-US" sz="1400" dirty="0">
-              <a:solidFill>
-                <a:schemeClr val="bg1"/>
-              </a:solidFill>
-              <a:latin typeface="Gill Sans MT" panose="020B0502020104020203" pitchFamily="34" charset="77"/>
-            </a:endParaRPr>
-          </a:p>
-        </p:txBody>
-      </p:sp>
-      <p:sp>
-        <p:nvSpPr>
-          <p:cNvPr id="10" name="Rectangle 9"/>
-          <p:cNvSpPr/>
-          <p:nvPr/>
-        </p:nvSpPr>
-        <p:spPr>
-          <a:xfrm>
-            <a:off x="4496066" y="3710637"/>
-            <a:ext cx="409086" cy="307777"/>
-          </a:xfrm>
-          <a:prstGeom prst="rect">
-            <a:avLst/>
-          </a:prstGeom>
-        </p:spPr>
-        <p:txBody>
-          <a:bodyPr wrap="none">
-            <a:spAutoFit/>
-          </a:bodyPr>
-          <a:lstStyle/>
-          <a:p>
-            <a:r>
-              <a:rPr lang="en-US" sz="1400" dirty="0">
-                <a:solidFill>
-                  <a:schemeClr val="bg1"/>
-                </a:solidFill>
-                <a:latin typeface="Gill Sans MT" panose="020B0502020104020203" pitchFamily="34" charset="77"/>
-                <a:ea typeface="Trebuchet MS" charset="0"/>
-                <a:cs typeface="Trebuchet MS" charset="0"/>
-              </a:rPr>
-              <a:t>FN</a:t>
-            </a:r>
-            <a:endParaRPr lang="en-US" sz="1400" dirty="0">
-              <a:solidFill>
-                <a:schemeClr val="bg1"/>
-              </a:solidFill>
-              <a:latin typeface="Gill Sans MT" panose="020B0502020104020203" pitchFamily="34" charset="77"/>
-            </a:endParaRPr>
-          </a:p>
-        </p:txBody>
-      </p:sp>
-      <p:sp>
-        <p:nvSpPr>
-          <p:cNvPr id="11" name="Rectangle 10"/>
-          <p:cNvSpPr/>
-          <p:nvPr/>
-        </p:nvSpPr>
-        <p:spPr>
-          <a:xfrm>
-            <a:off x="4307267" y="5132281"/>
-            <a:ext cx="433132" cy="307777"/>
-          </a:xfrm>
-          <a:prstGeom prst="rect">
-            <a:avLst/>
-          </a:prstGeom>
-        </p:spPr>
-        <p:txBody>
-          <a:bodyPr wrap="none">
-            <a:spAutoFit/>
-          </a:bodyPr>
-          <a:lstStyle/>
-          <a:p>
-            <a:r>
-              <a:rPr lang="en-US" sz="1400" dirty="0">
-                <a:latin typeface="Gill Sans MT" panose="020B0502020104020203" pitchFamily="34" charset="77"/>
-                <a:ea typeface="Trebuchet MS" charset="0"/>
-                <a:cs typeface="Trebuchet MS" charset="0"/>
-              </a:rPr>
-              <a:t>TN</a:t>
-            </a:r>
-            <a:endParaRPr lang="en-US" sz="1400" dirty="0">
-              <a:latin typeface="Gill Sans MT" panose="020B0502020104020203" pitchFamily="34" charset="77"/>
-            </a:endParaRPr>
-          </a:p>
-        </p:txBody>
-      </p:sp>
-      <p:sp>
-        <p:nvSpPr>
-          <p:cNvPr id="3" name="Slide Number Placeholder 2">
+              <a:t>Ground Truth</a:t>
+            </a:r>
+          </a:p>
+        </p:txBody>
+      </p:sp>
+      <p:cxnSp>
+        <p:nvCxnSpPr>
+          <p:cNvPr id="12" name="Straight Connector 11"/>
+          <p:cNvCxnSpPr/>
+          <p:nvPr/>
+        </p:nvCxnSpPr>
+        <p:spPr>
+          <a:xfrm flipH="1">
+            <a:off x="2894723" y="4249057"/>
+            <a:ext cx="1935698" cy="122417"/>
+          </a:xfrm>
+          <a:prstGeom prst="line">
+            <a:avLst/>
+          </a:prstGeom>
+          <a:ln w="12700">
+            <a:solidFill>
+              <a:schemeClr val="tx1"/>
+            </a:solidFill>
+            <a:prstDash val="solid"/>
+          </a:ln>
+        </p:spPr>
+        <p:style>
+          <a:lnRef idx="2">
+            <a:schemeClr val="accent1"/>
+          </a:lnRef>
+          <a:fillRef idx="0">
+            <a:schemeClr val="accent1"/>
+          </a:fillRef>
+          <a:effectRef idx="1">
+            <a:schemeClr val="accent1"/>
+          </a:effectRef>
+          <a:fontRef idx="minor">
+            <a:schemeClr val="tx1"/>
+          </a:fontRef>
+        </p:style>
+      </p:cxnSp>
+      <p:sp>
+        <p:nvSpPr>
+          <p:cNvPr id="2" name="Slide Number Placeholder 1">
             <a:extLst>
               <a:ext uri="{FF2B5EF4-FFF2-40B4-BE49-F238E27FC236}">
-                <a16:creationId xmlns:a16="http://schemas.microsoft.com/office/drawing/2014/main" id="{35C96049-3F14-BD40-A92C-530C6871CCF9}"/>
+                <a16:creationId xmlns:a16="http://schemas.microsoft.com/office/drawing/2014/main" id="{03057C8D-E7AC-7B4F-8595-3EA8B512CB40}"/>
               </a:ext>
             </a:extLst>
           </p:cNvPr>
@@ -7189,6 +6782,1812 @@
             <a:fld id="{9C0B2870-7350-8D40-A01A-CE539DF873CB}" type="slidenum">
               <a:rPr lang="en-US" smtClean="0"/>
               <a:t>11</a:t>
+            </a:fld>
+            <a:endParaRPr lang="en-US"/>
+          </a:p>
+        </p:txBody>
+      </p:sp>
+      <p:sp>
+        <p:nvSpPr>
+          <p:cNvPr id="8" name="TextBox 7">
+            <a:extLst>
+              <a:ext uri="{FF2B5EF4-FFF2-40B4-BE49-F238E27FC236}">
+                <a16:creationId xmlns:a16="http://schemas.microsoft.com/office/drawing/2014/main" id="{4912C8E4-547B-5A1B-54B3-C82FE7A3A44F}"/>
+              </a:ext>
+            </a:extLst>
+          </p:cNvPr>
+          <p:cNvSpPr txBox="1"/>
+          <p:nvPr/>
+        </p:nvSpPr>
+        <p:spPr>
+          <a:xfrm>
+            <a:off x="1687773" y="696035"/>
+            <a:ext cx="1348446" cy="523220"/>
+          </a:xfrm>
+          <a:prstGeom prst="rect">
+            <a:avLst/>
+          </a:prstGeom>
+          <a:noFill/>
+        </p:spPr>
+        <p:txBody>
+          <a:bodyPr wrap="none" rtlCol="0">
+            <a:spAutoFit/>
+          </a:bodyPr>
+          <a:lstStyle/>
+          <a:p>
+            <a:r>
+              <a:rPr lang="en-US" sz="2800" dirty="0" err="1">
+                <a:solidFill>
+                  <a:schemeClr val="accent2"/>
+                </a:solidFill>
+                <a:latin typeface="Gill Sans MT" panose="020B0502020104020203" pitchFamily="34" charset="77"/>
+                <a:ea typeface="Trebuchet MS" charset="0"/>
+                <a:cs typeface="Trebuchet MS" charset="0"/>
+              </a:rPr>
+              <a:t>Ejemplo</a:t>
+            </a:r>
+            <a:endParaRPr lang="en-US" sz="2800" dirty="0">
+              <a:solidFill>
+                <a:schemeClr val="accent2"/>
+              </a:solidFill>
+              <a:latin typeface="Gill Sans MT" panose="020B0502020104020203" pitchFamily="34" charset="77"/>
+              <a:ea typeface="Trebuchet MS" charset="0"/>
+              <a:cs typeface="Trebuchet MS" charset="0"/>
+            </a:endParaRPr>
+          </a:p>
+        </p:txBody>
+      </p:sp>
+      <p:sp>
+        <p:nvSpPr>
+          <p:cNvPr id="14" name="TextBox 13">
+            <a:extLst>
+              <a:ext uri="{FF2B5EF4-FFF2-40B4-BE49-F238E27FC236}">
+                <a16:creationId xmlns:a16="http://schemas.microsoft.com/office/drawing/2014/main" id="{0220E890-9B5E-8234-DFDB-1096CA8C876E}"/>
+              </a:ext>
+            </a:extLst>
+          </p:cNvPr>
+          <p:cNvSpPr txBox="1"/>
+          <p:nvPr/>
+        </p:nvSpPr>
+        <p:spPr>
+          <a:xfrm>
+            <a:off x="4427668" y="5991371"/>
+            <a:ext cx="3267241" cy="369332"/>
+          </a:xfrm>
+          <a:prstGeom prst="rect">
+            <a:avLst/>
+          </a:prstGeom>
+          <a:noFill/>
+        </p:spPr>
+        <p:txBody>
+          <a:bodyPr wrap="none" rtlCol="0">
+            <a:spAutoFit/>
+          </a:bodyPr>
+          <a:lstStyle/>
+          <a:p>
+            <a:r>
+              <a:rPr lang="en-US" dirty="0" err="1">
+                <a:latin typeface="Gill Sans MT" panose="020B0502020104020203" pitchFamily="34" charset="77"/>
+                <a:ea typeface="Trebuchet MS" charset="0"/>
+                <a:cs typeface="Trebuchet MS" charset="0"/>
+              </a:rPr>
+              <a:t>Detección</a:t>
+            </a:r>
+            <a:r>
+              <a:rPr lang="en-US" dirty="0">
+                <a:latin typeface="Gill Sans MT" panose="020B0502020104020203" pitchFamily="34" charset="77"/>
+                <a:ea typeface="Trebuchet MS" charset="0"/>
+                <a:cs typeface="Trebuchet MS" charset="0"/>
+              </a:rPr>
+              <a:t> </a:t>
+            </a:r>
+            <a:r>
+              <a:rPr lang="en-US" dirty="0" err="1">
+                <a:latin typeface="Gill Sans MT" panose="020B0502020104020203" pitchFamily="34" charset="77"/>
+                <a:ea typeface="Trebuchet MS" charset="0"/>
+                <a:cs typeface="Trebuchet MS" charset="0"/>
+              </a:rPr>
+              <a:t>usando</a:t>
+            </a:r>
+            <a:r>
+              <a:rPr lang="en-US" dirty="0">
+                <a:latin typeface="Gill Sans MT" panose="020B0502020104020203" pitchFamily="34" charset="77"/>
+                <a:ea typeface="Trebuchet MS" charset="0"/>
+                <a:cs typeface="Trebuchet MS" charset="0"/>
+              </a:rPr>
+              <a:t> un </a:t>
+            </a:r>
+            <a:r>
+              <a:rPr lang="en-US" dirty="0" err="1">
+                <a:latin typeface="Gill Sans MT" panose="020B0502020104020203" pitchFamily="34" charset="77"/>
+                <a:ea typeface="Trebuchet MS" charset="0"/>
+                <a:cs typeface="Trebuchet MS" charset="0"/>
+              </a:rPr>
+              <a:t>clasificador</a:t>
+            </a:r>
+            <a:endParaRPr lang="en-US" dirty="0">
+              <a:latin typeface="Gill Sans MT" panose="020B0502020104020203" pitchFamily="34" charset="77"/>
+              <a:ea typeface="Trebuchet MS" charset="0"/>
+              <a:cs typeface="Trebuchet MS" charset="0"/>
+            </a:endParaRPr>
+          </a:p>
+        </p:txBody>
+      </p:sp>
+    </p:spTree>
+    <p:extLst>
+      <p:ext uri="{BB962C8B-B14F-4D97-AF65-F5344CB8AC3E}">
+        <p14:creationId xmlns:p14="http://schemas.microsoft.com/office/powerpoint/2010/main" val="317973866"/>
+      </p:ext>
+    </p:extLst>
+  </p:cSld>
+  <p:clrMapOvr>
+    <a:masterClrMapping/>
+  </p:clrMapOvr>
+</p:sld>
+</file>
+
+<file path=ppt/slides/slide12.xml><?xml version="1.0" encoding="utf-8"?>
+<p:sld xmlns:a="http://schemas.openxmlformats.org/drawingml/2006/main" xmlns:r="http://schemas.openxmlformats.org/officeDocument/2006/relationships" xmlns:p="http://schemas.openxmlformats.org/presentationml/2006/main">
+  <p:cSld>
+    <p:spTree>
+      <p:nvGrpSpPr>
+        <p:cNvPr id="1" name=""/>
+        <p:cNvGrpSpPr/>
+        <p:nvPr/>
+      </p:nvGrpSpPr>
+      <p:grpSpPr>
+        <a:xfrm>
+          <a:off x="0" y="0"/>
+          <a:ext cx="0" cy="0"/>
+          <a:chOff x="0" y="0"/>
+          <a:chExt cx="0" cy="0"/>
+        </a:xfrm>
+      </p:grpSpPr>
+      <p:sp>
+        <p:nvSpPr>
+          <p:cNvPr id="7" name="Rectangle 6"/>
+          <p:cNvSpPr/>
+          <p:nvPr/>
+        </p:nvSpPr>
+        <p:spPr>
+          <a:xfrm>
+            <a:off x="3912362" y="2169997"/>
+            <a:ext cx="4285397" cy="3766782"/>
+          </a:xfrm>
+          <a:prstGeom prst="rect">
+            <a:avLst/>
+          </a:prstGeom>
+          <a:solidFill>
+            <a:schemeClr val="bg1"/>
+          </a:solidFill>
+        </p:spPr>
+        <p:style>
+          <a:lnRef idx="1">
+            <a:schemeClr val="accent1"/>
+          </a:lnRef>
+          <a:fillRef idx="3">
+            <a:schemeClr val="accent1"/>
+          </a:fillRef>
+          <a:effectRef idx="2">
+            <a:schemeClr val="accent1"/>
+          </a:effectRef>
+          <a:fontRef idx="minor">
+            <a:schemeClr val="lt1"/>
+          </a:fontRef>
+        </p:style>
+        <p:txBody>
+          <a:bodyPr rtlCol="0" anchor="ctr"/>
+          <a:lstStyle/>
+          <a:p>
+            <a:pPr algn="ctr"/>
+            <a:endParaRPr lang="en-US" dirty="0">
+              <a:latin typeface="Gill Sans MT" panose="020B0502020104020203" pitchFamily="34" charset="77"/>
+            </a:endParaRPr>
+          </a:p>
+        </p:txBody>
+      </p:sp>
+      <p:sp>
+        <p:nvSpPr>
+          <p:cNvPr id="5" name="Freeform 4"/>
+          <p:cNvSpPr/>
+          <p:nvPr/>
+        </p:nvSpPr>
+        <p:spPr>
+          <a:xfrm>
+            <a:off x="4529157" y="3166216"/>
+            <a:ext cx="2729534" cy="1919913"/>
+          </a:xfrm>
+          <a:custGeom>
+            <a:avLst/>
+            <a:gdLst>
+              <a:gd name="connsiteX0" fmla="*/ 1034582 w 2729534"/>
+              <a:gd name="connsiteY0" fmla="*/ 341268 h 1919913"/>
+              <a:gd name="connsiteX1" fmla="*/ 1512254 w 2729534"/>
+              <a:gd name="connsiteY1" fmla="*/ 13722 h 1919913"/>
+              <a:gd name="connsiteX2" fmla="*/ 2726905 w 2729534"/>
+              <a:gd name="connsiteY2" fmla="*/ 832588 h 1919913"/>
+              <a:gd name="connsiteX3" fmla="*/ 1798857 w 2729534"/>
+              <a:gd name="connsiteY3" fmla="*/ 1897113 h 1919913"/>
+              <a:gd name="connsiteX4" fmla="*/ 556911 w 2729534"/>
+              <a:gd name="connsiteY4" fmla="*/ 1487680 h 1919913"/>
+              <a:gd name="connsiteX5" fmla="*/ 11000 w 2729534"/>
+              <a:gd name="connsiteY5" fmla="*/ 627871 h 1919913"/>
+              <a:gd name="connsiteX6" fmla="*/ 1034582 w 2729534"/>
+              <a:gd name="connsiteY6" fmla="*/ 341268 h 1919913"/>
+            </a:gdLst>
+            <a:ahLst/>
+            <a:cxnLst>
+              <a:cxn ang="0">
+                <a:pos x="connsiteX0" y="connsiteY0"/>
+              </a:cxn>
+              <a:cxn ang="0">
+                <a:pos x="connsiteX1" y="connsiteY1"/>
+              </a:cxn>
+              <a:cxn ang="0">
+                <a:pos x="connsiteX2" y="connsiteY2"/>
+              </a:cxn>
+              <a:cxn ang="0">
+                <a:pos x="connsiteX3" y="connsiteY3"/>
+              </a:cxn>
+              <a:cxn ang="0">
+                <a:pos x="connsiteX4" y="connsiteY4"/>
+              </a:cxn>
+              <a:cxn ang="0">
+                <a:pos x="connsiteX5" y="connsiteY5"/>
+              </a:cxn>
+              <a:cxn ang="0">
+                <a:pos x="connsiteX6" y="connsiteY6"/>
+              </a:cxn>
+            </a:cxnLst>
+            <a:rect l="l" t="t" r="r" b="b"/>
+            <a:pathLst>
+              <a:path w="2729534" h="1919913">
+                <a:moveTo>
+                  <a:pt x="1034582" y="341268"/>
+                </a:moveTo>
+                <a:cubicBezTo>
+                  <a:pt x="1284791" y="238910"/>
+                  <a:pt x="1230200" y="-68165"/>
+                  <a:pt x="1512254" y="13722"/>
+                </a:cubicBezTo>
+                <a:cubicBezTo>
+                  <a:pt x="1794308" y="95609"/>
+                  <a:pt x="2679138" y="518690"/>
+                  <a:pt x="2726905" y="832588"/>
+                </a:cubicBezTo>
+                <a:cubicBezTo>
+                  <a:pt x="2774672" y="1146486"/>
+                  <a:pt x="2160523" y="1787931"/>
+                  <a:pt x="1798857" y="1897113"/>
+                </a:cubicBezTo>
+                <a:cubicBezTo>
+                  <a:pt x="1437191" y="2006295"/>
+                  <a:pt x="854887" y="1699220"/>
+                  <a:pt x="556911" y="1487680"/>
+                </a:cubicBezTo>
+                <a:cubicBezTo>
+                  <a:pt x="258935" y="1276140"/>
+                  <a:pt x="-64063" y="816665"/>
+                  <a:pt x="11000" y="627871"/>
+                </a:cubicBezTo>
+                <a:cubicBezTo>
+                  <a:pt x="86063" y="439077"/>
+                  <a:pt x="784373" y="443626"/>
+                  <a:pt x="1034582" y="341268"/>
+                </a:cubicBezTo>
+                <a:close/>
+              </a:path>
+            </a:pathLst>
+          </a:custGeom>
+          <a:solidFill>
+            <a:srgbClr val="FF0000"/>
+          </a:solidFill>
+        </p:spPr>
+        <p:style>
+          <a:lnRef idx="1">
+            <a:schemeClr val="accent1"/>
+          </a:lnRef>
+          <a:fillRef idx="3">
+            <a:schemeClr val="accent1"/>
+          </a:fillRef>
+          <a:effectRef idx="2">
+            <a:schemeClr val="accent1"/>
+          </a:effectRef>
+          <a:fontRef idx="minor">
+            <a:schemeClr val="lt1"/>
+          </a:fontRef>
+        </p:style>
+        <p:txBody>
+          <a:bodyPr rtlCol="0" anchor="ctr"/>
+          <a:lstStyle/>
+          <a:p>
+            <a:pPr algn="ctr"/>
+            <a:endParaRPr lang="en-US" dirty="0">
+              <a:latin typeface="Gill Sans MT" panose="020B0502020104020203" pitchFamily="34" charset="77"/>
+            </a:endParaRPr>
+          </a:p>
+        </p:txBody>
+      </p:sp>
+      <p:sp>
+        <p:nvSpPr>
+          <p:cNvPr id="6" name="Freeform 5"/>
+          <p:cNvSpPr/>
+          <p:nvPr/>
+        </p:nvSpPr>
+        <p:spPr>
+          <a:xfrm>
+            <a:off x="4811400" y="3074556"/>
+            <a:ext cx="2589777" cy="2029155"/>
+          </a:xfrm>
+          <a:custGeom>
+            <a:avLst/>
+            <a:gdLst>
+              <a:gd name="connsiteX0" fmla="*/ 1034582 w 2729534"/>
+              <a:gd name="connsiteY0" fmla="*/ 341268 h 1919913"/>
+              <a:gd name="connsiteX1" fmla="*/ 1512254 w 2729534"/>
+              <a:gd name="connsiteY1" fmla="*/ 13722 h 1919913"/>
+              <a:gd name="connsiteX2" fmla="*/ 2726905 w 2729534"/>
+              <a:gd name="connsiteY2" fmla="*/ 832588 h 1919913"/>
+              <a:gd name="connsiteX3" fmla="*/ 1798857 w 2729534"/>
+              <a:gd name="connsiteY3" fmla="*/ 1897113 h 1919913"/>
+              <a:gd name="connsiteX4" fmla="*/ 556911 w 2729534"/>
+              <a:gd name="connsiteY4" fmla="*/ 1487680 h 1919913"/>
+              <a:gd name="connsiteX5" fmla="*/ 11000 w 2729534"/>
+              <a:gd name="connsiteY5" fmla="*/ 627871 h 1919913"/>
+              <a:gd name="connsiteX6" fmla="*/ 1034582 w 2729534"/>
+              <a:gd name="connsiteY6" fmla="*/ 341268 h 1919913"/>
+              <a:gd name="connsiteX0" fmla="*/ 1034582 w 2242520"/>
+              <a:gd name="connsiteY0" fmla="*/ 343152 h 1919663"/>
+              <a:gd name="connsiteX1" fmla="*/ 1512254 w 2242520"/>
+              <a:gd name="connsiteY1" fmla="*/ 15606 h 1919663"/>
+              <a:gd name="connsiteX2" fmla="*/ 2235585 w 2242520"/>
+              <a:gd name="connsiteY2" fmla="*/ 875416 h 1919663"/>
+              <a:gd name="connsiteX3" fmla="*/ 1798857 w 2242520"/>
+              <a:gd name="connsiteY3" fmla="*/ 1898997 h 1919663"/>
+              <a:gd name="connsiteX4" fmla="*/ 556911 w 2242520"/>
+              <a:gd name="connsiteY4" fmla="*/ 1489564 h 1919663"/>
+              <a:gd name="connsiteX5" fmla="*/ 11000 w 2242520"/>
+              <a:gd name="connsiteY5" fmla="*/ 629755 h 1919663"/>
+              <a:gd name="connsiteX6" fmla="*/ 1034582 w 2242520"/>
+              <a:gd name="connsiteY6" fmla="*/ 343152 h 1919663"/>
+              <a:gd name="connsiteX0" fmla="*/ 1034582 w 2253299"/>
+              <a:gd name="connsiteY0" fmla="*/ 435985 h 2012496"/>
+              <a:gd name="connsiteX1" fmla="*/ 1280242 w 2253299"/>
+              <a:gd name="connsiteY1" fmla="*/ 12904 h 2012496"/>
+              <a:gd name="connsiteX2" fmla="*/ 2235585 w 2253299"/>
+              <a:gd name="connsiteY2" fmla="*/ 968249 h 2012496"/>
+              <a:gd name="connsiteX3" fmla="*/ 1798857 w 2253299"/>
+              <a:gd name="connsiteY3" fmla="*/ 1991830 h 2012496"/>
+              <a:gd name="connsiteX4" fmla="*/ 556911 w 2253299"/>
+              <a:gd name="connsiteY4" fmla="*/ 1582397 h 2012496"/>
+              <a:gd name="connsiteX5" fmla="*/ 11000 w 2253299"/>
+              <a:gd name="connsiteY5" fmla="*/ 722588 h 2012496"/>
+              <a:gd name="connsiteX6" fmla="*/ 1034582 w 2253299"/>
+              <a:gd name="connsiteY6" fmla="*/ 435985 h 2012496"/>
+              <a:gd name="connsiteX0" fmla="*/ 586989 w 2242434"/>
+              <a:gd name="connsiteY0" fmla="*/ 487258 h 2009178"/>
+              <a:gd name="connsiteX1" fmla="*/ 1269377 w 2242434"/>
+              <a:gd name="connsiteY1" fmla="*/ 9586 h 2009178"/>
+              <a:gd name="connsiteX2" fmla="*/ 2224720 w 2242434"/>
+              <a:gd name="connsiteY2" fmla="*/ 964931 h 2009178"/>
+              <a:gd name="connsiteX3" fmla="*/ 1787992 w 2242434"/>
+              <a:gd name="connsiteY3" fmla="*/ 1988512 h 2009178"/>
+              <a:gd name="connsiteX4" fmla="*/ 546046 w 2242434"/>
+              <a:gd name="connsiteY4" fmla="*/ 1579079 h 2009178"/>
+              <a:gd name="connsiteX5" fmla="*/ 135 w 2242434"/>
+              <a:gd name="connsiteY5" fmla="*/ 719270 h 2009178"/>
+              <a:gd name="connsiteX6" fmla="*/ 586989 w 2242434"/>
+              <a:gd name="connsiteY6" fmla="*/ 487258 h 2009178"/>
+              <a:gd name="connsiteX0" fmla="*/ 602616 w 2260356"/>
+              <a:gd name="connsiteY0" fmla="*/ 487258 h 2028895"/>
+              <a:gd name="connsiteX1" fmla="*/ 1285004 w 2260356"/>
+              <a:gd name="connsiteY1" fmla="*/ 9586 h 2028895"/>
+              <a:gd name="connsiteX2" fmla="*/ 2240347 w 2260356"/>
+              <a:gd name="connsiteY2" fmla="*/ 964931 h 2028895"/>
+              <a:gd name="connsiteX3" fmla="*/ 1803619 w 2260356"/>
+              <a:gd name="connsiteY3" fmla="*/ 1988512 h 2028895"/>
+              <a:gd name="connsiteX4" fmla="*/ 316014 w 2260356"/>
+              <a:gd name="connsiteY4" fmla="*/ 1715556 h 2028895"/>
+              <a:gd name="connsiteX5" fmla="*/ 15762 w 2260356"/>
+              <a:gd name="connsiteY5" fmla="*/ 719270 h 2028895"/>
+              <a:gd name="connsiteX6" fmla="*/ 602616 w 2260356"/>
+              <a:gd name="connsiteY6" fmla="*/ 487258 h 2028895"/>
+              <a:gd name="connsiteX0" fmla="*/ 1121883 w 2779623"/>
+              <a:gd name="connsiteY0" fmla="*/ 487386 h 2029023"/>
+              <a:gd name="connsiteX1" fmla="*/ 1804271 w 2779623"/>
+              <a:gd name="connsiteY1" fmla="*/ 9714 h 2029023"/>
+              <a:gd name="connsiteX2" fmla="*/ 2759614 w 2779623"/>
+              <a:gd name="connsiteY2" fmla="*/ 965059 h 2029023"/>
+              <a:gd name="connsiteX3" fmla="*/ 2322886 w 2779623"/>
+              <a:gd name="connsiteY3" fmla="*/ 1988640 h 2029023"/>
+              <a:gd name="connsiteX4" fmla="*/ 835281 w 2779623"/>
+              <a:gd name="connsiteY4" fmla="*/ 1715684 h 2029023"/>
+              <a:gd name="connsiteX5" fmla="*/ 2767 w 2779623"/>
+              <a:gd name="connsiteY5" fmla="*/ 760342 h 2029023"/>
+              <a:gd name="connsiteX6" fmla="*/ 1121883 w 2779623"/>
+              <a:gd name="connsiteY6" fmla="*/ 487386 h 2029023"/>
+              <a:gd name="connsiteX0" fmla="*/ 932037 w 2589777"/>
+              <a:gd name="connsiteY0" fmla="*/ 487518 h 2029155"/>
+              <a:gd name="connsiteX1" fmla="*/ 1614425 w 2589777"/>
+              <a:gd name="connsiteY1" fmla="*/ 9846 h 2029155"/>
+              <a:gd name="connsiteX2" fmla="*/ 2569768 w 2589777"/>
+              <a:gd name="connsiteY2" fmla="*/ 965191 h 2029155"/>
+              <a:gd name="connsiteX3" fmla="*/ 2133040 w 2589777"/>
+              <a:gd name="connsiteY3" fmla="*/ 1988772 h 2029155"/>
+              <a:gd name="connsiteX4" fmla="*/ 645435 w 2589777"/>
+              <a:gd name="connsiteY4" fmla="*/ 1715816 h 2029155"/>
+              <a:gd name="connsiteX5" fmla="*/ 3989 w 2589777"/>
+              <a:gd name="connsiteY5" fmla="*/ 801418 h 2029155"/>
+              <a:gd name="connsiteX6" fmla="*/ 932037 w 2589777"/>
+              <a:gd name="connsiteY6" fmla="*/ 487518 h 2029155"/>
+            </a:gdLst>
+            <a:ahLst/>
+            <a:cxnLst>
+              <a:cxn ang="0">
+                <a:pos x="connsiteX0" y="connsiteY0"/>
+              </a:cxn>
+              <a:cxn ang="0">
+                <a:pos x="connsiteX1" y="connsiteY1"/>
+              </a:cxn>
+              <a:cxn ang="0">
+                <a:pos x="connsiteX2" y="connsiteY2"/>
+              </a:cxn>
+              <a:cxn ang="0">
+                <a:pos x="connsiteX3" y="connsiteY3"/>
+              </a:cxn>
+              <a:cxn ang="0">
+                <a:pos x="connsiteX4" y="connsiteY4"/>
+              </a:cxn>
+              <a:cxn ang="0">
+                <a:pos x="connsiteX5" y="connsiteY5"/>
+              </a:cxn>
+              <a:cxn ang="0">
+                <a:pos x="connsiteX6" y="connsiteY6"/>
+              </a:cxn>
+            </a:cxnLst>
+            <a:rect l="l" t="t" r="r" b="b"/>
+            <a:pathLst>
+              <a:path w="2589777" h="2029155">
+                <a:moveTo>
+                  <a:pt x="932037" y="487518"/>
+                </a:moveTo>
+                <a:cubicBezTo>
+                  <a:pt x="1200443" y="355589"/>
+                  <a:pt x="1341470" y="-69766"/>
+                  <a:pt x="1614425" y="9846"/>
+                </a:cubicBezTo>
+                <a:cubicBezTo>
+                  <a:pt x="1887380" y="89458"/>
+                  <a:pt x="2483332" y="635370"/>
+                  <a:pt x="2569768" y="965191"/>
+                </a:cubicBezTo>
+                <a:cubicBezTo>
+                  <a:pt x="2656204" y="1295012"/>
+                  <a:pt x="2453762" y="1863668"/>
+                  <a:pt x="2133040" y="1988772"/>
+                </a:cubicBezTo>
+                <a:cubicBezTo>
+                  <a:pt x="1812318" y="2113876"/>
+                  <a:pt x="943411" y="1927356"/>
+                  <a:pt x="645435" y="1715816"/>
+                </a:cubicBezTo>
+                <a:cubicBezTo>
+                  <a:pt x="347459" y="1504276"/>
+                  <a:pt x="-43778" y="1006134"/>
+                  <a:pt x="3989" y="801418"/>
+                </a:cubicBezTo>
+                <a:cubicBezTo>
+                  <a:pt x="51756" y="596702"/>
+                  <a:pt x="663631" y="619447"/>
+                  <a:pt x="932037" y="487518"/>
+                </a:cubicBezTo>
+                <a:close/>
+              </a:path>
+            </a:pathLst>
+          </a:custGeom>
+          <a:solidFill>
+            <a:srgbClr val="2249CD">
+              <a:alpha val="36000"/>
+            </a:srgbClr>
+          </a:solidFill>
+        </p:spPr>
+        <p:style>
+          <a:lnRef idx="1">
+            <a:schemeClr val="accent1"/>
+          </a:lnRef>
+          <a:fillRef idx="3">
+            <a:schemeClr val="accent1"/>
+          </a:fillRef>
+          <a:effectRef idx="2">
+            <a:schemeClr val="accent1"/>
+          </a:effectRef>
+          <a:fontRef idx="minor">
+            <a:schemeClr val="lt1"/>
+          </a:fontRef>
+        </p:style>
+        <p:txBody>
+          <a:bodyPr rtlCol="0" anchor="ctr"/>
+          <a:lstStyle/>
+          <a:p>
+            <a:pPr algn="ctr"/>
+            <a:endParaRPr lang="en-US" dirty="0">
+              <a:latin typeface="Gill Sans MT" panose="020B0502020104020203" pitchFamily="34" charset="77"/>
+            </a:endParaRPr>
+          </a:p>
+        </p:txBody>
+      </p:sp>
+      <p:sp>
+        <p:nvSpPr>
+          <p:cNvPr id="8" name="TextBox 7"/>
+          <p:cNvSpPr txBox="1"/>
+          <p:nvPr/>
+        </p:nvSpPr>
+        <p:spPr>
+          <a:xfrm>
+            <a:off x="5596513" y="564444"/>
+            <a:ext cx="4605107" cy="1323439"/>
+          </a:xfrm>
+          <a:prstGeom prst="rect">
+            <a:avLst/>
+          </a:prstGeom>
+          <a:noFill/>
+        </p:spPr>
+        <p:txBody>
+          <a:bodyPr wrap="none" rtlCol="0">
+            <a:spAutoFit/>
+          </a:bodyPr>
+          <a:lstStyle/>
+          <a:p>
+            <a:pPr algn="r"/>
+            <a:r>
+              <a:rPr lang="en-US" sz="2000" dirty="0" err="1">
+                <a:latin typeface="Gill Sans MT" panose="020B0502020104020203" pitchFamily="34" charset="77"/>
+                <a:ea typeface="Trebuchet MS" charset="0"/>
+                <a:cs typeface="Trebuchet MS" charset="0"/>
+              </a:rPr>
+              <a:t>Píxeles</a:t>
+            </a:r>
+            <a:r>
+              <a:rPr lang="en-US" sz="2000" dirty="0">
+                <a:latin typeface="Gill Sans MT" panose="020B0502020104020203" pitchFamily="34" charset="77"/>
+                <a:ea typeface="Trebuchet MS" charset="0"/>
+                <a:cs typeface="Trebuchet MS" charset="0"/>
+              </a:rPr>
+              <a:t> magenta: </a:t>
+            </a:r>
+            <a:r>
+              <a:rPr lang="en-US" sz="2000" dirty="0" err="1">
+                <a:latin typeface="Gill Sans MT" panose="020B0502020104020203" pitchFamily="34" charset="77"/>
+                <a:ea typeface="Trebuchet MS" charset="0"/>
+                <a:cs typeface="Trebuchet MS" charset="0"/>
+              </a:rPr>
+              <a:t>Verdareos</a:t>
+            </a:r>
+            <a:r>
+              <a:rPr lang="en-US" sz="2000" dirty="0">
+                <a:latin typeface="Gill Sans MT" panose="020B0502020104020203" pitchFamily="34" charset="77"/>
+                <a:ea typeface="Trebuchet MS" charset="0"/>
+                <a:cs typeface="Trebuchet MS" charset="0"/>
+              </a:rPr>
+              <a:t> </a:t>
+            </a:r>
+            <a:r>
+              <a:rPr lang="en-US" sz="2000" dirty="0" err="1">
+                <a:latin typeface="Gill Sans MT" panose="020B0502020104020203" pitchFamily="34" charset="77"/>
+                <a:ea typeface="Trebuchet MS" charset="0"/>
+                <a:cs typeface="Trebuchet MS" charset="0"/>
+              </a:rPr>
+              <a:t>Positivos</a:t>
+            </a:r>
+            <a:r>
+              <a:rPr lang="en-US" sz="2000" dirty="0">
+                <a:latin typeface="Gill Sans MT" panose="020B0502020104020203" pitchFamily="34" charset="77"/>
+                <a:ea typeface="Trebuchet MS" charset="0"/>
+                <a:cs typeface="Trebuchet MS" charset="0"/>
+              </a:rPr>
+              <a:t> (TP)
+</a:t>
+            </a:r>
+            <a:r>
+              <a:rPr lang="en-US" sz="2000" dirty="0" err="1">
+                <a:latin typeface="Gill Sans MT" panose="020B0502020104020203" pitchFamily="34" charset="77"/>
+                <a:ea typeface="Trebuchet MS" charset="0"/>
+                <a:cs typeface="Trebuchet MS" charset="0"/>
+              </a:rPr>
+              <a:t>Píxeles</a:t>
+            </a:r>
+            <a:r>
+              <a:rPr lang="en-US" sz="2000" dirty="0">
+                <a:latin typeface="Gill Sans MT" panose="020B0502020104020203" pitchFamily="34" charset="77"/>
+                <a:ea typeface="Trebuchet MS" charset="0"/>
+                <a:cs typeface="Trebuchet MS" charset="0"/>
+              </a:rPr>
+              <a:t> </a:t>
+            </a:r>
+            <a:r>
+              <a:rPr lang="en-US" sz="2000" dirty="0" err="1">
+                <a:latin typeface="Gill Sans MT" panose="020B0502020104020203" pitchFamily="34" charset="77"/>
+                <a:ea typeface="Trebuchet MS" charset="0"/>
+                <a:cs typeface="Trebuchet MS" charset="0"/>
+              </a:rPr>
+              <a:t>azules</a:t>
+            </a:r>
+            <a:r>
+              <a:rPr lang="en-US" sz="2000" dirty="0">
+                <a:latin typeface="Gill Sans MT" panose="020B0502020104020203" pitchFamily="34" charset="77"/>
+                <a:ea typeface="Trebuchet MS" charset="0"/>
+                <a:cs typeface="Trebuchet MS" charset="0"/>
+              </a:rPr>
+              <a:t>: </a:t>
+            </a:r>
+            <a:r>
+              <a:rPr lang="en-US" sz="2000" dirty="0" err="1">
+                <a:latin typeface="Gill Sans MT" panose="020B0502020104020203" pitchFamily="34" charset="77"/>
+                <a:ea typeface="Trebuchet MS" charset="0"/>
+                <a:cs typeface="Trebuchet MS" charset="0"/>
+              </a:rPr>
+              <a:t>falsos</a:t>
+            </a:r>
+            <a:r>
+              <a:rPr lang="en-US" sz="2000" dirty="0">
+                <a:latin typeface="Gill Sans MT" panose="020B0502020104020203" pitchFamily="34" charset="77"/>
+                <a:ea typeface="Trebuchet MS" charset="0"/>
+                <a:cs typeface="Trebuchet MS" charset="0"/>
+              </a:rPr>
+              <a:t> </a:t>
+            </a:r>
+            <a:r>
+              <a:rPr lang="en-US" sz="2000" dirty="0" err="1">
+                <a:latin typeface="Gill Sans MT" panose="020B0502020104020203" pitchFamily="34" charset="77"/>
+                <a:ea typeface="Trebuchet MS" charset="0"/>
+                <a:cs typeface="Trebuchet MS" charset="0"/>
+              </a:rPr>
+              <a:t>positivos</a:t>
+            </a:r>
+            <a:r>
+              <a:rPr lang="en-US" sz="2000" dirty="0">
+                <a:latin typeface="Gill Sans MT" panose="020B0502020104020203" pitchFamily="34" charset="77"/>
+                <a:ea typeface="Trebuchet MS" charset="0"/>
+                <a:cs typeface="Trebuchet MS" charset="0"/>
+              </a:rPr>
+              <a:t> (FP)
+</a:t>
+            </a:r>
+            <a:r>
+              <a:rPr lang="en-US" sz="2000" dirty="0" err="1">
+                <a:latin typeface="Gill Sans MT" panose="020B0502020104020203" pitchFamily="34" charset="77"/>
+                <a:ea typeface="Trebuchet MS" charset="0"/>
+                <a:cs typeface="Trebuchet MS" charset="0"/>
+              </a:rPr>
+              <a:t>Píxeles</a:t>
+            </a:r>
+            <a:r>
+              <a:rPr lang="en-US" sz="2000" dirty="0">
+                <a:latin typeface="Gill Sans MT" panose="020B0502020104020203" pitchFamily="34" charset="77"/>
+                <a:ea typeface="Trebuchet MS" charset="0"/>
+                <a:cs typeface="Trebuchet MS" charset="0"/>
+              </a:rPr>
+              <a:t> </a:t>
+            </a:r>
+            <a:r>
+              <a:rPr lang="en-US" sz="2000" dirty="0" err="1">
+                <a:latin typeface="Gill Sans MT" panose="020B0502020104020203" pitchFamily="34" charset="77"/>
+                <a:ea typeface="Trebuchet MS" charset="0"/>
+                <a:cs typeface="Trebuchet MS" charset="0"/>
+              </a:rPr>
+              <a:t>rojos</a:t>
+            </a:r>
+            <a:r>
+              <a:rPr lang="en-US" sz="2000" dirty="0">
+                <a:latin typeface="Gill Sans MT" panose="020B0502020104020203" pitchFamily="34" charset="77"/>
+                <a:ea typeface="Trebuchet MS" charset="0"/>
+                <a:cs typeface="Trebuchet MS" charset="0"/>
+              </a:rPr>
+              <a:t>: </a:t>
+            </a:r>
+            <a:r>
+              <a:rPr lang="en-US" sz="2000" dirty="0" err="1">
+                <a:latin typeface="Gill Sans MT" panose="020B0502020104020203" pitchFamily="34" charset="77"/>
+                <a:ea typeface="Trebuchet MS" charset="0"/>
+                <a:cs typeface="Trebuchet MS" charset="0"/>
+              </a:rPr>
+              <a:t>falsos</a:t>
+            </a:r>
+            <a:r>
+              <a:rPr lang="en-US" sz="2000" dirty="0">
+                <a:latin typeface="Gill Sans MT" panose="020B0502020104020203" pitchFamily="34" charset="77"/>
+                <a:ea typeface="Trebuchet MS" charset="0"/>
+                <a:cs typeface="Trebuchet MS" charset="0"/>
+              </a:rPr>
+              <a:t> </a:t>
+            </a:r>
+            <a:r>
+              <a:rPr lang="en-US" sz="2000" dirty="0" err="1">
+                <a:latin typeface="Gill Sans MT" panose="020B0502020104020203" pitchFamily="34" charset="77"/>
+                <a:ea typeface="Trebuchet MS" charset="0"/>
+                <a:cs typeface="Trebuchet MS" charset="0"/>
+              </a:rPr>
+              <a:t>negativos</a:t>
+            </a:r>
+            <a:r>
+              <a:rPr lang="en-US" sz="2000" dirty="0">
+                <a:latin typeface="Gill Sans MT" panose="020B0502020104020203" pitchFamily="34" charset="77"/>
+                <a:ea typeface="Trebuchet MS" charset="0"/>
+                <a:cs typeface="Trebuchet MS" charset="0"/>
+              </a:rPr>
+              <a:t> (FN)
+</a:t>
+            </a:r>
+            <a:r>
+              <a:rPr lang="en-US" sz="2000" dirty="0" err="1">
+                <a:latin typeface="Gill Sans MT" panose="020B0502020104020203" pitchFamily="34" charset="77"/>
+                <a:ea typeface="Trebuchet MS" charset="0"/>
+                <a:cs typeface="Trebuchet MS" charset="0"/>
+              </a:rPr>
+              <a:t>Píxeles</a:t>
+            </a:r>
+            <a:r>
+              <a:rPr lang="en-US" sz="2000" dirty="0">
+                <a:latin typeface="Gill Sans MT" panose="020B0502020104020203" pitchFamily="34" charset="77"/>
+                <a:ea typeface="Trebuchet MS" charset="0"/>
+                <a:cs typeface="Trebuchet MS" charset="0"/>
+              </a:rPr>
+              <a:t> </a:t>
+            </a:r>
+            <a:r>
+              <a:rPr lang="en-US" sz="2000" dirty="0" err="1">
+                <a:latin typeface="Gill Sans MT" panose="020B0502020104020203" pitchFamily="34" charset="77"/>
+                <a:ea typeface="Trebuchet MS" charset="0"/>
+                <a:cs typeface="Trebuchet MS" charset="0"/>
+              </a:rPr>
+              <a:t>blancos</a:t>
+            </a:r>
+            <a:r>
+              <a:rPr lang="en-US" sz="2000" dirty="0">
+                <a:latin typeface="Gill Sans MT" panose="020B0502020104020203" pitchFamily="34" charset="77"/>
+                <a:ea typeface="Trebuchet MS" charset="0"/>
+                <a:cs typeface="Trebuchet MS" charset="0"/>
+              </a:rPr>
+              <a:t>: Verdaderos </a:t>
+            </a:r>
+            <a:r>
+              <a:rPr lang="en-US" sz="2000" dirty="0" err="1">
+                <a:latin typeface="Gill Sans MT" panose="020B0502020104020203" pitchFamily="34" charset="77"/>
+                <a:ea typeface="Trebuchet MS" charset="0"/>
+                <a:cs typeface="Trebuchet MS" charset="0"/>
+              </a:rPr>
+              <a:t>negativos</a:t>
+            </a:r>
+            <a:r>
+              <a:rPr lang="en-US" sz="2000" dirty="0">
+                <a:latin typeface="Gill Sans MT" panose="020B0502020104020203" pitchFamily="34" charset="77"/>
+                <a:ea typeface="Trebuchet MS" charset="0"/>
+                <a:cs typeface="Trebuchet MS" charset="0"/>
+              </a:rPr>
+              <a:t> (TN)</a:t>
+            </a:r>
+          </a:p>
+        </p:txBody>
+      </p:sp>
+      <p:sp>
+        <p:nvSpPr>
+          <p:cNvPr id="9" name="Rectangle 8"/>
+          <p:cNvSpPr/>
+          <p:nvPr/>
+        </p:nvSpPr>
+        <p:spPr>
+          <a:xfrm>
+            <a:off x="10208155" y="626555"/>
+            <a:ext cx="245904" cy="252070"/>
+          </a:xfrm>
+          <a:prstGeom prst="rect">
+            <a:avLst/>
+          </a:prstGeom>
+          <a:solidFill>
+            <a:srgbClr val="9D2E5D"/>
+          </a:solidFill>
+          <a:ln>
+            <a:noFill/>
+          </a:ln>
+        </p:spPr>
+        <p:style>
+          <a:lnRef idx="1">
+            <a:schemeClr val="accent1"/>
+          </a:lnRef>
+          <a:fillRef idx="3">
+            <a:schemeClr val="accent1"/>
+          </a:fillRef>
+          <a:effectRef idx="2">
+            <a:schemeClr val="accent1"/>
+          </a:effectRef>
+          <a:fontRef idx="minor">
+            <a:schemeClr val="lt1"/>
+          </a:fontRef>
+        </p:style>
+        <p:txBody>
+          <a:bodyPr rtlCol="0" anchor="ctr"/>
+          <a:lstStyle/>
+          <a:p>
+            <a:pPr algn="ctr"/>
+            <a:endParaRPr lang="en-US" dirty="0">
+              <a:latin typeface="Gill Sans MT" panose="020B0502020104020203" pitchFamily="34" charset="77"/>
+            </a:endParaRPr>
+          </a:p>
+        </p:txBody>
+      </p:sp>
+      <p:sp>
+        <p:nvSpPr>
+          <p:cNvPr id="10" name="Rectangle 9"/>
+          <p:cNvSpPr/>
+          <p:nvPr/>
+        </p:nvSpPr>
+        <p:spPr>
+          <a:xfrm>
+            <a:off x="10208155" y="935100"/>
+            <a:ext cx="245904" cy="252070"/>
+          </a:xfrm>
+          <a:prstGeom prst="rect">
+            <a:avLst/>
+          </a:prstGeom>
+          <a:solidFill>
+            <a:srgbClr val="9AABDA"/>
+          </a:solidFill>
+          <a:ln>
+            <a:noFill/>
+          </a:ln>
+        </p:spPr>
+        <p:style>
+          <a:lnRef idx="1">
+            <a:schemeClr val="accent1"/>
+          </a:lnRef>
+          <a:fillRef idx="3">
+            <a:schemeClr val="accent1"/>
+          </a:fillRef>
+          <a:effectRef idx="2">
+            <a:schemeClr val="accent1"/>
+          </a:effectRef>
+          <a:fontRef idx="minor">
+            <a:schemeClr val="lt1"/>
+          </a:fontRef>
+        </p:style>
+        <p:txBody>
+          <a:bodyPr rtlCol="0" anchor="ctr"/>
+          <a:lstStyle/>
+          <a:p>
+            <a:pPr algn="ctr"/>
+            <a:endParaRPr lang="en-US" dirty="0">
+              <a:latin typeface="Gill Sans MT" panose="020B0502020104020203" pitchFamily="34" charset="77"/>
+            </a:endParaRPr>
+          </a:p>
+        </p:txBody>
+      </p:sp>
+      <p:sp>
+        <p:nvSpPr>
+          <p:cNvPr id="11" name="Rectangle 10"/>
+          <p:cNvSpPr/>
+          <p:nvPr/>
+        </p:nvSpPr>
+        <p:spPr>
+          <a:xfrm>
+            <a:off x="10203732" y="1241090"/>
+            <a:ext cx="245904" cy="252070"/>
+          </a:xfrm>
+          <a:prstGeom prst="rect">
+            <a:avLst/>
+          </a:prstGeom>
+          <a:solidFill>
+            <a:srgbClr val="FF0000"/>
+          </a:solidFill>
+          <a:ln>
+            <a:noFill/>
+          </a:ln>
+        </p:spPr>
+        <p:style>
+          <a:lnRef idx="1">
+            <a:schemeClr val="accent1"/>
+          </a:lnRef>
+          <a:fillRef idx="3">
+            <a:schemeClr val="accent1"/>
+          </a:fillRef>
+          <a:effectRef idx="2">
+            <a:schemeClr val="accent1"/>
+          </a:effectRef>
+          <a:fontRef idx="minor">
+            <a:schemeClr val="lt1"/>
+          </a:fontRef>
+        </p:style>
+        <p:txBody>
+          <a:bodyPr rtlCol="0" anchor="ctr"/>
+          <a:lstStyle/>
+          <a:p>
+            <a:pPr algn="ctr"/>
+            <a:endParaRPr lang="en-US" dirty="0">
+              <a:latin typeface="Gill Sans MT" panose="020B0502020104020203" pitchFamily="34" charset="77"/>
+            </a:endParaRPr>
+          </a:p>
+        </p:txBody>
+      </p:sp>
+      <p:sp>
+        <p:nvSpPr>
+          <p:cNvPr id="12" name="Rectangle 11"/>
+          <p:cNvSpPr/>
+          <p:nvPr/>
+        </p:nvSpPr>
+        <p:spPr>
+          <a:xfrm>
+            <a:off x="10203732" y="1567121"/>
+            <a:ext cx="245904" cy="252070"/>
+          </a:xfrm>
+          <a:prstGeom prst="rect">
+            <a:avLst/>
+          </a:prstGeom>
+          <a:solidFill>
+            <a:schemeClr val="bg1"/>
+          </a:solidFill>
+          <a:ln>
+            <a:solidFill>
+              <a:schemeClr val="bg1">
+                <a:lumMod val="65000"/>
+              </a:schemeClr>
+            </a:solidFill>
+          </a:ln>
+        </p:spPr>
+        <p:style>
+          <a:lnRef idx="1">
+            <a:schemeClr val="accent1"/>
+          </a:lnRef>
+          <a:fillRef idx="3">
+            <a:schemeClr val="accent1"/>
+          </a:fillRef>
+          <a:effectRef idx="2">
+            <a:schemeClr val="accent1"/>
+          </a:effectRef>
+          <a:fontRef idx="minor">
+            <a:schemeClr val="lt1"/>
+          </a:fontRef>
+        </p:style>
+        <p:txBody>
+          <a:bodyPr rtlCol="0" anchor="ctr"/>
+          <a:lstStyle/>
+          <a:p>
+            <a:pPr algn="ctr"/>
+            <a:endParaRPr lang="en-US" dirty="0">
+              <a:latin typeface="Gill Sans MT" panose="020B0502020104020203" pitchFamily="34" charset="77"/>
+            </a:endParaRPr>
+          </a:p>
+        </p:txBody>
+      </p:sp>
+      <p:sp>
+        <p:nvSpPr>
+          <p:cNvPr id="2" name="Slide Number Placeholder 1">
+            <a:extLst>
+              <a:ext uri="{FF2B5EF4-FFF2-40B4-BE49-F238E27FC236}">
+                <a16:creationId xmlns:a16="http://schemas.microsoft.com/office/drawing/2014/main" id="{7E3D98C5-FF0D-884F-9493-F438E9BBD711}"/>
+              </a:ext>
+            </a:extLst>
+          </p:cNvPr>
+          <p:cNvSpPr>
+            <a:spLocks noGrp="1"/>
+          </p:cNvSpPr>
+          <p:nvPr>
+            <p:ph type="sldNum" sz="quarter" idx="12"/>
+          </p:nvPr>
+        </p:nvSpPr>
+        <p:spPr/>
+        <p:txBody>
+          <a:bodyPr/>
+          <a:lstStyle/>
+          <a:p>
+            <a:fld id="{9C0B2870-7350-8D40-A01A-CE539DF873CB}" type="slidenum">
+              <a:rPr lang="en-US" smtClean="0"/>
+              <a:t>12</a:t>
+            </a:fld>
+            <a:endParaRPr lang="en-US"/>
+          </a:p>
+        </p:txBody>
+      </p:sp>
+      <p:sp>
+        <p:nvSpPr>
+          <p:cNvPr id="14" name="TextBox 13">
+            <a:extLst>
+              <a:ext uri="{FF2B5EF4-FFF2-40B4-BE49-F238E27FC236}">
+                <a16:creationId xmlns:a16="http://schemas.microsoft.com/office/drawing/2014/main" id="{6131F7A4-785B-8641-A05F-7AAC3DE1D68A}"/>
+              </a:ext>
+            </a:extLst>
+          </p:cNvPr>
+          <p:cNvSpPr txBox="1"/>
+          <p:nvPr/>
+        </p:nvSpPr>
+        <p:spPr>
+          <a:xfrm>
+            <a:off x="8468139" y="2796883"/>
+            <a:ext cx="1539204" cy="369332"/>
+          </a:xfrm>
+          <a:prstGeom prst="rect">
+            <a:avLst/>
+          </a:prstGeom>
+          <a:noFill/>
+        </p:spPr>
+        <p:txBody>
+          <a:bodyPr wrap="none" rtlCol="0">
+            <a:spAutoFit/>
+          </a:bodyPr>
+          <a:lstStyle/>
+          <a:p>
+            <a:r>
+              <a:rPr lang="en-US">
+                <a:latin typeface="Gill Sans MT" panose="020B0502020104020203" pitchFamily="34" charset="77"/>
+                <a:ea typeface="Trebuchet MS" charset="0"/>
+                <a:cs typeface="Trebuchet MS" charset="0"/>
+              </a:rPr>
+              <a:t>Detección (D)</a:t>
+            </a:r>
+            <a:endParaRPr lang="en-US" dirty="0">
+              <a:latin typeface="Gill Sans MT" panose="020B0502020104020203" pitchFamily="34" charset="77"/>
+              <a:ea typeface="Trebuchet MS" charset="0"/>
+              <a:cs typeface="Trebuchet MS" charset="0"/>
+            </a:endParaRPr>
+          </a:p>
+        </p:txBody>
+      </p:sp>
+      <p:cxnSp>
+        <p:nvCxnSpPr>
+          <p:cNvPr id="15" name="Straight Connector 14">
+            <a:extLst>
+              <a:ext uri="{FF2B5EF4-FFF2-40B4-BE49-F238E27FC236}">
+                <a16:creationId xmlns:a16="http://schemas.microsoft.com/office/drawing/2014/main" id="{FC2317E2-7C9B-B648-BE61-96D87F389CFB}"/>
+              </a:ext>
+            </a:extLst>
+          </p:cNvPr>
+          <p:cNvCxnSpPr/>
+          <p:nvPr/>
+        </p:nvCxnSpPr>
+        <p:spPr>
+          <a:xfrm flipH="1">
+            <a:off x="6544302" y="3166216"/>
+            <a:ext cx="1935698" cy="122417"/>
+          </a:xfrm>
+          <a:prstGeom prst="line">
+            <a:avLst/>
+          </a:prstGeom>
+          <a:ln w="12700">
+            <a:solidFill>
+              <a:schemeClr val="tx1"/>
+            </a:solidFill>
+            <a:prstDash val="solid"/>
+          </a:ln>
+        </p:spPr>
+        <p:style>
+          <a:lnRef idx="2">
+            <a:schemeClr val="accent1"/>
+          </a:lnRef>
+          <a:fillRef idx="0">
+            <a:schemeClr val="accent1"/>
+          </a:fillRef>
+          <a:effectRef idx="1">
+            <a:schemeClr val="accent1"/>
+          </a:effectRef>
+          <a:fontRef idx="minor">
+            <a:schemeClr val="tx1"/>
+          </a:fontRef>
+        </p:style>
+      </p:cxnSp>
+      <p:sp>
+        <p:nvSpPr>
+          <p:cNvPr id="16" name="TextBox 15">
+            <a:extLst>
+              <a:ext uri="{FF2B5EF4-FFF2-40B4-BE49-F238E27FC236}">
+                <a16:creationId xmlns:a16="http://schemas.microsoft.com/office/drawing/2014/main" id="{D3C45CFA-9B61-3443-A594-9D1F0E21F685}"/>
+              </a:ext>
+            </a:extLst>
+          </p:cNvPr>
+          <p:cNvSpPr txBox="1"/>
+          <p:nvPr/>
+        </p:nvSpPr>
+        <p:spPr>
+          <a:xfrm>
+            <a:off x="1898897" y="3879724"/>
+            <a:ext cx="1461297" cy="369332"/>
+          </a:xfrm>
+          <a:prstGeom prst="rect">
+            <a:avLst/>
+          </a:prstGeom>
+          <a:noFill/>
+        </p:spPr>
+        <p:txBody>
+          <a:bodyPr wrap="none" rtlCol="0">
+            <a:spAutoFit/>
+          </a:bodyPr>
+          <a:lstStyle/>
+          <a:p>
+            <a:r>
+              <a:rPr lang="en-US" dirty="0">
+                <a:latin typeface="Gill Sans MT" panose="020B0502020104020203" pitchFamily="34" charset="77"/>
+                <a:ea typeface="Trebuchet MS" charset="0"/>
+                <a:cs typeface="Trebuchet MS" charset="0"/>
+              </a:rPr>
+              <a:t>Ground Truth</a:t>
+            </a:r>
+          </a:p>
+        </p:txBody>
+      </p:sp>
+      <p:cxnSp>
+        <p:nvCxnSpPr>
+          <p:cNvPr id="17" name="Straight Connector 16">
+            <a:extLst>
+              <a:ext uri="{FF2B5EF4-FFF2-40B4-BE49-F238E27FC236}">
+                <a16:creationId xmlns:a16="http://schemas.microsoft.com/office/drawing/2014/main" id="{96326107-3E36-BA42-A9DE-6CFF3C948475}"/>
+              </a:ext>
+            </a:extLst>
+          </p:cNvPr>
+          <p:cNvCxnSpPr/>
+          <p:nvPr/>
+        </p:nvCxnSpPr>
+        <p:spPr>
+          <a:xfrm flipH="1">
+            <a:off x="2894723" y="4249057"/>
+            <a:ext cx="1935698" cy="122417"/>
+          </a:xfrm>
+          <a:prstGeom prst="line">
+            <a:avLst/>
+          </a:prstGeom>
+          <a:ln w="12700">
+            <a:solidFill>
+              <a:schemeClr val="tx1"/>
+            </a:solidFill>
+            <a:prstDash val="solid"/>
+          </a:ln>
+        </p:spPr>
+        <p:style>
+          <a:lnRef idx="2">
+            <a:schemeClr val="accent1"/>
+          </a:lnRef>
+          <a:fillRef idx="0">
+            <a:schemeClr val="accent1"/>
+          </a:fillRef>
+          <a:effectRef idx="1">
+            <a:schemeClr val="accent1"/>
+          </a:effectRef>
+          <a:fontRef idx="minor">
+            <a:schemeClr val="tx1"/>
+          </a:fontRef>
+        </p:style>
+      </p:cxnSp>
+      <p:sp>
+        <p:nvSpPr>
+          <p:cNvPr id="3" name="TextBox 2">
+            <a:extLst>
+              <a:ext uri="{FF2B5EF4-FFF2-40B4-BE49-F238E27FC236}">
+                <a16:creationId xmlns:a16="http://schemas.microsoft.com/office/drawing/2014/main" id="{F96000AC-D2AD-0BBC-E293-1873B51076A9}"/>
+              </a:ext>
+            </a:extLst>
+          </p:cNvPr>
+          <p:cNvSpPr txBox="1"/>
+          <p:nvPr/>
+        </p:nvSpPr>
+        <p:spPr>
+          <a:xfrm>
+            <a:off x="1687773" y="696035"/>
+            <a:ext cx="1348446" cy="523220"/>
+          </a:xfrm>
+          <a:prstGeom prst="rect">
+            <a:avLst/>
+          </a:prstGeom>
+          <a:noFill/>
+        </p:spPr>
+        <p:txBody>
+          <a:bodyPr wrap="none" rtlCol="0">
+            <a:spAutoFit/>
+          </a:bodyPr>
+          <a:lstStyle/>
+          <a:p>
+            <a:r>
+              <a:rPr lang="en-US" sz="2800" dirty="0" err="1">
+                <a:solidFill>
+                  <a:schemeClr val="accent2"/>
+                </a:solidFill>
+                <a:latin typeface="Gill Sans MT" panose="020B0502020104020203" pitchFamily="34" charset="77"/>
+                <a:ea typeface="Trebuchet MS" charset="0"/>
+                <a:cs typeface="Trebuchet MS" charset="0"/>
+              </a:rPr>
+              <a:t>Ejemplo</a:t>
+            </a:r>
+            <a:endParaRPr lang="en-US" sz="2800" dirty="0">
+              <a:solidFill>
+                <a:schemeClr val="accent2"/>
+              </a:solidFill>
+              <a:latin typeface="Gill Sans MT" panose="020B0502020104020203" pitchFamily="34" charset="77"/>
+              <a:ea typeface="Trebuchet MS" charset="0"/>
+              <a:cs typeface="Trebuchet MS" charset="0"/>
+            </a:endParaRPr>
+          </a:p>
+        </p:txBody>
+      </p:sp>
+    </p:spTree>
+    <p:extLst>
+      <p:ext uri="{BB962C8B-B14F-4D97-AF65-F5344CB8AC3E}">
+        <p14:creationId xmlns:p14="http://schemas.microsoft.com/office/powerpoint/2010/main" val="1689893819"/>
+      </p:ext>
+    </p:extLst>
+  </p:cSld>
+  <p:clrMapOvr>
+    <a:masterClrMapping/>
+  </p:clrMapOvr>
+</p:sld>
+</file>
+
+<file path=ppt/slides/slide13.xml><?xml version="1.0" encoding="utf-8"?>
+<p:sld xmlns:a="http://schemas.openxmlformats.org/drawingml/2006/main" xmlns:r="http://schemas.openxmlformats.org/officeDocument/2006/relationships" xmlns:p="http://schemas.openxmlformats.org/presentationml/2006/main">
+  <p:cSld>
+    <p:spTree>
+      <p:nvGrpSpPr>
+        <p:cNvPr id="1" name=""/>
+        <p:cNvGrpSpPr/>
+        <p:nvPr/>
+      </p:nvGrpSpPr>
+      <p:grpSpPr>
+        <a:xfrm>
+          <a:off x="0" y="0"/>
+          <a:ext cx="0" cy="0"/>
+          <a:chOff x="0" y="0"/>
+          <a:chExt cx="0" cy="0"/>
+        </a:xfrm>
+      </p:grpSpPr>
+      <p:sp>
+        <p:nvSpPr>
+          <p:cNvPr id="7" name="Rectangle 6"/>
+          <p:cNvSpPr/>
+          <p:nvPr/>
+        </p:nvSpPr>
+        <p:spPr>
+          <a:xfrm>
+            <a:off x="3912362" y="2169997"/>
+            <a:ext cx="4285397" cy="3766782"/>
+          </a:xfrm>
+          <a:prstGeom prst="rect">
+            <a:avLst/>
+          </a:prstGeom>
+          <a:solidFill>
+            <a:schemeClr val="bg1"/>
+          </a:solidFill>
+        </p:spPr>
+        <p:style>
+          <a:lnRef idx="1">
+            <a:schemeClr val="accent1"/>
+          </a:lnRef>
+          <a:fillRef idx="3">
+            <a:schemeClr val="accent1"/>
+          </a:fillRef>
+          <a:effectRef idx="2">
+            <a:schemeClr val="accent1"/>
+          </a:effectRef>
+          <a:fontRef idx="minor">
+            <a:schemeClr val="lt1"/>
+          </a:fontRef>
+        </p:style>
+        <p:txBody>
+          <a:bodyPr rtlCol="0" anchor="ctr"/>
+          <a:lstStyle/>
+          <a:p>
+            <a:pPr algn="ctr"/>
+            <a:endParaRPr lang="en-US" dirty="0">
+              <a:latin typeface="Gill Sans MT" panose="020B0502020104020203" pitchFamily="34" charset="77"/>
+            </a:endParaRPr>
+          </a:p>
+        </p:txBody>
+      </p:sp>
+      <p:sp>
+        <p:nvSpPr>
+          <p:cNvPr id="5" name="Freeform 4"/>
+          <p:cNvSpPr/>
+          <p:nvPr/>
+        </p:nvSpPr>
+        <p:spPr>
+          <a:xfrm>
+            <a:off x="4529157" y="3166216"/>
+            <a:ext cx="2729534" cy="1919913"/>
+          </a:xfrm>
+          <a:custGeom>
+            <a:avLst/>
+            <a:gdLst>
+              <a:gd name="connsiteX0" fmla="*/ 1034582 w 2729534"/>
+              <a:gd name="connsiteY0" fmla="*/ 341268 h 1919913"/>
+              <a:gd name="connsiteX1" fmla="*/ 1512254 w 2729534"/>
+              <a:gd name="connsiteY1" fmla="*/ 13722 h 1919913"/>
+              <a:gd name="connsiteX2" fmla="*/ 2726905 w 2729534"/>
+              <a:gd name="connsiteY2" fmla="*/ 832588 h 1919913"/>
+              <a:gd name="connsiteX3" fmla="*/ 1798857 w 2729534"/>
+              <a:gd name="connsiteY3" fmla="*/ 1897113 h 1919913"/>
+              <a:gd name="connsiteX4" fmla="*/ 556911 w 2729534"/>
+              <a:gd name="connsiteY4" fmla="*/ 1487680 h 1919913"/>
+              <a:gd name="connsiteX5" fmla="*/ 11000 w 2729534"/>
+              <a:gd name="connsiteY5" fmla="*/ 627871 h 1919913"/>
+              <a:gd name="connsiteX6" fmla="*/ 1034582 w 2729534"/>
+              <a:gd name="connsiteY6" fmla="*/ 341268 h 1919913"/>
+            </a:gdLst>
+            <a:ahLst/>
+            <a:cxnLst>
+              <a:cxn ang="0">
+                <a:pos x="connsiteX0" y="connsiteY0"/>
+              </a:cxn>
+              <a:cxn ang="0">
+                <a:pos x="connsiteX1" y="connsiteY1"/>
+              </a:cxn>
+              <a:cxn ang="0">
+                <a:pos x="connsiteX2" y="connsiteY2"/>
+              </a:cxn>
+              <a:cxn ang="0">
+                <a:pos x="connsiteX3" y="connsiteY3"/>
+              </a:cxn>
+              <a:cxn ang="0">
+                <a:pos x="connsiteX4" y="connsiteY4"/>
+              </a:cxn>
+              <a:cxn ang="0">
+                <a:pos x="connsiteX5" y="connsiteY5"/>
+              </a:cxn>
+              <a:cxn ang="0">
+                <a:pos x="connsiteX6" y="connsiteY6"/>
+              </a:cxn>
+            </a:cxnLst>
+            <a:rect l="l" t="t" r="r" b="b"/>
+            <a:pathLst>
+              <a:path w="2729534" h="1919913">
+                <a:moveTo>
+                  <a:pt x="1034582" y="341268"/>
+                </a:moveTo>
+                <a:cubicBezTo>
+                  <a:pt x="1284791" y="238910"/>
+                  <a:pt x="1230200" y="-68165"/>
+                  <a:pt x="1512254" y="13722"/>
+                </a:cubicBezTo>
+                <a:cubicBezTo>
+                  <a:pt x="1794308" y="95609"/>
+                  <a:pt x="2679138" y="518690"/>
+                  <a:pt x="2726905" y="832588"/>
+                </a:cubicBezTo>
+                <a:cubicBezTo>
+                  <a:pt x="2774672" y="1146486"/>
+                  <a:pt x="2160523" y="1787931"/>
+                  <a:pt x="1798857" y="1897113"/>
+                </a:cubicBezTo>
+                <a:cubicBezTo>
+                  <a:pt x="1437191" y="2006295"/>
+                  <a:pt x="854887" y="1699220"/>
+                  <a:pt x="556911" y="1487680"/>
+                </a:cubicBezTo>
+                <a:cubicBezTo>
+                  <a:pt x="258935" y="1276140"/>
+                  <a:pt x="-64063" y="816665"/>
+                  <a:pt x="11000" y="627871"/>
+                </a:cubicBezTo>
+                <a:cubicBezTo>
+                  <a:pt x="86063" y="439077"/>
+                  <a:pt x="784373" y="443626"/>
+                  <a:pt x="1034582" y="341268"/>
+                </a:cubicBezTo>
+                <a:close/>
+              </a:path>
+            </a:pathLst>
+          </a:custGeom>
+          <a:solidFill>
+            <a:srgbClr val="FF0000"/>
+          </a:solidFill>
+        </p:spPr>
+        <p:style>
+          <a:lnRef idx="1">
+            <a:schemeClr val="accent1"/>
+          </a:lnRef>
+          <a:fillRef idx="3">
+            <a:schemeClr val="accent1"/>
+          </a:fillRef>
+          <a:effectRef idx="2">
+            <a:schemeClr val="accent1"/>
+          </a:effectRef>
+          <a:fontRef idx="minor">
+            <a:schemeClr val="lt1"/>
+          </a:fontRef>
+        </p:style>
+        <p:txBody>
+          <a:bodyPr rtlCol="0" anchor="ctr"/>
+          <a:lstStyle/>
+          <a:p>
+            <a:pPr algn="ctr"/>
+            <a:endParaRPr lang="en-US" dirty="0">
+              <a:latin typeface="Gill Sans MT" panose="020B0502020104020203" pitchFamily="34" charset="77"/>
+            </a:endParaRPr>
+          </a:p>
+        </p:txBody>
+      </p:sp>
+      <p:sp>
+        <p:nvSpPr>
+          <p:cNvPr id="6" name="Freeform 5"/>
+          <p:cNvSpPr/>
+          <p:nvPr/>
+        </p:nvSpPr>
+        <p:spPr>
+          <a:xfrm>
+            <a:off x="4811400" y="3074556"/>
+            <a:ext cx="2589777" cy="2029155"/>
+          </a:xfrm>
+          <a:custGeom>
+            <a:avLst/>
+            <a:gdLst>
+              <a:gd name="connsiteX0" fmla="*/ 1034582 w 2729534"/>
+              <a:gd name="connsiteY0" fmla="*/ 341268 h 1919913"/>
+              <a:gd name="connsiteX1" fmla="*/ 1512254 w 2729534"/>
+              <a:gd name="connsiteY1" fmla="*/ 13722 h 1919913"/>
+              <a:gd name="connsiteX2" fmla="*/ 2726905 w 2729534"/>
+              <a:gd name="connsiteY2" fmla="*/ 832588 h 1919913"/>
+              <a:gd name="connsiteX3" fmla="*/ 1798857 w 2729534"/>
+              <a:gd name="connsiteY3" fmla="*/ 1897113 h 1919913"/>
+              <a:gd name="connsiteX4" fmla="*/ 556911 w 2729534"/>
+              <a:gd name="connsiteY4" fmla="*/ 1487680 h 1919913"/>
+              <a:gd name="connsiteX5" fmla="*/ 11000 w 2729534"/>
+              <a:gd name="connsiteY5" fmla="*/ 627871 h 1919913"/>
+              <a:gd name="connsiteX6" fmla="*/ 1034582 w 2729534"/>
+              <a:gd name="connsiteY6" fmla="*/ 341268 h 1919913"/>
+              <a:gd name="connsiteX0" fmla="*/ 1034582 w 2242520"/>
+              <a:gd name="connsiteY0" fmla="*/ 343152 h 1919663"/>
+              <a:gd name="connsiteX1" fmla="*/ 1512254 w 2242520"/>
+              <a:gd name="connsiteY1" fmla="*/ 15606 h 1919663"/>
+              <a:gd name="connsiteX2" fmla="*/ 2235585 w 2242520"/>
+              <a:gd name="connsiteY2" fmla="*/ 875416 h 1919663"/>
+              <a:gd name="connsiteX3" fmla="*/ 1798857 w 2242520"/>
+              <a:gd name="connsiteY3" fmla="*/ 1898997 h 1919663"/>
+              <a:gd name="connsiteX4" fmla="*/ 556911 w 2242520"/>
+              <a:gd name="connsiteY4" fmla="*/ 1489564 h 1919663"/>
+              <a:gd name="connsiteX5" fmla="*/ 11000 w 2242520"/>
+              <a:gd name="connsiteY5" fmla="*/ 629755 h 1919663"/>
+              <a:gd name="connsiteX6" fmla="*/ 1034582 w 2242520"/>
+              <a:gd name="connsiteY6" fmla="*/ 343152 h 1919663"/>
+              <a:gd name="connsiteX0" fmla="*/ 1034582 w 2253299"/>
+              <a:gd name="connsiteY0" fmla="*/ 435985 h 2012496"/>
+              <a:gd name="connsiteX1" fmla="*/ 1280242 w 2253299"/>
+              <a:gd name="connsiteY1" fmla="*/ 12904 h 2012496"/>
+              <a:gd name="connsiteX2" fmla="*/ 2235585 w 2253299"/>
+              <a:gd name="connsiteY2" fmla="*/ 968249 h 2012496"/>
+              <a:gd name="connsiteX3" fmla="*/ 1798857 w 2253299"/>
+              <a:gd name="connsiteY3" fmla="*/ 1991830 h 2012496"/>
+              <a:gd name="connsiteX4" fmla="*/ 556911 w 2253299"/>
+              <a:gd name="connsiteY4" fmla="*/ 1582397 h 2012496"/>
+              <a:gd name="connsiteX5" fmla="*/ 11000 w 2253299"/>
+              <a:gd name="connsiteY5" fmla="*/ 722588 h 2012496"/>
+              <a:gd name="connsiteX6" fmla="*/ 1034582 w 2253299"/>
+              <a:gd name="connsiteY6" fmla="*/ 435985 h 2012496"/>
+              <a:gd name="connsiteX0" fmla="*/ 586989 w 2242434"/>
+              <a:gd name="connsiteY0" fmla="*/ 487258 h 2009178"/>
+              <a:gd name="connsiteX1" fmla="*/ 1269377 w 2242434"/>
+              <a:gd name="connsiteY1" fmla="*/ 9586 h 2009178"/>
+              <a:gd name="connsiteX2" fmla="*/ 2224720 w 2242434"/>
+              <a:gd name="connsiteY2" fmla="*/ 964931 h 2009178"/>
+              <a:gd name="connsiteX3" fmla="*/ 1787992 w 2242434"/>
+              <a:gd name="connsiteY3" fmla="*/ 1988512 h 2009178"/>
+              <a:gd name="connsiteX4" fmla="*/ 546046 w 2242434"/>
+              <a:gd name="connsiteY4" fmla="*/ 1579079 h 2009178"/>
+              <a:gd name="connsiteX5" fmla="*/ 135 w 2242434"/>
+              <a:gd name="connsiteY5" fmla="*/ 719270 h 2009178"/>
+              <a:gd name="connsiteX6" fmla="*/ 586989 w 2242434"/>
+              <a:gd name="connsiteY6" fmla="*/ 487258 h 2009178"/>
+              <a:gd name="connsiteX0" fmla="*/ 602616 w 2260356"/>
+              <a:gd name="connsiteY0" fmla="*/ 487258 h 2028895"/>
+              <a:gd name="connsiteX1" fmla="*/ 1285004 w 2260356"/>
+              <a:gd name="connsiteY1" fmla="*/ 9586 h 2028895"/>
+              <a:gd name="connsiteX2" fmla="*/ 2240347 w 2260356"/>
+              <a:gd name="connsiteY2" fmla="*/ 964931 h 2028895"/>
+              <a:gd name="connsiteX3" fmla="*/ 1803619 w 2260356"/>
+              <a:gd name="connsiteY3" fmla="*/ 1988512 h 2028895"/>
+              <a:gd name="connsiteX4" fmla="*/ 316014 w 2260356"/>
+              <a:gd name="connsiteY4" fmla="*/ 1715556 h 2028895"/>
+              <a:gd name="connsiteX5" fmla="*/ 15762 w 2260356"/>
+              <a:gd name="connsiteY5" fmla="*/ 719270 h 2028895"/>
+              <a:gd name="connsiteX6" fmla="*/ 602616 w 2260356"/>
+              <a:gd name="connsiteY6" fmla="*/ 487258 h 2028895"/>
+              <a:gd name="connsiteX0" fmla="*/ 1121883 w 2779623"/>
+              <a:gd name="connsiteY0" fmla="*/ 487386 h 2029023"/>
+              <a:gd name="connsiteX1" fmla="*/ 1804271 w 2779623"/>
+              <a:gd name="connsiteY1" fmla="*/ 9714 h 2029023"/>
+              <a:gd name="connsiteX2" fmla="*/ 2759614 w 2779623"/>
+              <a:gd name="connsiteY2" fmla="*/ 965059 h 2029023"/>
+              <a:gd name="connsiteX3" fmla="*/ 2322886 w 2779623"/>
+              <a:gd name="connsiteY3" fmla="*/ 1988640 h 2029023"/>
+              <a:gd name="connsiteX4" fmla="*/ 835281 w 2779623"/>
+              <a:gd name="connsiteY4" fmla="*/ 1715684 h 2029023"/>
+              <a:gd name="connsiteX5" fmla="*/ 2767 w 2779623"/>
+              <a:gd name="connsiteY5" fmla="*/ 760342 h 2029023"/>
+              <a:gd name="connsiteX6" fmla="*/ 1121883 w 2779623"/>
+              <a:gd name="connsiteY6" fmla="*/ 487386 h 2029023"/>
+              <a:gd name="connsiteX0" fmla="*/ 932037 w 2589777"/>
+              <a:gd name="connsiteY0" fmla="*/ 487518 h 2029155"/>
+              <a:gd name="connsiteX1" fmla="*/ 1614425 w 2589777"/>
+              <a:gd name="connsiteY1" fmla="*/ 9846 h 2029155"/>
+              <a:gd name="connsiteX2" fmla="*/ 2569768 w 2589777"/>
+              <a:gd name="connsiteY2" fmla="*/ 965191 h 2029155"/>
+              <a:gd name="connsiteX3" fmla="*/ 2133040 w 2589777"/>
+              <a:gd name="connsiteY3" fmla="*/ 1988772 h 2029155"/>
+              <a:gd name="connsiteX4" fmla="*/ 645435 w 2589777"/>
+              <a:gd name="connsiteY4" fmla="*/ 1715816 h 2029155"/>
+              <a:gd name="connsiteX5" fmla="*/ 3989 w 2589777"/>
+              <a:gd name="connsiteY5" fmla="*/ 801418 h 2029155"/>
+              <a:gd name="connsiteX6" fmla="*/ 932037 w 2589777"/>
+              <a:gd name="connsiteY6" fmla="*/ 487518 h 2029155"/>
+            </a:gdLst>
+            <a:ahLst/>
+            <a:cxnLst>
+              <a:cxn ang="0">
+                <a:pos x="connsiteX0" y="connsiteY0"/>
+              </a:cxn>
+              <a:cxn ang="0">
+                <a:pos x="connsiteX1" y="connsiteY1"/>
+              </a:cxn>
+              <a:cxn ang="0">
+                <a:pos x="connsiteX2" y="connsiteY2"/>
+              </a:cxn>
+              <a:cxn ang="0">
+                <a:pos x="connsiteX3" y="connsiteY3"/>
+              </a:cxn>
+              <a:cxn ang="0">
+                <a:pos x="connsiteX4" y="connsiteY4"/>
+              </a:cxn>
+              <a:cxn ang="0">
+                <a:pos x="connsiteX5" y="connsiteY5"/>
+              </a:cxn>
+              <a:cxn ang="0">
+                <a:pos x="connsiteX6" y="connsiteY6"/>
+              </a:cxn>
+            </a:cxnLst>
+            <a:rect l="l" t="t" r="r" b="b"/>
+            <a:pathLst>
+              <a:path w="2589777" h="2029155">
+                <a:moveTo>
+                  <a:pt x="932037" y="487518"/>
+                </a:moveTo>
+                <a:cubicBezTo>
+                  <a:pt x="1200443" y="355589"/>
+                  <a:pt x="1341470" y="-69766"/>
+                  <a:pt x="1614425" y="9846"/>
+                </a:cubicBezTo>
+                <a:cubicBezTo>
+                  <a:pt x="1887380" y="89458"/>
+                  <a:pt x="2483332" y="635370"/>
+                  <a:pt x="2569768" y="965191"/>
+                </a:cubicBezTo>
+                <a:cubicBezTo>
+                  <a:pt x="2656204" y="1295012"/>
+                  <a:pt x="2453762" y="1863668"/>
+                  <a:pt x="2133040" y="1988772"/>
+                </a:cubicBezTo>
+                <a:cubicBezTo>
+                  <a:pt x="1812318" y="2113876"/>
+                  <a:pt x="943411" y="1927356"/>
+                  <a:pt x="645435" y="1715816"/>
+                </a:cubicBezTo>
+                <a:cubicBezTo>
+                  <a:pt x="347459" y="1504276"/>
+                  <a:pt x="-43778" y="1006134"/>
+                  <a:pt x="3989" y="801418"/>
+                </a:cubicBezTo>
+                <a:cubicBezTo>
+                  <a:pt x="51756" y="596702"/>
+                  <a:pt x="663631" y="619447"/>
+                  <a:pt x="932037" y="487518"/>
+                </a:cubicBezTo>
+                <a:close/>
+              </a:path>
+            </a:pathLst>
+          </a:custGeom>
+          <a:solidFill>
+            <a:srgbClr val="2249CD">
+              <a:alpha val="36000"/>
+            </a:srgbClr>
+          </a:solidFill>
+        </p:spPr>
+        <p:style>
+          <a:lnRef idx="1">
+            <a:schemeClr val="accent1"/>
+          </a:lnRef>
+          <a:fillRef idx="3">
+            <a:schemeClr val="accent1"/>
+          </a:fillRef>
+          <a:effectRef idx="2">
+            <a:schemeClr val="accent1"/>
+          </a:effectRef>
+          <a:fontRef idx="minor">
+            <a:schemeClr val="lt1"/>
+          </a:fontRef>
+        </p:style>
+        <p:txBody>
+          <a:bodyPr rtlCol="0" anchor="ctr"/>
+          <a:lstStyle/>
+          <a:p>
+            <a:pPr algn="ctr"/>
+            <a:endParaRPr lang="en-US" dirty="0">
+              <a:latin typeface="Gill Sans MT" panose="020B0502020104020203" pitchFamily="34" charset="77"/>
+            </a:endParaRPr>
+          </a:p>
+        </p:txBody>
+      </p:sp>
+      <p:sp>
+        <p:nvSpPr>
+          <p:cNvPr id="2" name="Rectangle 1"/>
+          <p:cNvSpPr/>
+          <p:nvPr/>
+        </p:nvSpPr>
+        <p:spPr>
+          <a:xfrm>
+            <a:off x="5926813" y="3954021"/>
+            <a:ext cx="388248" cy="307777"/>
+          </a:xfrm>
+          <a:prstGeom prst="rect">
+            <a:avLst/>
+          </a:prstGeom>
+        </p:spPr>
+        <p:txBody>
+          <a:bodyPr wrap="none">
+            <a:spAutoFit/>
+          </a:bodyPr>
+          <a:lstStyle/>
+          <a:p>
+            <a:r>
+              <a:rPr lang="en-US" sz="1400" dirty="0">
+                <a:solidFill>
+                  <a:schemeClr val="bg1"/>
+                </a:solidFill>
+                <a:latin typeface="Gill Sans MT" panose="020B0502020104020203" pitchFamily="34" charset="77"/>
+                <a:ea typeface="Trebuchet MS" charset="0"/>
+                <a:cs typeface="Trebuchet MS" charset="0"/>
+              </a:rPr>
+              <a:t>TP</a:t>
+            </a:r>
+            <a:endParaRPr lang="en-US" sz="1400" dirty="0">
+              <a:solidFill>
+                <a:schemeClr val="bg1"/>
+              </a:solidFill>
+              <a:latin typeface="Gill Sans MT" panose="020B0502020104020203" pitchFamily="34" charset="77"/>
+            </a:endParaRPr>
+          </a:p>
+        </p:txBody>
+      </p:sp>
+      <p:sp>
+        <p:nvSpPr>
+          <p:cNvPr id="9" name="Rectangle 8"/>
+          <p:cNvSpPr/>
+          <p:nvPr/>
+        </p:nvSpPr>
+        <p:spPr>
+          <a:xfrm>
+            <a:off x="6925375" y="4529509"/>
+            <a:ext cx="360996" cy="307777"/>
+          </a:xfrm>
+          <a:prstGeom prst="rect">
+            <a:avLst/>
+          </a:prstGeom>
+        </p:spPr>
+        <p:txBody>
+          <a:bodyPr wrap="none">
+            <a:spAutoFit/>
+          </a:bodyPr>
+          <a:lstStyle/>
+          <a:p>
+            <a:r>
+              <a:rPr lang="en-US" sz="1400" dirty="0">
+                <a:solidFill>
+                  <a:schemeClr val="bg1"/>
+                </a:solidFill>
+                <a:latin typeface="Gill Sans MT" panose="020B0502020104020203" pitchFamily="34" charset="77"/>
+                <a:ea typeface="Trebuchet MS" charset="0"/>
+                <a:cs typeface="Trebuchet MS" charset="0"/>
+              </a:rPr>
+              <a:t>FP</a:t>
+            </a:r>
+            <a:endParaRPr lang="en-US" sz="1400" dirty="0">
+              <a:solidFill>
+                <a:schemeClr val="bg1"/>
+              </a:solidFill>
+              <a:latin typeface="Gill Sans MT" panose="020B0502020104020203" pitchFamily="34" charset="77"/>
+            </a:endParaRPr>
+          </a:p>
+        </p:txBody>
+      </p:sp>
+      <p:sp>
+        <p:nvSpPr>
+          <p:cNvPr id="10" name="Rectangle 9"/>
+          <p:cNvSpPr/>
+          <p:nvPr/>
+        </p:nvSpPr>
+        <p:spPr>
+          <a:xfrm>
+            <a:off x="4496066" y="3710637"/>
+            <a:ext cx="409086" cy="307777"/>
+          </a:xfrm>
+          <a:prstGeom prst="rect">
+            <a:avLst/>
+          </a:prstGeom>
+        </p:spPr>
+        <p:txBody>
+          <a:bodyPr wrap="none">
+            <a:spAutoFit/>
+          </a:bodyPr>
+          <a:lstStyle/>
+          <a:p>
+            <a:r>
+              <a:rPr lang="en-US" sz="1400" dirty="0">
+                <a:solidFill>
+                  <a:schemeClr val="bg1"/>
+                </a:solidFill>
+                <a:latin typeface="Gill Sans MT" panose="020B0502020104020203" pitchFamily="34" charset="77"/>
+                <a:ea typeface="Trebuchet MS" charset="0"/>
+                <a:cs typeface="Trebuchet MS" charset="0"/>
+              </a:rPr>
+              <a:t>FN</a:t>
+            </a:r>
+            <a:endParaRPr lang="en-US" sz="1400" dirty="0">
+              <a:solidFill>
+                <a:schemeClr val="bg1"/>
+              </a:solidFill>
+              <a:latin typeface="Gill Sans MT" panose="020B0502020104020203" pitchFamily="34" charset="77"/>
+            </a:endParaRPr>
+          </a:p>
+        </p:txBody>
+      </p:sp>
+      <p:sp>
+        <p:nvSpPr>
+          <p:cNvPr id="11" name="Rectangle 10"/>
+          <p:cNvSpPr/>
+          <p:nvPr/>
+        </p:nvSpPr>
+        <p:spPr>
+          <a:xfrm>
+            <a:off x="4307267" y="5132281"/>
+            <a:ext cx="433132" cy="307777"/>
+          </a:xfrm>
+          <a:prstGeom prst="rect">
+            <a:avLst/>
+          </a:prstGeom>
+        </p:spPr>
+        <p:txBody>
+          <a:bodyPr wrap="none">
+            <a:spAutoFit/>
+          </a:bodyPr>
+          <a:lstStyle/>
+          <a:p>
+            <a:r>
+              <a:rPr lang="en-US" sz="1400" dirty="0">
+                <a:latin typeface="Gill Sans MT" panose="020B0502020104020203" pitchFamily="34" charset="77"/>
+                <a:ea typeface="Trebuchet MS" charset="0"/>
+                <a:cs typeface="Trebuchet MS" charset="0"/>
+              </a:rPr>
+              <a:t>TN</a:t>
+            </a:r>
+            <a:endParaRPr lang="en-US" sz="1400" dirty="0">
+              <a:latin typeface="Gill Sans MT" panose="020B0502020104020203" pitchFamily="34" charset="77"/>
+            </a:endParaRPr>
+          </a:p>
+        </p:txBody>
+      </p:sp>
+      <p:sp>
+        <p:nvSpPr>
+          <p:cNvPr id="3" name="Slide Number Placeholder 2">
+            <a:extLst>
+              <a:ext uri="{FF2B5EF4-FFF2-40B4-BE49-F238E27FC236}">
+                <a16:creationId xmlns:a16="http://schemas.microsoft.com/office/drawing/2014/main" id="{35C96049-3F14-BD40-A92C-530C6871CCF9}"/>
+              </a:ext>
+            </a:extLst>
+          </p:cNvPr>
+          <p:cNvSpPr>
+            <a:spLocks noGrp="1"/>
+          </p:cNvSpPr>
+          <p:nvPr>
+            <p:ph type="sldNum" sz="quarter" idx="12"/>
+          </p:nvPr>
+        </p:nvSpPr>
+        <p:spPr/>
+        <p:txBody>
+          <a:bodyPr/>
+          <a:lstStyle/>
+          <a:p>
+            <a:fld id="{9C0B2870-7350-8D40-A01A-CE539DF873CB}" type="slidenum">
+              <a:rPr lang="en-US" smtClean="0"/>
+              <a:t>13</a:t>
             </a:fld>
             <a:endParaRPr lang="en-US"/>
           </a:p>
@@ -7895,7 +9294,7 @@
 </p:sld>
 </file>
 
-<file path=ppt/slides/slide12.xml><?xml version="1.0" encoding="utf-8"?>
+<file path=ppt/slides/slide14.xml><?xml version="1.0" encoding="utf-8"?>
 <p:sld xmlns:a="http://schemas.openxmlformats.org/drawingml/2006/main" xmlns:r="http://schemas.openxmlformats.org/officeDocument/2006/relationships" xmlns:p="http://schemas.openxmlformats.org/presentationml/2006/main">
   <p:cSld>
     <p:spTree>
@@ -9517,7 +10916,7 @@
           <a:p>
             <a:fld id="{9C0B2870-7350-8D40-A01A-CE539DF873CB}" type="slidenum">
               <a:rPr lang="en-US" smtClean="0"/>
-              <a:t>12</a:t>
+              <a:t>14</a:t>
             </a:fld>
             <a:endParaRPr lang="en-US"/>
           </a:p>
@@ -10007,7 +11406,7 @@
 </p:sld>
 </file>
 
-<file path=ppt/slides/slide13.xml><?xml version="1.0" encoding="utf-8"?>
+<file path=ppt/slides/slide15.xml><?xml version="1.0" encoding="utf-8"?>
 <p:sld xmlns:a="http://schemas.openxmlformats.org/drawingml/2006/main" xmlns:r="http://schemas.openxmlformats.org/officeDocument/2006/relationships" xmlns:p="http://schemas.openxmlformats.org/presentationml/2006/main">
   <p:cSld>
     <p:spTree>
@@ -10407,7 +11806,7 @@
           <a:p>
             <a:fld id="{9C0B2870-7350-8D40-A01A-CE539DF873CB}" type="slidenum">
               <a:rPr lang="en-US" smtClean="0"/>
-              <a:t>13</a:t>
+              <a:t>15</a:t>
             </a:fld>
             <a:endParaRPr lang="en-US"/>
           </a:p>
@@ -10680,7 +12079,7 @@
 </p:sld>
 </file>
 
-<file path=ppt/slides/slide14.xml><?xml version="1.0" encoding="utf-8"?>
+<file path=ppt/slides/slide16.xml><?xml version="1.0" encoding="utf-8"?>
 <p:sld xmlns:a="http://schemas.openxmlformats.org/drawingml/2006/main" xmlns:r="http://schemas.openxmlformats.org/officeDocument/2006/relationships" xmlns:p="http://schemas.openxmlformats.org/presentationml/2006/main">
   <p:cSld>
     <p:spTree>
@@ -11161,7 +12560,7 @@
           <a:p>
             <a:fld id="{9C0B2870-7350-8D40-A01A-CE539DF873CB}" type="slidenum">
               <a:rPr lang="en-US" smtClean="0"/>
-              <a:t>14</a:t>
+              <a:t>16</a:t>
             </a:fld>
             <a:endParaRPr lang="en-US"/>
           </a:p>
@@ -11485,7 +12884,7 @@
 </p:sld>
 </file>
 
-<file path=ppt/slides/slide15.xml><?xml version="1.0" encoding="utf-8"?>
+<file path=ppt/slides/slide17.xml><?xml version="1.0" encoding="utf-8"?>
 <p:sld xmlns:a="http://schemas.openxmlformats.org/drawingml/2006/main" xmlns:r="http://schemas.openxmlformats.org/officeDocument/2006/relationships" xmlns:p="http://schemas.openxmlformats.org/presentationml/2006/main">
   <p:cSld>
     <p:spTree>
@@ -12181,7 +13580,7 @@
           <a:p>
             <a:fld id="{9C0B2870-7350-8D40-A01A-CE539DF873CB}" type="slidenum">
               <a:rPr lang="en-US" smtClean="0"/>
-              <a:t>15</a:t>
+              <a:t>17</a:t>
             </a:fld>
             <a:endParaRPr lang="en-US"/>
           </a:p>
@@ -12377,7 +13776,7 @@
 </p:sld>
 </file>
 
-<file path=ppt/slides/slide16.xml><?xml version="1.0" encoding="utf-8"?>
+<file path=ppt/slides/slide18.xml><?xml version="1.0" encoding="utf-8"?>
 <p:sld xmlns:a="http://schemas.openxmlformats.org/drawingml/2006/main" xmlns:r="http://schemas.openxmlformats.org/officeDocument/2006/relationships" xmlns:p="http://schemas.openxmlformats.org/presentationml/2006/main">
   <p:cSld>
     <p:spTree>
@@ -13315,7 +14714,7 @@
           <a:p>
             <a:fld id="{9C0B2870-7350-8D40-A01A-CE539DF873CB}" type="slidenum">
               <a:rPr lang="en-US" smtClean="0"/>
-              <a:t>16</a:t>
+              <a:t>18</a:t>
             </a:fld>
             <a:endParaRPr lang="en-US"/>
           </a:p>
@@ -13937,7 +15336,7 @@
 </p:sld>
 </file>
 
-<file path=ppt/slides/slide17.xml><?xml version="1.0" encoding="utf-8"?>
+<file path=ppt/slides/slide19.xml><?xml version="1.0" encoding="utf-8"?>
 <p:sld xmlns:a="http://schemas.openxmlformats.org/drawingml/2006/main" xmlns:r="http://schemas.openxmlformats.org/officeDocument/2006/relationships" xmlns:p="http://schemas.openxmlformats.org/presentationml/2006/main">
   <p:cSld>
     <p:spTree>
@@ -14875,7 +16274,7 @@
           <a:p>
             <a:fld id="{9C0B2870-7350-8D40-A01A-CE539DF873CB}" type="slidenum">
               <a:rPr lang="en-US" smtClean="0"/>
-              <a:t>17</a:t>
+              <a:t>19</a:t>
             </a:fld>
             <a:endParaRPr lang="en-US"/>
           </a:p>
@@ -15424,13 +16823,13 @@
   <p:clrMapOvr>
     <a:masterClrMapping/>
   </p:clrMapOvr>
-  <mc:AlternateContent xmlns:mc="http://schemas.openxmlformats.org/markup-compatibility/2006">
-    <mc:Choice xmlns:p159="http://schemas.microsoft.com/office/powerpoint/2015/09/main" Requires="p159">
+  <mc:AlternateContent xmlns:mc="http://schemas.openxmlformats.org/markup-compatibility/2006" xmlns:p159="http://schemas.microsoft.com/office/powerpoint/2015/09/main">
+    <mc:Choice Requires="p159">
       <p:transition xmlns:p14="http://schemas.microsoft.com/office/powerpoint/2010/main" spd="slow" p14:dur="2000">
         <p159:morph option="byObject"/>
       </p:transition>
     </mc:Choice>
-    <mc:Fallback>
+    <mc:Fallback xmlns="">
       <p:transition spd="slow">
         <p:fade/>
       </p:transition>
@@ -15517,7 +16916,162 @@
 </p:sld>
 </file>
 
-<file path=ppt/slides/slide18.xml><?xml version="1.0" encoding="utf-8"?>
+<file path=ppt/slides/slide2.xml><?xml version="1.0" encoding="utf-8"?>
+<p:sld xmlns:a="http://schemas.openxmlformats.org/drawingml/2006/main" xmlns:r="http://schemas.openxmlformats.org/officeDocument/2006/relationships" xmlns:p="http://schemas.openxmlformats.org/presentationml/2006/main">
+  <p:cSld>
+    <p:spTree>
+      <p:nvGrpSpPr>
+        <p:cNvPr id="1" name=""/>
+        <p:cNvGrpSpPr/>
+        <p:nvPr/>
+      </p:nvGrpSpPr>
+      <p:grpSpPr>
+        <a:xfrm>
+          <a:off x="0" y="0"/>
+          <a:ext cx="0" cy="0"/>
+          <a:chOff x="0" y="0"/>
+          <a:chExt cx="0" cy="0"/>
+        </a:xfrm>
+      </p:grpSpPr>
+      <p:sp>
+        <p:nvSpPr>
+          <p:cNvPr id="4" name="TextBox 3"/>
+          <p:cNvSpPr txBox="1"/>
+          <p:nvPr/>
+        </p:nvSpPr>
+        <p:spPr>
+          <a:xfrm>
+            <a:off x="1196152" y="1306171"/>
+            <a:ext cx="3159839" cy="523220"/>
+          </a:xfrm>
+          <a:prstGeom prst="rect">
+            <a:avLst/>
+          </a:prstGeom>
+          <a:noFill/>
+        </p:spPr>
+        <p:txBody>
+          <a:bodyPr wrap="none" rtlCol="0">
+            <a:spAutoFit/>
+          </a:bodyPr>
+          <a:lstStyle/>
+          <a:p>
+            <a:r>
+              <a:rPr lang="en-US" sz="2800" dirty="0" err="1">
+                <a:solidFill>
+                  <a:schemeClr val="accent2"/>
+                </a:solidFill>
+                <a:latin typeface="Gill Sans MT" panose="020B0502020104020203" pitchFamily="34" charset="77"/>
+                <a:ea typeface="Trebuchet MS" charset="0"/>
+                <a:cs typeface="Trebuchet MS" charset="0"/>
+              </a:rPr>
+              <a:t>Matriz</a:t>
+            </a:r>
+            <a:r>
+              <a:rPr lang="en-US" sz="2800" dirty="0">
+                <a:solidFill>
+                  <a:schemeClr val="accent2"/>
+                </a:solidFill>
+                <a:latin typeface="Gill Sans MT" panose="020B0502020104020203" pitchFamily="34" charset="77"/>
+                <a:ea typeface="Trebuchet MS" charset="0"/>
+                <a:cs typeface="Trebuchet MS" charset="0"/>
+              </a:rPr>
+              <a:t> de </a:t>
+            </a:r>
+            <a:r>
+              <a:rPr lang="en-US" sz="2800" dirty="0" err="1">
+                <a:solidFill>
+                  <a:schemeClr val="accent2"/>
+                </a:solidFill>
+                <a:latin typeface="Gill Sans MT" panose="020B0502020104020203" pitchFamily="34" charset="77"/>
+                <a:ea typeface="Trebuchet MS" charset="0"/>
+                <a:cs typeface="Trebuchet MS" charset="0"/>
+              </a:rPr>
+              <a:t>Confusión</a:t>
+            </a:r>
+            <a:endParaRPr lang="en-US" sz="2800" dirty="0">
+              <a:solidFill>
+                <a:schemeClr val="accent2"/>
+              </a:solidFill>
+              <a:latin typeface="Gill Sans MT" panose="020B0502020104020203" pitchFamily="34" charset="77"/>
+              <a:ea typeface="Trebuchet MS" charset="0"/>
+              <a:cs typeface="Trebuchet MS" charset="0"/>
+            </a:endParaRPr>
+          </a:p>
+        </p:txBody>
+      </p:sp>
+      <p:pic>
+        <p:nvPicPr>
+          <p:cNvPr id="5" name="Picture 4"/>
+          <p:cNvPicPr>
+            <a:picLocks noChangeAspect="1"/>
+          </p:cNvPicPr>
+          <p:nvPr/>
+        </p:nvPicPr>
+        <p:blipFill>
+          <a:blip r:embed="rId2">
+            <a:extLst>
+              <a:ext uri="{28A0092B-C50C-407E-A947-70E740481C1C}">
+                <a14:useLocalDpi xmlns:a14="http://schemas.microsoft.com/office/drawing/2010/main" val="0"/>
+              </a:ext>
+            </a:extLst>
+          </a:blip>
+          <a:stretch>
+            <a:fillRect/>
+          </a:stretch>
+        </p:blipFill>
+        <p:spPr>
+          <a:xfrm>
+            <a:off x="1196152" y="2946064"/>
+            <a:ext cx="10566412" cy="2032003"/>
+          </a:xfrm>
+          <a:prstGeom prst="rect">
+            <a:avLst/>
+          </a:prstGeom>
+        </p:spPr>
+      </p:pic>
+      <p:sp>
+        <p:nvSpPr>
+          <p:cNvPr id="2" name="Slide Number Placeholder 1">
+            <a:extLst>
+              <a:ext uri="{FF2B5EF4-FFF2-40B4-BE49-F238E27FC236}">
+                <a16:creationId xmlns:a16="http://schemas.microsoft.com/office/drawing/2014/main" id="{335DD59E-61A1-184B-A324-CCE4C5D8D7EA}"/>
+              </a:ext>
+            </a:extLst>
+          </p:cNvPr>
+          <p:cNvSpPr>
+            <a:spLocks noGrp="1"/>
+          </p:cNvSpPr>
+          <p:nvPr>
+            <p:ph type="sldNum" sz="quarter" idx="12"/>
+          </p:nvPr>
+        </p:nvSpPr>
+        <p:spPr/>
+        <p:txBody>
+          <a:bodyPr/>
+          <a:lstStyle/>
+          <a:p>
+            <a:fld id="{9C0B2870-7350-8D40-A01A-CE539DF873CB}" type="slidenum">
+              <a:rPr lang="en-US" smtClean="0"/>
+              <a:t>2</a:t>
+            </a:fld>
+            <a:endParaRPr lang="en-US"/>
+          </a:p>
+        </p:txBody>
+      </p:sp>
+    </p:spTree>
+    <p:extLst>
+      <p:ext uri="{BB962C8B-B14F-4D97-AF65-F5344CB8AC3E}">
+        <p14:creationId xmlns:p14="http://schemas.microsoft.com/office/powerpoint/2010/main" val="1460943983"/>
+      </p:ext>
+    </p:extLst>
+  </p:cSld>
+  <p:clrMapOvr>
+    <a:masterClrMapping/>
+  </p:clrMapOvr>
+</p:sld>
+</file>
+
+<file path=ppt/slides/slide20.xml><?xml version="1.0" encoding="utf-8"?>
 <p:sld xmlns:a="http://schemas.openxmlformats.org/drawingml/2006/main" xmlns:r="http://schemas.openxmlformats.org/officeDocument/2006/relationships" xmlns:p="http://schemas.openxmlformats.org/presentationml/2006/main">
   <p:cSld>
     <p:spTree>
@@ -16455,7 +18009,7 @@
           <a:p>
             <a:fld id="{9C0B2870-7350-8D40-A01A-CE539DF873CB}" type="slidenum">
               <a:rPr lang="en-US" smtClean="0"/>
-              <a:t>18</a:t>
+              <a:t>20</a:t>
             </a:fld>
             <a:endParaRPr lang="en-US"/>
           </a:p>
@@ -17310,13 +18864,13 @@
   <p:clrMapOvr>
     <a:masterClrMapping/>
   </p:clrMapOvr>
-  <mc:AlternateContent xmlns:mc="http://schemas.openxmlformats.org/markup-compatibility/2006">
-    <mc:Choice xmlns:p159="http://schemas.microsoft.com/office/powerpoint/2015/09/main" Requires="p159">
+  <mc:AlternateContent xmlns:mc="http://schemas.openxmlformats.org/markup-compatibility/2006" xmlns:p159="http://schemas.microsoft.com/office/powerpoint/2015/09/main">
+    <mc:Choice Requires="p159">
       <p:transition xmlns:p14="http://schemas.microsoft.com/office/powerpoint/2010/main" spd="slow" p14:dur="2000">
         <p159:morph option="byObject"/>
       </p:transition>
     </mc:Choice>
-    <mc:Fallback>
+    <mc:Fallback xmlns="">
       <p:transition spd="slow">
         <p:fade/>
       </p:transition>
@@ -17490,7 +19044,7 @@
 </p:sld>
 </file>
 
-<file path=ppt/slides/slide19.xml><?xml version="1.0" encoding="utf-8"?>
+<file path=ppt/slides/slide21.xml><?xml version="1.0" encoding="utf-8"?>
 <p:sld xmlns:a="http://schemas.openxmlformats.org/drawingml/2006/main" xmlns:r="http://schemas.openxmlformats.org/officeDocument/2006/relationships" xmlns:p="http://schemas.openxmlformats.org/presentationml/2006/main">
   <p:cSld>
     <p:spTree>
@@ -17604,7 +19158,7 @@
           <a:p>
             <a:fld id="{9C0B2870-7350-8D40-A01A-CE539DF873CB}" type="slidenum">
               <a:rPr lang="en-US" smtClean="0"/>
-              <a:t>19</a:t>
+              <a:t>21</a:t>
             </a:fld>
             <a:endParaRPr lang="en-US"/>
           </a:p>
@@ -17623,162 +19177,7 @@
 </p:sld>
 </file>
 
-<file path=ppt/slides/slide2.xml><?xml version="1.0" encoding="utf-8"?>
-<p:sld xmlns:a="http://schemas.openxmlformats.org/drawingml/2006/main" xmlns:r="http://schemas.openxmlformats.org/officeDocument/2006/relationships" xmlns:p="http://schemas.openxmlformats.org/presentationml/2006/main">
-  <p:cSld>
-    <p:spTree>
-      <p:nvGrpSpPr>
-        <p:cNvPr id="1" name=""/>
-        <p:cNvGrpSpPr/>
-        <p:nvPr/>
-      </p:nvGrpSpPr>
-      <p:grpSpPr>
-        <a:xfrm>
-          <a:off x="0" y="0"/>
-          <a:ext cx="0" cy="0"/>
-          <a:chOff x="0" y="0"/>
-          <a:chExt cx="0" cy="0"/>
-        </a:xfrm>
-      </p:grpSpPr>
-      <p:sp>
-        <p:nvSpPr>
-          <p:cNvPr id="4" name="TextBox 3"/>
-          <p:cNvSpPr txBox="1"/>
-          <p:nvPr/>
-        </p:nvSpPr>
-        <p:spPr>
-          <a:xfrm>
-            <a:off x="1196152" y="1306171"/>
-            <a:ext cx="3159839" cy="523220"/>
-          </a:xfrm>
-          <a:prstGeom prst="rect">
-            <a:avLst/>
-          </a:prstGeom>
-          <a:noFill/>
-        </p:spPr>
-        <p:txBody>
-          <a:bodyPr wrap="none" rtlCol="0">
-            <a:spAutoFit/>
-          </a:bodyPr>
-          <a:lstStyle/>
-          <a:p>
-            <a:r>
-              <a:rPr lang="en-US" sz="2800" dirty="0" err="1">
-                <a:solidFill>
-                  <a:schemeClr val="accent2"/>
-                </a:solidFill>
-                <a:latin typeface="Gill Sans MT" panose="020B0502020104020203" pitchFamily="34" charset="77"/>
-                <a:ea typeface="Trebuchet MS" charset="0"/>
-                <a:cs typeface="Trebuchet MS" charset="0"/>
-              </a:rPr>
-              <a:t>Matriz</a:t>
-            </a:r>
-            <a:r>
-              <a:rPr lang="en-US" sz="2800" dirty="0">
-                <a:solidFill>
-                  <a:schemeClr val="accent2"/>
-                </a:solidFill>
-                <a:latin typeface="Gill Sans MT" panose="020B0502020104020203" pitchFamily="34" charset="77"/>
-                <a:ea typeface="Trebuchet MS" charset="0"/>
-                <a:cs typeface="Trebuchet MS" charset="0"/>
-              </a:rPr>
-              <a:t> de </a:t>
-            </a:r>
-            <a:r>
-              <a:rPr lang="en-US" sz="2800" dirty="0" err="1">
-                <a:solidFill>
-                  <a:schemeClr val="accent2"/>
-                </a:solidFill>
-                <a:latin typeface="Gill Sans MT" panose="020B0502020104020203" pitchFamily="34" charset="77"/>
-                <a:ea typeface="Trebuchet MS" charset="0"/>
-                <a:cs typeface="Trebuchet MS" charset="0"/>
-              </a:rPr>
-              <a:t>Confusión</a:t>
-            </a:r>
-            <a:endParaRPr lang="en-US" sz="2800" dirty="0">
-              <a:solidFill>
-                <a:schemeClr val="accent2"/>
-              </a:solidFill>
-              <a:latin typeface="Gill Sans MT" panose="020B0502020104020203" pitchFamily="34" charset="77"/>
-              <a:ea typeface="Trebuchet MS" charset="0"/>
-              <a:cs typeface="Trebuchet MS" charset="0"/>
-            </a:endParaRPr>
-          </a:p>
-        </p:txBody>
-      </p:sp>
-      <p:pic>
-        <p:nvPicPr>
-          <p:cNvPr id="5" name="Picture 4"/>
-          <p:cNvPicPr>
-            <a:picLocks noChangeAspect="1"/>
-          </p:cNvPicPr>
-          <p:nvPr/>
-        </p:nvPicPr>
-        <p:blipFill>
-          <a:blip r:embed="rId2">
-            <a:extLst>
-              <a:ext uri="{28A0092B-C50C-407E-A947-70E740481C1C}">
-                <a14:useLocalDpi xmlns:a14="http://schemas.microsoft.com/office/drawing/2010/main" val="0"/>
-              </a:ext>
-            </a:extLst>
-          </a:blip>
-          <a:stretch>
-            <a:fillRect/>
-          </a:stretch>
-        </p:blipFill>
-        <p:spPr>
-          <a:xfrm>
-            <a:off x="1196152" y="2946064"/>
-            <a:ext cx="10566412" cy="2032003"/>
-          </a:xfrm>
-          <a:prstGeom prst="rect">
-            <a:avLst/>
-          </a:prstGeom>
-        </p:spPr>
-      </p:pic>
-      <p:sp>
-        <p:nvSpPr>
-          <p:cNvPr id="2" name="Slide Number Placeholder 1">
-            <a:extLst>
-              <a:ext uri="{FF2B5EF4-FFF2-40B4-BE49-F238E27FC236}">
-                <a16:creationId xmlns:a16="http://schemas.microsoft.com/office/drawing/2014/main" id="{335DD59E-61A1-184B-A324-CCE4C5D8D7EA}"/>
-              </a:ext>
-            </a:extLst>
-          </p:cNvPr>
-          <p:cNvSpPr>
-            <a:spLocks noGrp="1"/>
-          </p:cNvSpPr>
-          <p:nvPr>
-            <p:ph type="sldNum" sz="quarter" idx="12"/>
-          </p:nvPr>
-        </p:nvSpPr>
-        <p:spPr/>
-        <p:txBody>
-          <a:bodyPr/>
-          <a:lstStyle/>
-          <a:p>
-            <a:fld id="{9C0B2870-7350-8D40-A01A-CE539DF873CB}" type="slidenum">
-              <a:rPr lang="en-US" smtClean="0"/>
-              <a:t>2</a:t>
-            </a:fld>
-            <a:endParaRPr lang="en-US"/>
-          </a:p>
-        </p:txBody>
-      </p:sp>
-    </p:spTree>
-    <p:extLst>
-      <p:ext uri="{BB962C8B-B14F-4D97-AF65-F5344CB8AC3E}">
-        <p14:creationId xmlns:p14="http://schemas.microsoft.com/office/powerpoint/2010/main" val="1460943983"/>
-      </p:ext>
-    </p:extLst>
-  </p:cSld>
-  <p:clrMapOvr>
-    <a:masterClrMapping/>
-  </p:clrMapOvr>
-</p:sld>
-</file>
-
-<file path=ppt/slides/slide20.xml><?xml version="1.0" encoding="utf-8"?>
+<file path=ppt/slides/slide22.xml><?xml version="1.0" encoding="utf-8"?>
 <p:sld xmlns:a="http://schemas.openxmlformats.org/drawingml/2006/main" xmlns:r="http://schemas.openxmlformats.org/officeDocument/2006/relationships" xmlns:p="http://schemas.openxmlformats.org/presentationml/2006/main">
   <p:cSld>
     <p:spTree>
@@ -17892,7 +19291,7 @@
           <a:p>
             <a:fld id="{9C0B2870-7350-8D40-A01A-CE539DF873CB}" type="slidenum">
               <a:rPr lang="en-US" smtClean="0"/>
-              <a:t>20</a:t>
+              <a:t>22</a:t>
             </a:fld>
             <a:endParaRPr lang="en-US"/>
           </a:p>
@@ -17911,7 +19310,7 @@
 </p:sld>
 </file>
 
-<file path=ppt/slides/slide21.xml><?xml version="1.0" encoding="utf-8"?>
+<file path=ppt/slides/slide23.xml><?xml version="1.0" encoding="utf-8"?>
 <p:sld xmlns:a="http://schemas.openxmlformats.org/drawingml/2006/main" xmlns:r="http://schemas.openxmlformats.org/officeDocument/2006/relationships" xmlns:p="http://schemas.openxmlformats.org/presentationml/2006/main">
   <p:cSld>
     <p:spTree>
@@ -18482,7 +19881,7 @@
           <a:p>
             <a:fld id="{9C0B2870-7350-8D40-A01A-CE539DF873CB}" type="slidenum">
               <a:rPr lang="en-US" smtClean="0"/>
-              <a:t>21</a:t>
+              <a:t>23</a:t>
             </a:fld>
             <a:endParaRPr lang="en-US"/>
           </a:p>
@@ -19235,7 +20634,7 @@
 </p:sld>
 </file>
 
-<file path=ppt/slides/slide22.xml><?xml version="1.0" encoding="utf-8"?>
+<file path=ppt/slides/slide24.xml><?xml version="1.0" encoding="utf-8"?>
 <p:sld xmlns:a="http://schemas.openxmlformats.org/drawingml/2006/main" xmlns:r="http://schemas.openxmlformats.org/officeDocument/2006/relationships" xmlns:p="http://schemas.openxmlformats.org/presentationml/2006/main">
   <p:cSld>
     <p:spTree>
@@ -20097,7 +21496,7 @@
           <a:p>
             <a:fld id="{9C0B2870-7350-8D40-A01A-CE539DF873CB}" type="slidenum">
               <a:rPr lang="en-US" smtClean="0"/>
-              <a:t>22</a:t>
+              <a:t>24</a:t>
             </a:fld>
             <a:endParaRPr lang="en-US"/>
           </a:p>
@@ -20748,7 +22147,7 @@
 </p:sld>
 </file>
 
-<file path=ppt/slides/slide23.xml><?xml version="1.0" encoding="utf-8"?>
+<file path=ppt/slides/slide25.xml><?xml version="1.0" encoding="utf-8"?>
 <p:sld xmlns:a="http://schemas.openxmlformats.org/drawingml/2006/main" xmlns:r="http://schemas.openxmlformats.org/officeDocument/2006/relationships" xmlns:p="http://schemas.openxmlformats.org/presentationml/2006/main">
   <p:cSld>
     <p:spTree>
@@ -24172,7 +25571,7 @@
           <a:p>
             <a:fld id="{9C0B2870-7350-8D40-A01A-CE539DF873CB}" type="slidenum">
               <a:rPr lang="en-US" smtClean="0"/>
-              <a:t>23</a:t>
+              <a:t>25</a:t>
             </a:fld>
             <a:endParaRPr lang="en-US"/>
           </a:p>
@@ -24503,7 +25902,7 @@
 </p:sld>
 </file>
 
-<file path=ppt/slides/slide24.xml><?xml version="1.0" encoding="utf-8"?>
+<file path=ppt/slides/slide26.xml><?xml version="1.0" encoding="utf-8"?>
 <p:sld xmlns:a="http://schemas.openxmlformats.org/drawingml/2006/main" xmlns:r="http://schemas.openxmlformats.org/officeDocument/2006/relationships" xmlns:p="http://schemas.openxmlformats.org/presentationml/2006/main">
   <p:cSld>
     <p:spTree>
@@ -24602,7 +26001,7 @@
           <a:p>
             <a:fld id="{9C0B2870-7350-8D40-A01A-CE539DF873CB}" type="slidenum">
               <a:rPr lang="en-US" smtClean="0"/>
-              <a:t>24</a:t>
+              <a:t>26</a:t>
             </a:fld>
             <a:endParaRPr lang="en-US"/>
           </a:p>
@@ -24621,7 +26020,7 @@
 </p:sld>
 </file>
 
-<file path=ppt/slides/slide25.xml><?xml version="1.0" encoding="utf-8"?>
+<file path=ppt/slides/slide27.xml><?xml version="1.0" encoding="utf-8"?>
 <p:sld xmlns:a="http://schemas.openxmlformats.org/drawingml/2006/main" xmlns:r="http://schemas.openxmlformats.org/officeDocument/2006/relationships" xmlns:p="http://schemas.openxmlformats.org/presentationml/2006/main">
   <p:cSld>
     <p:spTree>
@@ -25622,7 +27021,7 @@
           <a:p>
             <a:fld id="{9C0B2870-7350-8D40-A01A-CE539DF873CB}" type="slidenum">
               <a:rPr lang="en-US" smtClean="0"/>
-              <a:t>25</a:t>
+              <a:t>27</a:t>
             </a:fld>
             <a:endParaRPr lang="en-US"/>
           </a:p>
@@ -26443,7 +27842,7 @@
 </p:sld>
 </file>
 
-<file path=ppt/slides/slide26.xml><?xml version="1.0" encoding="utf-8"?>
+<file path=ppt/slides/slide28.xml><?xml version="1.0" encoding="utf-8"?>
 <p:sld xmlns:a="http://schemas.openxmlformats.org/drawingml/2006/main" xmlns:r="http://schemas.openxmlformats.org/officeDocument/2006/relationships" xmlns:p="http://schemas.openxmlformats.org/presentationml/2006/main">
   <p:cSld>
     <p:spTree>
@@ -27274,7 +28673,7 @@
           <a:p>
             <a:fld id="{9C0B2870-7350-8D40-A01A-CE539DF873CB}" type="slidenum">
               <a:rPr lang="en-US" smtClean="0"/>
-              <a:t>26</a:t>
+              <a:t>28</a:t>
             </a:fld>
             <a:endParaRPr lang="en-US"/>
           </a:p>
@@ -28317,7 +29716,7 @@
 </p:sld>
 </file>
 
-<file path=ppt/slides/slide27.xml><?xml version="1.0" encoding="utf-8"?>
+<file path=ppt/slides/slide29.xml><?xml version="1.0" encoding="utf-8"?>
 <p:sld xmlns:a="http://schemas.openxmlformats.org/drawingml/2006/main" xmlns:r="http://schemas.openxmlformats.org/officeDocument/2006/relationships" xmlns:p="http://schemas.openxmlformats.org/presentationml/2006/main">
   <p:cSld>
     <p:spTree>
@@ -31773,7 +33172,7 @@
           <a:p>
             <a:fld id="{9C0B2870-7350-8D40-A01A-CE539DF873CB}" type="slidenum">
               <a:rPr lang="en-US" smtClean="0"/>
-              <a:t>27</a:t>
+              <a:t>29</a:t>
             </a:fld>
             <a:endParaRPr lang="en-US"/>
           </a:p>
@@ -32101,370 +33500,6 @@
       <p:bldP spid="96" grpId="0"/>
     </p:bldLst>
   </p:timing>
-</p:sld>
-</file>
-
-<file path=ppt/slides/slide28.xml><?xml version="1.0" encoding="utf-8"?>
-<p:sld xmlns:a="http://schemas.openxmlformats.org/drawingml/2006/main" xmlns:r="http://schemas.openxmlformats.org/officeDocument/2006/relationships" xmlns:p="http://schemas.openxmlformats.org/presentationml/2006/main">
-  <p:cSld>
-    <p:spTree>
-      <p:nvGrpSpPr>
-        <p:cNvPr id="1" name=""/>
-        <p:cNvGrpSpPr/>
-        <p:nvPr/>
-      </p:nvGrpSpPr>
-      <p:grpSpPr>
-        <a:xfrm>
-          <a:off x="0" y="0"/>
-          <a:ext cx="0" cy="0"/>
-          <a:chOff x="0" y="0"/>
-          <a:chExt cx="0" cy="0"/>
-        </a:xfrm>
-      </p:grpSpPr>
-      <p:pic>
-        <p:nvPicPr>
-          <p:cNvPr id="6" name="Picture 5"/>
-          <p:cNvPicPr>
-            <a:picLocks noChangeAspect="1"/>
-          </p:cNvPicPr>
-          <p:nvPr/>
-        </p:nvPicPr>
-        <p:blipFill>
-          <a:blip r:embed="rId2">
-            <a:extLst>
-              <a:ext uri="{28A0092B-C50C-407E-A947-70E740481C1C}">
-                <a14:useLocalDpi xmlns:a14="http://schemas.microsoft.com/office/drawing/2010/main" val="0"/>
-              </a:ext>
-            </a:extLst>
-          </a:blip>
-          <a:stretch>
-            <a:fillRect/>
-          </a:stretch>
-        </p:blipFill>
-        <p:spPr>
-          <a:xfrm>
-            <a:off x="1524000" y="1249524"/>
-            <a:ext cx="9144000" cy="3395838"/>
-          </a:xfrm>
-          <a:prstGeom prst="rect">
-            <a:avLst/>
-          </a:prstGeom>
-        </p:spPr>
-      </p:pic>
-      <p:pic>
-        <p:nvPicPr>
-          <p:cNvPr id="7" name="Picture 6"/>
-          <p:cNvPicPr>
-            <a:picLocks noChangeAspect="1"/>
-          </p:cNvPicPr>
-          <p:nvPr/>
-        </p:nvPicPr>
-        <p:blipFill>
-          <a:blip r:embed="rId3">
-            <a:extLst>
-              <a:ext uri="{28A0092B-C50C-407E-A947-70E740481C1C}">
-                <a14:useLocalDpi xmlns:a14="http://schemas.microsoft.com/office/drawing/2010/main" val="0"/>
-              </a:ext>
-            </a:extLst>
-          </a:blip>
-          <a:stretch>
-            <a:fillRect/>
-          </a:stretch>
-        </p:blipFill>
-        <p:spPr>
-          <a:xfrm>
-            <a:off x="1524000" y="4659135"/>
-            <a:ext cx="9144000" cy="1804961"/>
-          </a:xfrm>
-          <a:prstGeom prst="rect">
-            <a:avLst/>
-          </a:prstGeom>
-          <a:solidFill>
-            <a:schemeClr val="bg1"/>
-          </a:solidFill>
-        </p:spPr>
-      </p:pic>
-      <p:sp>
-        <p:nvSpPr>
-          <p:cNvPr id="8" name="Rectangle 7"/>
-          <p:cNvSpPr/>
-          <p:nvPr/>
-        </p:nvSpPr>
-        <p:spPr>
-          <a:xfrm>
-            <a:off x="1524001" y="4636837"/>
-            <a:ext cx="1173707" cy="433311"/>
-          </a:xfrm>
-          <a:prstGeom prst="rect">
-            <a:avLst/>
-          </a:prstGeom>
-          <a:solidFill>
-            <a:schemeClr val="bg1"/>
-          </a:solidFill>
-          <a:ln>
-            <a:noFill/>
-          </a:ln>
-          <a:effectLst/>
-        </p:spPr>
-        <p:style>
-          <a:lnRef idx="1">
-            <a:schemeClr val="accent1"/>
-          </a:lnRef>
-          <a:fillRef idx="3">
-            <a:schemeClr val="accent1"/>
-          </a:fillRef>
-          <a:effectRef idx="2">
-            <a:schemeClr val="accent1"/>
-          </a:effectRef>
-          <a:fontRef idx="minor">
-            <a:schemeClr val="lt1"/>
-          </a:fontRef>
-        </p:style>
-        <p:txBody>
-          <a:bodyPr rtlCol="0" anchor="ctr"/>
-          <a:lstStyle/>
-          <a:p>
-            <a:pPr algn="ctr"/>
-            <a:endParaRPr lang="en-US" dirty="0">
-              <a:latin typeface="Gill Sans MT" panose="020B0502020104020203" pitchFamily="34" charset="77"/>
-            </a:endParaRPr>
-          </a:p>
-        </p:txBody>
-      </p:sp>
-      <p:sp>
-        <p:nvSpPr>
-          <p:cNvPr id="2" name="Slide Number Placeholder 1">
-            <a:extLst>
-              <a:ext uri="{FF2B5EF4-FFF2-40B4-BE49-F238E27FC236}">
-                <a16:creationId xmlns:a16="http://schemas.microsoft.com/office/drawing/2014/main" id="{11A7855F-9B90-5547-8408-DEFE51509F79}"/>
-              </a:ext>
-            </a:extLst>
-          </p:cNvPr>
-          <p:cNvSpPr>
-            <a:spLocks noGrp="1"/>
-          </p:cNvSpPr>
-          <p:nvPr>
-            <p:ph type="sldNum" sz="quarter" idx="12"/>
-          </p:nvPr>
-        </p:nvSpPr>
-        <p:spPr/>
-        <p:txBody>
-          <a:bodyPr/>
-          <a:lstStyle/>
-          <a:p>
-            <a:fld id="{9C0B2870-7350-8D40-A01A-CE539DF873CB}" type="slidenum">
-              <a:rPr lang="en-US" smtClean="0"/>
-              <a:t>28</a:t>
-            </a:fld>
-            <a:endParaRPr lang="en-US"/>
-          </a:p>
-        </p:txBody>
-      </p:sp>
-      <p:sp>
-        <p:nvSpPr>
-          <p:cNvPr id="4" name="TextBox 3">
-            <a:extLst>
-              <a:ext uri="{FF2B5EF4-FFF2-40B4-BE49-F238E27FC236}">
-                <a16:creationId xmlns:a16="http://schemas.microsoft.com/office/drawing/2014/main" id="{8BD8C2A1-F91D-1B8C-FDE6-F964729CF100}"/>
-              </a:ext>
-            </a:extLst>
-          </p:cNvPr>
-          <p:cNvSpPr txBox="1"/>
-          <p:nvPr/>
-        </p:nvSpPr>
-        <p:spPr>
-          <a:xfrm>
-            <a:off x="609597" y="468925"/>
-            <a:ext cx="3233257" cy="523220"/>
-          </a:xfrm>
-          <a:prstGeom prst="rect">
-            <a:avLst/>
-          </a:prstGeom>
-          <a:noFill/>
-        </p:spPr>
-        <p:txBody>
-          <a:bodyPr wrap="none" rtlCol="0">
-            <a:spAutoFit/>
-          </a:bodyPr>
-          <a:lstStyle/>
-          <a:p>
-            <a:r>
-              <a:rPr lang="en-US" sz="2800" dirty="0" err="1">
-                <a:solidFill>
-                  <a:schemeClr val="accent2"/>
-                </a:solidFill>
-                <a:latin typeface="Gill Sans MT" panose="020B0502020104020203" pitchFamily="34" charset="77"/>
-                <a:ea typeface="Trebuchet MS" charset="0"/>
-                <a:cs typeface="Trebuchet MS" charset="0"/>
-              </a:rPr>
-              <a:t>Ejemplo</a:t>
-            </a:r>
-            <a:r>
-              <a:rPr lang="en-US" sz="2800" dirty="0">
-                <a:solidFill>
-                  <a:schemeClr val="accent2"/>
-                </a:solidFill>
-                <a:latin typeface="Gill Sans MT" panose="020B0502020104020203" pitchFamily="34" charset="77"/>
-                <a:ea typeface="Trebuchet MS" charset="0"/>
-                <a:cs typeface="Trebuchet MS" charset="0"/>
-              </a:rPr>
-              <a:t>: Curva ROC</a:t>
-            </a:r>
-          </a:p>
-        </p:txBody>
-      </p:sp>
-    </p:spTree>
-    <p:extLst>
-      <p:ext uri="{BB962C8B-B14F-4D97-AF65-F5344CB8AC3E}">
-        <p14:creationId xmlns:p14="http://schemas.microsoft.com/office/powerpoint/2010/main" val="829725408"/>
-      </p:ext>
-    </p:extLst>
-  </p:cSld>
-  <p:clrMapOvr>
-    <a:masterClrMapping/>
-  </p:clrMapOvr>
-</p:sld>
-</file>
-
-<file path=ppt/slides/slide29.xml><?xml version="1.0" encoding="utf-8"?>
-<p:sld xmlns:a="http://schemas.openxmlformats.org/drawingml/2006/main" xmlns:r="http://schemas.openxmlformats.org/officeDocument/2006/relationships" xmlns:p="http://schemas.openxmlformats.org/presentationml/2006/main">
-  <p:cSld>
-    <p:spTree>
-      <p:nvGrpSpPr>
-        <p:cNvPr id="1" name=""/>
-        <p:cNvGrpSpPr/>
-        <p:nvPr/>
-      </p:nvGrpSpPr>
-      <p:grpSpPr>
-        <a:xfrm>
-          <a:off x="0" y="0"/>
-          <a:ext cx="0" cy="0"/>
-          <a:chOff x="0" y="0"/>
-          <a:chExt cx="0" cy="0"/>
-        </a:xfrm>
-      </p:grpSpPr>
-      <p:pic>
-        <p:nvPicPr>
-          <p:cNvPr id="4" name="Picture 3"/>
-          <p:cNvPicPr>
-            <a:picLocks noChangeAspect="1"/>
-          </p:cNvPicPr>
-          <p:nvPr/>
-        </p:nvPicPr>
-        <p:blipFill>
-          <a:blip r:embed="rId2">
-            <a:extLst>
-              <a:ext uri="{28A0092B-C50C-407E-A947-70E740481C1C}">
-                <a14:useLocalDpi xmlns:a14="http://schemas.microsoft.com/office/drawing/2010/main" val="0"/>
-              </a:ext>
-            </a:extLst>
-          </a:blip>
-          <a:stretch>
-            <a:fillRect/>
-          </a:stretch>
-        </p:blipFill>
-        <p:spPr>
-          <a:xfrm>
-            <a:off x="4322957" y="0"/>
-            <a:ext cx="6336387" cy="6575316"/>
-          </a:xfrm>
-          <a:prstGeom prst="rect">
-            <a:avLst/>
-          </a:prstGeom>
-        </p:spPr>
-      </p:pic>
-      <p:sp>
-        <p:nvSpPr>
-          <p:cNvPr id="2" name="Slide Number Placeholder 1">
-            <a:extLst>
-              <a:ext uri="{FF2B5EF4-FFF2-40B4-BE49-F238E27FC236}">
-                <a16:creationId xmlns:a16="http://schemas.microsoft.com/office/drawing/2014/main" id="{47861C62-FA92-1747-95D3-08B4DF16D61F}"/>
-              </a:ext>
-            </a:extLst>
-          </p:cNvPr>
-          <p:cNvSpPr>
-            <a:spLocks noGrp="1"/>
-          </p:cNvSpPr>
-          <p:nvPr>
-            <p:ph type="sldNum" sz="quarter" idx="12"/>
-          </p:nvPr>
-        </p:nvSpPr>
-        <p:spPr/>
-        <p:txBody>
-          <a:bodyPr/>
-          <a:lstStyle/>
-          <a:p>
-            <a:fld id="{9C0B2870-7350-8D40-A01A-CE539DF873CB}" type="slidenum">
-              <a:rPr lang="en-US" smtClean="0"/>
-              <a:t>29</a:t>
-            </a:fld>
-            <a:endParaRPr lang="en-US"/>
-          </a:p>
-        </p:txBody>
-      </p:sp>
-      <p:sp>
-        <p:nvSpPr>
-          <p:cNvPr id="3" name="TextBox 2">
-            <a:extLst>
-              <a:ext uri="{FF2B5EF4-FFF2-40B4-BE49-F238E27FC236}">
-                <a16:creationId xmlns:a16="http://schemas.microsoft.com/office/drawing/2014/main" id="{2995DF4F-A646-A7A4-E23F-71EDA0516E78}"/>
-              </a:ext>
-            </a:extLst>
-          </p:cNvPr>
-          <p:cNvSpPr txBox="1"/>
-          <p:nvPr/>
-        </p:nvSpPr>
-        <p:spPr>
-          <a:xfrm>
-            <a:off x="609597" y="468925"/>
-            <a:ext cx="3233257" cy="523220"/>
-          </a:xfrm>
-          <a:prstGeom prst="rect">
-            <a:avLst/>
-          </a:prstGeom>
-          <a:noFill/>
-        </p:spPr>
-        <p:txBody>
-          <a:bodyPr wrap="none" rtlCol="0">
-            <a:spAutoFit/>
-          </a:bodyPr>
-          <a:lstStyle/>
-          <a:p>
-            <a:r>
-              <a:rPr lang="en-US" sz="2800" dirty="0" err="1">
-                <a:solidFill>
-                  <a:schemeClr val="accent2"/>
-                </a:solidFill>
-                <a:latin typeface="Gill Sans MT" panose="020B0502020104020203" pitchFamily="34" charset="77"/>
-                <a:ea typeface="Trebuchet MS" charset="0"/>
-                <a:cs typeface="Trebuchet MS" charset="0"/>
-              </a:rPr>
-              <a:t>Ejemplo</a:t>
-            </a:r>
-            <a:r>
-              <a:rPr lang="en-US" sz="2800" dirty="0">
-                <a:solidFill>
-                  <a:schemeClr val="accent2"/>
-                </a:solidFill>
-                <a:latin typeface="Gill Sans MT" panose="020B0502020104020203" pitchFamily="34" charset="77"/>
-                <a:ea typeface="Trebuchet MS" charset="0"/>
-                <a:cs typeface="Trebuchet MS" charset="0"/>
-              </a:rPr>
-              <a:t>: Curva ROC</a:t>
-            </a:r>
-          </a:p>
-        </p:txBody>
-      </p:sp>
-    </p:spTree>
-    <p:extLst>
-      <p:ext uri="{BB962C8B-B14F-4D97-AF65-F5344CB8AC3E}">
-        <p14:creationId xmlns:p14="http://schemas.microsoft.com/office/powerpoint/2010/main" val="1276950903"/>
-      </p:ext>
-    </p:extLst>
-  </p:cSld>
-  <p:clrMapOvr>
-    <a:masterClrMapping/>
-  </p:clrMapOvr>
 </p:sld>
 </file>
 
@@ -33540,13 +34575,7 @@
   <p:cSld>
     <p:spTree>
       <p:nvGrpSpPr>
-        <p:cNvPr id="1" name="">
-          <a:extLst>
-            <a:ext uri="{FF2B5EF4-FFF2-40B4-BE49-F238E27FC236}">
-              <a16:creationId xmlns:a16="http://schemas.microsoft.com/office/drawing/2014/main" id="{4432189A-100E-A582-DC99-7E7845D0E492}"/>
-            </a:ext>
-          </a:extLst>
-        </p:cNvPr>
+        <p:cNvPr id="1" name=""/>
         <p:cNvGrpSpPr/>
         <p:nvPr/>
       </p:nvGrpSpPr>
@@ -33558,129 +34587,114 @@
           <a:chExt cx="0" cy="0"/>
         </a:xfrm>
       </p:grpSpPr>
-      <p:sp>
-        <p:nvSpPr>
-          <p:cNvPr id="4" name="TextBox 3">
-            <a:extLst>
-              <a:ext uri="{FF2B5EF4-FFF2-40B4-BE49-F238E27FC236}">
-                <a16:creationId xmlns:a16="http://schemas.microsoft.com/office/drawing/2014/main" id="{7A14C3AF-3D8A-1E4F-C6EC-A29E1D08CE2F}"/>
-              </a:ext>
-            </a:extLst>
-          </p:cNvPr>
-          <p:cNvSpPr txBox="1"/>
-          <p:nvPr/>
-        </p:nvSpPr>
-        <p:spPr>
-          <a:xfrm>
-            <a:off x="2209358" y="2459504"/>
-            <a:ext cx="7773283" cy="1938992"/>
+      <p:pic>
+        <p:nvPicPr>
+          <p:cNvPr id="6" name="Picture 5"/>
+          <p:cNvPicPr>
+            <a:picLocks noChangeAspect="1"/>
+          </p:cNvPicPr>
+          <p:nvPr/>
+        </p:nvPicPr>
+        <p:blipFill>
+          <a:blip r:embed="rId2">
+            <a:extLst>
+              <a:ext uri="{28A0092B-C50C-407E-A947-70E740481C1C}">
+                <a14:useLocalDpi xmlns:a14="http://schemas.microsoft.com/office/drawing/2010/main" val="0"/>
+              </a:ext>
+            </a:extLst>
+          </a:blip>
+          <a:stretch>
+            <a:fillRect/>
+          </a:stretch>
+        </p:blipFill>
+        <p:spPr>
+          <a:xfrm>
+            <a:off x="1524000" y="1249524"/>
+            <a:ext cx="9144000" cy="3395838"/>
           </a:xfrm>
           <a:prstGeom prst="rect">
             <a:avLst/>
           </a:prstGeom>
-          <a:noFill/>
-        </p:spPr>
-        <p:txBody>
-          <a:bodyPr wrap="none" rtlCol="0">
-            <a:spAutoFit/>
-          </a:bodyPr>
+        </p:spPr>
+      </p:pic>
+      <p:pic>
+        <p:nvPicPr>
+          <p:cNvPr id="7" name="Picture 6"/>
+          <p:cNvPicPr>
+            <a:picLocks noChangeAspect="1"/>
+          </p:cNvPicPr>
+          <p:nvPr/>
+        </p:nvPicPr>
+        <p:blipFill>
+          <a:blip r:embed="rId3">
+            <a:extLst>
+              <a:ext uri="{28A0092B-C50C-407E-A947-70E740481C1C}">
+                <a14:useLocalDpi xmlns:a14="http://schemas.microsoft.com/office/drawing/2010/main" val="0"/>
+              </a:ext>
+            </a:extLst>
+          </a:blip>
+          <a:stretch>
+            <a:fillRect/>
+          </a:stretch>
+        </p:blipFill>
+        <p:spPr>
+          <a:xfrm>
+            <a:off x="1524000" y="4659135"/>
+            <a:ext cx="9144000" cy="1804961"/>
+          </a:xfrm>
+          <a:prstGeom prst="rect">
+            <a:avLst/>
+          </a:prstGeom>
+          <a:solidFill>
+            <a:schemeClr val="bg1"/>
+          </a:solidFill>
+        </p:spPr>
+      </p:pic>
+      <p:sp>
+        <p:nvSpPr>
+          <p:cNvPr id="8" name="Rectangle 7"/>
+          <p:cNvSpPr/>
+          <p:nvPr/>
+        </p:nvSpPr>
+        <p:spPr>
+          <a:xfrm>
+            <a:off x="1524001" y="4636837"/>
+            <a:ext cx="1173707" cy="433311"/>
+          </a:xfrm>
+          <a:prstGeom prst="rect">
+            <a:avLst/>
+          </a:prstGeom>
+          <a:solidFill>
+            <a:schemeClr val="bg1"/>
+          </a:solidFill>
+          <a:ln>
+            <a:noFill/>
+          </a:ln>
+          <a:effectLst/>
+        </p:spPr>
+        <p:style>
+          <a:lnRef idx="1">
+            <a:schemeClr val="accent1"/>
+          </a:lnRef>
+          <a:fillRef idx="3">
+            <a:schemeClr val="accent1"/>
+          </a:fillRef>
+          <a:effectRef idx="2">
+            <a:schemeClr val="accent1"/>
+          </a:effectRef>
+          <a:fontRef idx="minor">
+            <a:schemeClr val="lt1"/>
+          </a:fontRef>
+        </p:style>
+        <p:txBody>
+          <a:bodyPr rtlCol="0" anchor="ctr"/>
           <a:lstStyle/>
           <a:p>
             <a:pPr algn="ctr"/>
-            <a:r>
-              <a:rPr lang="en-US" sz="6000" dirty="0" err="1">
-                <a:latin typeface="Gill Sans MT" panose="020B0502020104020203" pitchFamily="34" charset="77"/>
-              </a:rPr>
-              <a:t>Genuinos</a:t>
-            </a:r>
-            <a:r>
-              <a:rPr lang="en-US" sz="6000" dirty="0">
-                <a:latin typeface="Gill Sans MT" panose="020B0502020104020203" pitchFamily="34" charset="77"/>
-              </a:rPr>
-              <a:t> &amp; </a:t>
-            </a:r>
-            <a:r>
-              <a:rPr lang="en-US" sz="6000" dirty="0" err="1">
-                <a:latin typeface="Gill Sans MT" panose="020B0502020104020203" pitchFamily="34" charset="77"/>
-              </a:rPr>
-              <a:t>Impostores</a:t>
-            </a:r>
-            <a:endParaRPr lang="en-US" sz="4400" dirty="0">
+            <a:endParaRPr lang="en-US" dirty="0">
               <a:latin typeface="Gill Sans MT" panose="020B0502020104020203" pitchFamily="34" charset="77"/>
             </a:endParaRPr>
           </a:p>
-          <a:p>
-            <a:pPr algn="ctr"/>
-            <a:r>
-              <a:rPr lang="en-US" sz="6000" dirty="0">
-                <a:latin typeface="Gill Sans MT" panose="020B0502020104020203" pitchFamily="34" charset="77"/>
-              </a:rPr>
-              <a:t> </a:t>
-            </a:r>
-            <a:r>
-              <a:rPr lang="en-US" sz="3600" dirty="0">
-                <a:solidFill>
-                  <a:schemeClr val="accent2"/>
-                </a:solidFill>
-                <a:latin typeface="Gill Sans MT" panose="020B0502020104020203" pitchFamily="34" charset="77"/>
-              </a:rPr>
-              <a:t>(</a:t>
-            </a:r>
-            <a:r>
-              <a:rPr lang="en-US" sz="3600" dirty="0" err="1">
-                <a:solidFill>
-                  <a:schemeClr val="accent2"/>
-                </a:solidFill>
-                <a:latin typeface="Gill Sans MT" panose="020B0502020104020203" pitchFamily="34" charset="77"/>
-              </a:rPr>
-              <a:t>métricas</a:t>
-            </a:r>
-            <a:r>
-              <a:rPr lang="en-US" sz="3600" dirty="0">
-                <a:solidFill>
-                  <a:schemeClr val="accent2"/>
-                </a:solidFill>
-                <a:latin typeface="Gill Sans MT" panose="020B0502020104020203" pitchFamily="34" charset="77"/>
-              </a:rPr>
-              <a:t> </a:t>
-            </a:r>
-            <a:r>
-              <a:rPr lang="en-US" sz="3600" dirty="0" err="1">
-                <a:solidFill>
-                  <a:schemeClr val="accent2"/>
-                </a:solidFill>
-                <a:latin typeface="Gill Sans MT" panose="020B0502020104020203" pitchFamily="34" charset="77"/>
-              </a:rPr>
-              <a:t>en</a:t>
-            </a:r>
-            <a:r>
-              <a:rPr lang="en-US" sz="3600" dirty="0">
-                <a:solidFill>
-                  <a:schemeClr val="accent2"/>
-                </a:solidFill>
-                <a:latin typeface="Gill Sans MT" panose="020B0502020104020203" pitchFamily="34" charset="77"/>
-              </a:rPr>
-              <a:t> </a:t>
-            </a:r>
-            <a:r>
-              <a:rPr lang="en-US" sz="3600" dirty="0" err="1">
-                <a:solidFill>
-                  <a:schemeClr val="accent2"/>
-                </a:solidFill>
-                <a:latin typeface="Gill Sans MT" panose="020B0502020104020203" pitchFamily="34" charset="77"/>
-              </a:rPr>
-              <a:t>biometría</a:t>
-            </a:r>
-            <a:r>
-              <a:rPr lang="en-US" sz="3600" dirty="0">
-                <a:solidFill>
-                  <a:schemeClr val="accent2"/>
-                </a:solidFill>
-                <a:latin typeface="Gill Sans MT" panose="020B0502020104020203" pitchFamily="34" charset="77"/>
-              </a:rPr>
-              <a:t>)</a:t>
-            </a:r>
-          </a:p>
         </p:txBody>
       </p:sp>
       <p:sp>
@@ -33688,7 +34702,7 @@
           <p:cNvPr id="2" name="Slide Number Placeholder 1">
             <a:extLst>
               <a:ext uri="{FF2B5EF4-FFF2-40B4-BE49-F238E27FC236}">
-                <a16:creationId xmlns:a16="http://schemas.microsoft.com/office/drawing/2014/main" id="{08CB9405-C699-7F92-D3F6-B6FA11FB179E}"/>
+                <a16:creationId xmlns:a16="http://schemas.microsoft.com/office/drawing/2014/main" id="{11A7855F-9B90-5547-8408-DEFE51509F79}"/>
               </a:ext>
             </a:extLst>
           </p:cNvPr>
@@ -33712,10 +34726,63 @@
           </a:p>
         </p:txBody>
       </p:sp>
+      <p:sp>
+        <p:nvSpPr>
+          <p:cNvPr id="4" name="TextBox 3">
+            <a:extLst>
+              <a:ext uri="{FF2B5EF4-FFF2-40B4-BE49-F238E27FC236}">
+                <a16:creationId xmlns:a16="http://schemas.microsoft.com/office/drawing/2014/main" id="{8BD8C2A1-F91D-1B8C-FDE6-F964729CF100}"/>
+              </a:ext>
+            </a:extLst>
+          </p:cNvPr>
+          <p:cNvSpPr txBox="1"/>
+          <p:nvPr/>
+        </p:nvSpPr>
+        <p:spPr>
+          <a:xfrm>
+            <a:off x="609597" y="468925"/>
+            <a:ext cx="3233257" cy="523220"/>
+          </a:xfrm>
+          <a:prstGeom prst="rect">
+            <a:avLst/>
+          </a:prstGeom>
+          <a:noFill/>
+        </p:spPr>
+        <p:txBody>
+          <a:bodyPr wrap="none" rtlCol="0">
+            <a:spAutoFit/>
+          </a:bodyPr>
+          <a:lstStyle/>
+          <a:p>
+            <a:r>
+              <a:rPr lang="en-US" sz="2800" dirty="0" err="1">
+                <a:solidFill>
+                  <a:schemeClr val="accent2"/>
+                </a:solidFill>
+                <a:latin typeface="Gill Sans MT" panose="020B0502020104020203" pitchFamily="34" charset="77"/>
+                <a:ea typeface="Trebuchet MS" charset="0"/>
+                <a:cs typeface="Trebuchet MS" charset="0"/>
+              </a:rPr>
+              <a:t>Ejemplo</a:t>
+            </a:r>
+            <a:r>
+              <a:rPr lang="en-US" sz="2800" dirty="0">
+                <a:solidFill>
+                  <a:schemeClr val="accent2"/>
+                </a:solidFill>
+                <a:latin typeface="Gill Sans MT" panose="020B0502020104020203" pitchFamily="34" charset="77"/>
+                <a:ea typeface="Trebuchet MS" charset="0"/>
+                <a:cs typeface="Trebuchet MS" charset="0"/>
+              </a:rPr>
+              <a:t>: Curva ROC</a:t>
+            </a:r>
+          </a:p>
+        </p:txBody>
+      </p:sp>
     </p:spTree>
     <p:extLst>
       <p:ext uri="{BB962C8B-B14F-4D97-AF65-F5344CB8AC3E}">
-        <p14:creationId xmlns:p14="http://schemas.microsoft.com/office/powerpoint/2010/main" val="2572176776"/>
+        <p14:creationId xmlns:p14="http://schemas.microsoft.com/office/powerpoint/2010/main" val="829725408"/>
       </p:ext>
     </p:extLst>
   </p:cSld>
@@ -33742,6 +34809,338 @@
           <a:chExt cx="0" cy="0"/>
         </a:xfrm>
       </p:grpSpPr>
+      <p:pic>
+        <p:nvPicPr>
+          <p:cNvPr id="4" name="Picture 3"/>
+          <p:cNvPicPr>
+            <a:picLocks noChangeAspect="1"/>
+          </p:cNvPicPr>
+          <p:nvPr/>
+        </p:nvPicPr>
+        <p:blipFill>
+          <a:blip r:embed="rId2">
+            <a:extLst>
+              <a:ext uri="{28A0092B-C50C-407E-A947-70E740481C1C}">
+                <a14:useLocalDpi xmlns:a14="http://schemas.microsoft.com/office/drawing/2010/main" val="0"/>
+              </a:ext>
+            </a:extLst>
+          </a:blip>
+          <a:stretch>
+            <a:fillRect/>
+          </a:stretch>
+        </p:blipFill>
+        <p:spPr>
+          <a:xfrm>
+            <a:off x="4322957" y="0"/>
+            <a:ext cx="6336387" cy="6575316"/>
+          </a:xfrm>
+          <a:prstGeom prst="rect">
+            <a:avLst/>
+          </a:prstGeom>
+        </p:spPr>
+      </p:pic>
+      <p:sp>
+        <p:nvSpPr>
+          <p:cNvPr id="2" name="Slide Number Placeholder 1">
+            <a:extLst>
+              <a:ext uri="{FF2B5EF4-FFF2-40B4-BE49-F238E27FC236}">
+                <a16:creationId xmlns:a16="http://schemas.microsoft.com/office/drawing/2014/main" id="{47861C62-FA92-1747-95D3-08B4DF16D61F}"/>
+              </a:ext>
+            </a:extLst>
+          </p:cNvPr>
+          <p:cNvSpPr>
+            <a:spLocks noGrp="1"/>
+          </p:cNvSpPr>
+          <p:nvPr>
+            <p:ph type="sldNum" sz="quarter" idx="12"/>
+          </p:nvPr>
+        </p:nvSpPr>
+        <p:spPr/>
+        <p:txBody>
+          <a:bodyPr/>
+          <a:lstStyle/>
+          <a:p>
+            <a:fld id="{9C0B2870-7350-8D40-A01A-CE539DF873CB}" type="slidenum">
+              <a:rPr lang="en-US" smtClean="0"/>
+              <a:t>31</a:t>
+            </a:fld>
+            <a:endParaRPr lang="en-US"/>
+          </a:p>
+        </p:txBody>
+      </p:sp>
+      <p:sp>
+        <p:nvSpPr>
+          <p:cNvPr id="3" name="TextBox 2">
+            <a:extLst>
+              <a:ext uri="{FF2B5EF4-FFF2-40B4-BE49-F238E27FC236}">
+                <a16:creationId xmlns:a16="http://schemas.microsoft.com/office/drawing/2014/main" id="{2995DF4F-A646-A7A4-E23F-71EDA0516E78}"/>
+              </a:ext>
+            </a:extLst>
+          </p:cNvPr>
+          <p:cNvSpPr txBox="1"/>
+          <p:nvPr/>
+        </p:nvSpPr>
+        <p:spPr>
+          <a:xfrm>
+            <a:off x="609597" y="468925"/>
+            <a:ext cx="3233257" cy="523220"/>
+          </a:xfrm>
+          <a:prstGeom prst="rect">
+            <a:avLst/>
+          </a:prstGeom>
+          <a:noFill/>
+        </p:spPr>
+        <p:txBody>
+          <a:bodyPr wrap="none" rtlCol="0">
+            <a:spAutoFit/>
+          </a:bodyPr>
+          <a:lstStyle/>
+          <a:p>
+            <a:r>
+              <a:rPr lang="en-US" sz="2800" dirty="0" err="1">
+                <a:solidFill>
+                  <a:schemeClr val="accent2"/>
+                </a:solidFill>
+                <a:latin typeface="Gill Sans MT" panose="020B0502020104020203" pitchFamily="34" charset="77"/>
+                <a:ea typeface="Trebuchet MS" charset="0"/>
+                <a:cs typeface="Trebuchet MS" charset="0"/>
+              </a:rPr>
+              <a:t>Ejemplo</a:t>
+            </a:r>
+            <a:r>
+              <a:rPr lang="en-US" sz="2800" dirty="0">
+                <a:solidFill>
+                  <a:schemeClr val="accent2"/>
+                </a:solidFill>
+                <a:latin typeface="Gill Sans MT" panose="020B0502020104020203" pitchFamily="34" charset="77"/>
+                <a:ea typeface="Trebuchet MS" charset="0"/>
+                <a:cs typeface="Trebuchet MS" charset="0"/>
+              </a:rPr>
+              <a:t>: Curva ROC</a:t>
+            </a:r>
+          </a:p>
+        </p:txBody>
+      </p:sp>
+    </p:spTree>
+    <p:extLst>
+      <p:ext uri="{BB962C8B-B14F-4D97-AF65-F5344CB8AC3E}">
+        <p14:creationId xmlns:p14="http://schemas.microsoft.com/office/powerpoint/2010/main" val="1276950903"/>
+      </p:ext>
+    </p:extLst>
+  </p:cSld>
+  <p:clrMapOvr>
+    <a:masterClrMapping/>
+  </p:clrMapOvr>
+</p:sld>
+</file>
+
+<file path=ppt/slides/slide32.xml><?xml version="1.0" encoding="utf-8"?>
+<p:sld xmlns:a="http://schemas.openxmlformats.org/drawingml/2006/main" xmlns:r="http://schemas.openxmlformats.org/officeDocument/2006/relationships" xmlns:p="http://schemas.openxmlformats.org/presentationml/2006/main">
+  <p:cSld>
+    <p:spTree>
+      <p:nvGrpSpPr>
+        <p:cNvPr id="1" name="">
+          <a:extLst>
+            <a:ext uri="{FF2B5EF4-FFF2-40B4-BE49-F238E27FC236}">
+              <a16:creationId xmlns:a16="http://schemas.microsoft.com/office/drawing/2014/main" id="{4432189A-100E-A582-DC99-7E7845D0E492}"/>
+            </a:ext>
+          </a:extLst>
+        </p:cNvPr>
+        <p:cNvGrpSpPr/>
+        <p:nvPr/>
+      </p:nvGrpSpPr>
+      <p:grpSpPr>
+        <a:xfrm>
+          <a:off x="0" y="0"/>
+          <a:ext cx="0" cy="0"/>
+          <a:chOff x="0" y="0"/>
+          <a:chExt cx="0" cy="0"/>
+        </a:xfrm>
+      </p:grpSpPr>
+      <p:sp>
+        <p:nvSpPr>
+          <p:cNvPr id="4" name="TextBox 3">
+            <a:extLst>
+              <a:ext uri="{FF2B5EF4-FFF2-40B4-BE49-F238E27FC236}">
+                <a16:creationId xmlns:a16="http://schemas.microsoft.com/office/drawing/2014/main" id="{7A14C3AF-3D8A-1E4F-C6EC-A29E1D08CE2F}"/>
+              </a:ext>
+            </a:extLst>
+          </p:cNvPr>
+          <p:cNvSpPr txBox="1"/>
+          <p:nvPr/>
+        </p:nvSpPr>
+        <p:spPr>
+          <a:xfrm>
+            <a:off x="2209358" y="2459504"/>
+            <a:ext cx="7773283" cy="1938992"/>
+          </a:xfrm>
+          <a:prstGeom prst="rect">
+            <a:avLst/>
+          </a:prstGeom>
+          <a:noFill/>
+        </p:spPr>
+        <p:txBody>
+          <a:bodyPr wrap="none" rtlCol="0">
+            <a:spAutoFit/>
+          </a:bodyPr>
+          <a:lstStyle/>
+          <a:p>
+            <a:pPr algn="ctr"/>
+            <a:r>
+              <a:rPr lang="en-US" sz="6000" dirty="0" err="1">
+                <a:latin typeface="Gill Sans MT" panose="020B0502020104020203" pitchFamily="34" charset="77"/>
+              </a:rPr>
+              <a:t>Genuinos</a:t>
+            </a:r>
+            <a:r>
+              <a:rPr lang="en-US" sz="6000" dirty="0">
+                <a:latin typeface="Gill Sans MT" panose="020B0502020104020203" pitchFamily="34" charset="77"/>
+              </a:rPr>
+              <a:t> &amp; </a:t>
+            </a:r>
+            <a:r>
+              <a:rPr lang="en-US" sz="6000" dirty="0" err="1">
+                <a:latin typeface="Gill Sans MT" panose="020B0502020104020203" pitchFamily="34" charset="77"/>
+              </a:rPr>
+              <a:t>Impostores</a:t>
+            </a:r>
+            <a:endParaRPr lang="en-US" sz="4400" dirty="0">
+              <a:latin typeface="Gill Sans MT" panose="020B0502020104020203" pitchFamily="34" charset="77"/>
+            </a:endParaRPr>
+          </a:p>
+          <a:p>
+            <a:pPr algn="ctr"/>
+            <a:r>
+              <a:rPr lang="en-US" sz="6000" dirty="0">
+                <a:latin typeface="Gill Sans MT" panose="020B0502020104020203" pitchFamily="34" charset="77"/>
+              </a:rPr>
+              <a:t> </a:t>
+            </a:r>
+            <a:r>
+              <a:rPr lang="en-US" sz="3600" dirty="0">
+                <a:solidFill>
+                  <a:schemeClr val="accent2"/>
+                </a:solidFill>
+                <a:latin typeface="Gill Sans MT" panose="020B0502020104020203" pitchFamily="34" charset="77"/>
+              </a:rPr>
+              <a:t>(</a:t>
+            </a:r>
+            <a:r>
+              <a:rPr lang="en-US" sz="3600" dirty="0" err="1">
+                <a:solidFill>
+                  <a:schemeClr val="accent2"/>
+                </a:solidFill>
+                <a:latin typeface="Gill Sans MT" panose="020B0502020104020203" pitchFamily="34" charset="77"/>
+              </a:rPr>
+              <a:t>métricas</a:t>
+            </a:r>
+            <a:r>
+              <a:rPr lang="en-US" sz="3600" dirty="0">
+                <a:solidFill>
+                  <a:schemeClr val="accent2"/>
+                </a:solidFill>
+                <a:latin typeface="Gill Sans MT" panose="020B0502020104020203" pitchFamily="34" charset="77"/>
+              </a:rPr>
+              <a:t> </a:t>
+            </a:r>
+            <a:r>
+              <a:rPr lang="en-US" sz="3600" dirty="0" err="1">
+                <a:solidFill>
+                  <a:schemeClr val="accent2"/>
+                </a:solidFill>
+                <a:latin typeface="Gill Sans MT" panose="020B0502020104020203" pitchFamily="34" charset="77"/>
+              </a:rPr>
+              <a:t>en</a:t>
+            </a:r>
+            <a:r>
+              <a:rPr lang="en-US" sz="3600" dirty="0">
+                <a:solidFill>
+                  <a:schemeClr val="accent2"/>
+                </a:solidFill>
+                <a:latin typeface="Gill Sans MT" panose="020B0502020104020203" pitchFamily="34" charset="77"/>
+              </a:rPr>
+              <a:t> </a:t>
+            </a:r>
+            <a:r>
+              <a:rPr lang="en-US" sz="3600" dirty="0" err="1">
+                <a:solidFill>
+                  <a:schemeClr val="accent2"/>
+                </a:solidFill>
+                <a:latin typeface="Gill Sans MT" panose="020B0502020104020203" pitchFamily="34" charset="77"/>
+              </a:rPr>
+              <a:t>biometría</a:t>
+            </a:r>
+            <a:r>
+              <a:rPr lang="en-US" sz="3600" dirty="0">
+                <a:solidFill>
+                  <a:schemeClr val="accent2"/>
+                </a:solidFill>
+                <a:latin typeface="Gill Sans MT" panose="020B0502020104020203" pitchFamily="34" charset="77"/>
+              </a:rPr>
+              <a:t>)</a:t>
+            </a:r>
+          </a:p>
+        </p:txBody>
+      </p:sp>
+      <p:sp>
+        <p:nvSpPr>
+          <p:cNvPr id="2" name="Slide Number Placeholder 1">
+            <a:extLst>
+              <a:ext uri="{FF2B5EF4-FFF2-40B4-BE49-F238E27FC236}">
+                <a16:creationId xmlns:a16="http://schemas.microsoft.com/office/drawing/2014/main" id="{08CB9405-C699-7F92-D3F6-B6FA11FB179E}"/>
+              </a:ext>
+            </a:extLst>
+          </p:cNvPr>
+          <p:cNvSpPr>
+            <a:spLocks noGrp="1"/>
+          </p:cNvSpPr>
+          <p:nvPr>
+            <p:ph type="sldNum" sz="quarter" idx="12"/>
+          </p:nvPr>
+        </p:nvSpPr>
+        <p:spPr/>
+        <p:txBody>
+          <a:bodyPr/>
+          <a:lstStyle/>
+          <a:p>
+            <a:fld id="{9C0B2870-7350-8D40-A01A-CE539DF873CB}" type="slidenum">
+              <a:rPr lang="en-US" smtClean="0"/>
+              <a:t>32</a:t>
+            </a:fld>
+            <a:endParaRPr lang="en-US"/>
+          </a:p>
+        </p:txBody>
+      </p:sp>
+    </p:spTree>
+    <p:extLst>
+      <p:ext uri="{BB962C8B-B14F-4D97-AF65-F5344CB8AC3E}">
+        <p14:creationId xmlns:p14="http://schemas.microsoft.com/office/powerpoint/2010/main" val="2572176776"/>
+      </p:ext>
+    </p:extLst>
+  </p:cSld>
+  <p:clrMapOvr>
+    <a:masterClrMapping/>
+  </p:clrMapOvr>
+</p:sld>
+</file>
+
+<file path=ppt/slides/slide33.xml><?xml version="1.0" encoding="utf-8"?>
+<p:sld xmlns:a="http://schemas.openxmlformats.org/drawingml/2006/main" xmlns:r="http://schemas.openxmlformats.org/officeDocument/2006/relationships" xmlns:p="http://schemas.openxmlformats.org/presentationml/2006/main">
+  <p:cSld>
+    <p:spTree>
+      <p:nvGrpSpPr>
+        <p:cNvPr id="1" name=""/>
+        <p:cNvGrpSpPr/>
+        <p:nvPr/>
+      </p:nvGrpSpPr>
+      <p:grpSpPr>
+        <a:xfrm>
+          <a:off x="0" y="0"/>
+          <a:ext cx="0" cy="0"/>
+          <a:chOff x="0" y="0"/>
+          <a:chExt cx="0" cy="0"/>
+        </a:xfrm>
+      </p:grpSpPr>
       <p:sp>
         <p:nvSpPr>
           <p:cNvPr id="25" name="Rectangle 24"/>
@@ -35190,7 +36589,7 @@
 </p:sld>
 </file>
 
-<file path=ppt/slides/slide32.xml><?xml version="1.0" encoding="utf-8"?>
+<file path=ppt/slides/slide34.xml><?xml version="1.0" encoding="utf-8"?>
 <p:sld xmlns:a="http://schemas.openxmlformats.org/drawingml/2006/main" xmlns:r="http://schemas.openxmlformats.org/officeDocument/2006/relationships" xmlns:p="http://schemas.openxmlformats.org/presentationml/2006/main">
   <p:cSld>
     <p:spTree>
@@ -37409,7 +38808,7 @@
 </p:sld>
 </file>
 
-<file path=ppt/slides/slide33.xml><?xml version="1.0" encoding="utf-8"?>
+<file path=ppt/slides/slide35.xml><?xml version="1.0" encoding="utf-8"?>
 <p:sld xmlns:a="http://schemas.openxmlformats.org/drawingml/2006/main" xmlns:r="http://schemas.openxmlformats.org/officeDocument/2006/relationships" xmlns:p="http://schemas.openxmlformats.org/presentationml/2006/main">
   <p:cSld>
     <p:spTree>
@@ -37773,7 +39172,7 @@
 </p:sld>
 </file>
 
-<file path=ppt/slides/slide34.xml><?xml version="1.0" encoding="utf-8"?>
+<file path=ppt/slides/slide36.xml><?xml version="1.0" encoding="utf-8"?>
 <p:sld xmlns:a="http://schemas.openxmlformats.org/drawingml/2006/main" xmlns:r="http://schemas.openxmlformats.org/officeDocument/2006/relationships" xmlns:p="http://schemas.openxmlformats.org/presentationml/2006/main">
   <p:cSld>
     <p:spTree>
@@ -38184,7 +39583,7 @@
 </p:sld>
 </file>
 
-<file path=ppt/slides/slide35.xml><?xml version="1.0" encoding="utf-8"?>
+<file path=ppt/slides/slide37.xml><?xml version="1.0" encoding="utf-8"?>
 <p:sld xmlns:a="http://schemas.openxmlformats.org/drawingml/2006/main" xmlns:r="http://schemas.openxmlformats.org/officeDocument/2006/relationships" xmlns:p="http://schemas.openxmlformats.org/presentationml/2006/main">
   <p:cSld>
     <p:spTree>
@@ -39185,7 +40584,7 @@
 </p:sld>
 </file>
 
-<file path=ppt/slides/slide36.xml><?xml version="1.0" encoding="utf-8"?>
+<file path=ppt/slides/slide38.xml><?xml version="1.0" encoding="utf-8"?>
 <p:sld xmlns:a="http://schemas.openxmlformats.org/drawingml/2006/main" xmlns:r="http://schemas.openxmlformats.org/officeDocument/2006/relationships" xmlns:p="http://schemas.openxmlformats.org/presentationml/2006/main">
   <p:cSld>
     <p:spTree>
@@ -40015,7 +41414,7 @@
 </p:sld>
 </file>
 
-<file path=ppt/slides/slide37.xml><?xml version="1.0" encoding="utf-8"?>
+<file path=ppt/slides/slide39.xml><?xml version="1.0" encoding="utf-8"?>
 <p:sld xmlns:a="http://schemas.openxmlformats.org/drawingml/2006/main" xmlns:r="http://schemas.openxmlformats.org/officeDocument/2006/relationships" xmlns:p="http://schemas.openxmlformats.org/presentationml/2006/main">
   <p:cSld>
     <p:spTree>
@@ -40149,799 +41548,6 @@
     <p:extLst>
       <p:ext uri="{BB962C8B-B14F-4D97-AF65-F5344CB8AC3E}">
         <p14:creationId xmlns:p14="http://schemas.microsoft.com/office/powerpoint/2010/main" val="1728307640"/>
-      </p:ext>
-    </p:extLst>
-  </p:cSld>
-  <p:clrMapOvr>
-    <a:masterClrMapping/>
-  </p:clrMapOvr>
-</p:sld>
-</file>
-
-<file path=ppt/slides/slide38.xml><?xml version="1.0" encoding="utf-8"?>
-<p:sld xmlns:a="http://schemas.openxmlformats.org/drawingml/2006/main" xmlns:r="http://schemas.openxmlformats.org/officeDocument/2006/relationships" xmlns:p="http://schemas.openxmlformats.org/presentationml/2006/main">
-  <p:cSld>
-    <p:spTree>
-      <p:nvGrpSpPr>
-        <p:cNvPr id="1" name=""/>
-        <p:cNvGrpSpPr/>
-        <p:nvPr/>
-      </p:nvGrpSpPr>
-      <p:grpSpPr>
-        <a:xfrm>
-          <a:off x="0" y="0"/>
-          <a:ext cx="0" cy="0"/>
-          <a:chOff x="0" y="0"/>
-          <a:chExt cx="0" cy="0"/>
-        </a:xfrm>
-      </p:grpSpPr>
-      <p:pic>
-        <p:nvPicPr>
-          <p:cNvPr id="1026" name="Picture 2">
-            <a:extLst>
-              <a:ext uri="{FF2B5EF4-FFF2-40B4-BE49-F238E27FC236}">
-                <a16:creationId xmlns:a16="http://schemas.microsoft.com/office/drawing/2014/main" id="{0838955D-E97B-0545-9333-60278A8CCE50}"/>
-              </a:ext>
-            </a:extLst>
-          </p:cNvPr>
-          <p:cNvPicPr>
-            <a:picLocks noChangeAspect="1" noChangeArrowheads="1"/>
-          </p:cNvPicPr>
-          <p:nvPr/>
-        </p:nvPicPr>
-        <p:blipFill>
-          <a:blip r:embed="rId2">
-            <a:extLst>
-              <a:ext uri="{28A0092B-C50C-407E-A947-70E740481C1C}">
-                <a14:useLocalDpi xmlns:a14="http://schemas.microsoft.com/office/drawing/2010/main" val="0"/>
-              </a:ext>
-            </a:extLst>
-          </a:blip>
-          <a:srcRect/>
-          <a:stretch>
-            <a:fillRect/>
-          </a:stretch>
-        </p:blipFill>
-        <p:spPr bwMode="auto">
-          <a:xfrm>
-            <a:off x="2273300" y="880533"/>
-            <a:ext cx="7454900" cy="4969934"/>
-          </a:xfrm>
-          <a:prstGeom prst="rect">
-            <a:avLst/>
-          </a:prstGeom>
-          <a:noFill/>
-          <a:extLst>
-            <a:ext uri="{909E8E84-426E-40DD-AFC4-6F175D3DCCD1}">
-              <a14:hiddenFill xmlns:a14="http://schemas.microsoft.com/office/drawing/2010/main">
-                <a:solidFill>
-                  <a:srgbClr val="FFFFFF"/>
-                </a:solidFill>
-              </a14:hiddenFill>
-            </a:ext>
-          </a:extLst>
-        </p:spPr>
-      </p:pic>
-      <p:sp>
-        <p:nvSpPr>
-          <p:cNvPr id="4" name="Rectangle 3">
-            <a:extLst>
-              <a:ext uri="{FF2B5EF4-FFF2-40B4-BE49-F238E27FC236}">
-                <a16:creationId xmlns:a16="http://schemas.microsoft.com/office/drawing/2014/main" id="{755FC5E2-DAB2-1143-90ED-420A9F6335A8}"/>
-              </a:ext>
-            </a:extLst>
-          </p:cNvPr>
-          <p:cNvSpPr/>
-          <p:nvPr/>
-        </p:nvSpPr>
-        <p:spPr>
-          <a:xfrm>
-            <a:off x="5753100" y="4711700"/>
-            <a:ext cx="762000" cy="292100"/>
-          </a:xfrm>
-          <a:prstGeom prst="rect">
-            <a:avLst/>
-          </a:prstGeom>
-          <a:solidFill>
-            <a:srgbClr val="FFFFFF"/>
-          </a:solidFill>
-          <a:ln>
-            <a:noFill/>
-          </a:ln>
-          <a:effectLst/>
-        </p:spPr>
-        <p:style>
-          <a:lnRef idx="1">
-            <a:schemeClr val="accent1"/>
-          </a:lnRef>
-          <a:fillRef idx="3">
-            <a:schemeClr val="accent1"/>
-          </a:fillRef>
-          <a:effectRef idx="2">
-            <a:schemeClr val="accent1"/>
-          </a:effectRef>
-          <a:fontRef idx="minor">
-            <a:schemeClr val="lt1"/>
-          </a:fontRef>
-        </p:style>
-        <p:txBody>
-          <a:bodyPr rtlCol="0" anchor="ctr"/>
-          <a:lstStyle/>
-          <a:p>
-            <a:pPr algn="ctr"/>
-            <a:endParaRPr lang="en-US" dirty="0">
-              <a:latin typeface="Gill Sans MT" panose="020B0502020104020203" pitchFamily="34" charset="77"/>
-            </a:endParaRPr>
-          </a:p>
-        </p:txBody>
-      </p:sp>
-    </p:spTree>
-    <p:extLst>
-      <p:ext uri="{BB962C8B-B14F-4D97-AF65-F5344CB8AC3E}">
-        <p14:creationId xmlns:p14="http://schemas.microsoft.com/office/powerpoint/2010/main" val="1124829488"/>
-      </p:ext>
-    </p:extLst>
-  </p:cSld>
-  <p:clrMapOvr>
-    <a:masterClrMapping/>
-  </p:clrMapOvr>
-</p:sld>
-</file>
-
-<file path=ppt/slides/slide39.xml><?xml version="1.0" encoding="utf-8"?>
-<p:sld xmlns:a="http://schemas.openxmlformats.org/drawingml/2006/main" xmlns:r="http://schemas.openxmlformats.org/officeDocument/2006/relationships" xmlns:p="http://schemas.openxmlformats.org/presentationml/2006/main">
-  <p:cSld>
-    <p:spTree>
-      <p:nvGrpSpPr>
-        <p:cNvPr id="1" name=""/>
-        <p:cNvGrpSpPr/>
-        <p:nvPr/>
-      </p:nvGrpSpPr>
-      <p:grpSpPr>
-        <a:xfrm>
-          <a:off x="0" y="0"/>
-          <a:ext cx="0" cy="0"/>
-          <a:chOff x="0" y="0"/>
-          <a:chExt cx="0" cy="0"/>
-        </a:xfrm>
-      </p:grpSpPr>
-      <p:pic>
-        <p:nvPicPr>
-          <p:cNvPr id="5" name="Picture 4">
-            <a:extLst>
-              <a:ext uri="{FF2B5EF4-FFF2-40B4-BE49-F238E27FC236}">
-                <a16:creationId xmlns:a16="http://schemas.microsoft.com/office/drawing/2014/main" id="{CD4615F0-730A-5943-9922-C52853C60F0E}"/>
-              </a:ext>
-            </a:extLst>
-          </p:cNvPr>
-          <p:cNvPicPr>
-            <a:picLocks noChangeAspect="1"/>
-          </p:cNvPicPr>
-          <p:nvPr/>
-        </p:nvPicPr>
-        <p:blipFill>
-          <a:blip r:embed="rId3"/>
-          <a:stretch>
-            <a:fillRect/>
-          </a:stretch>
-        </p:blipFill>
-        <p:spPr>
-          <a:xfrm>
-            <a:off x="3111500" y="480711"/>
-            <a:ext cx="5969000" cy="4660900"/>
-          </a:xfrm>
-          <a:prstGeom prst="rect">
-            <a:avLst/>
-          </a:prstGeom>
-        </p:spPr>
-      </p:pic>
-      <p:sp>
-        <p:nvSpPr>
-          <p:cNvPr id="6" name="TextBox 5">
-            <a:extLst>
-              <a:ext uri="{FF2B5EF4-FFF2-40B4-BE49-F238E27FC236}">
-                <a16:creationId xmlns:a16="http://schemas.microsoft.com/office/drawing/2014/main" id="{C1E4D0A1-800E-DC40-8D25-F5465464CF55}"/>
-              </a:ext>
-            </a:extLst>
-          </p:cNvPr>
-          <p:cNvSpPr txBox="1"/>
-          <p:nvPr/>
-        </p:nvSpPr>
-        <p:spPr>
-          <a:xfrm>
-            <a:off x="7269888" y="2255107"/>
-            <a:ext cx="1898533" cy="369332"/>
-          </a:xfrm>
-          <a:prstGeom prst="rect">
-            <a:avLst/>
-          </a:prstGeom>
-          <a:noFill/>
-        </p:spPr>
-        <p:txBody>
-          <a:bodyPr wrap="none" rtlCol="0">
-            <a:spAutoFit/>
-          </a:bodyPr>
-          <a:lstStyle/>
-          <a:p>
-            <a:r>
-              <a:rPr lang="en-US" dirty="0">
-                <a:latin typeface="Gill Sans MT" panose="020B0502020104020203" pitchFamily="34" charset="77"/>
-              </a:rPr>
-              <a:t>Distribution of d+</a:t>
-            </a:r>
-          </a:p>
-        </p:txBody>
-      </p:sp>
-      <p:sp>
-        <p:nvSpPr>
-          <p:cNvPr id="7" name="TextBox 6">
-            <a:extLst>
-              <a:ext uri="{FF2B5EF4-FFF2-40B4-BE49-F238E27FC236}">
-                <a16:creationId xmlns:a16="http://schemas.microsoft.com/office/drawing/2014/main" id="{415FABAD-376F-4A48-8531-0F5F2E92ED49}"/>
-              </a:ext>
-            </a:extLst>
-          </p:cNvPr>
-          <p:cNvSpPr txBox="1"/>
-          <p:nvPr/>
-        </p:nvSpPr>
-        <p:spPr>
-          <a:xfrm>
-            <a:off x="3690552" y="1456037"/>
-            <a:ext cx="1853649" cy="369332"/>
-          </a:xfrm>
-          <a:prstGeom prst="rect">
-            <a:avLst/>
-          </a:prstGeom>
-          <a:noFill/>
-        </p:spPr>
-        <p:txBody>
-          <a:bodyPr wrap="none" rtlCol="0">
-            <a:spAutoFit/>
-          </a:bodyPr>
-          <a:lstStyle/>
-          <a:p>
-            <a:r>
-              <a:rPr lang="en-US" dirty="0">
-                <a:latin typeface="Gill Sans MT" panose="020B0502020104020203" pitchFamily="34" charset="77"/>
-              </a:rPr>
-              <a:t>Distribution of d-</a:t>
-            </a:r>
-          </a:p>
-        </p:txBody>
-      </p:sp>
-      <p:pic>
-        <p:nvPicPr>
-          <p:cNvPr id="9" name="Picture 8">
-            <a:extLst>
-              <a:ext uri="{FF2B5EF4-FFF2-40B4-BE49-F238E27FC236}">
-                <a16:creationId xmlns:a16="http://schemas.microsoft.com/office/drawing/2014/main" id="{2DFA2514-41A0-8B40-92B7-BBFB8904B207}"/>
-              </a:ext>
-            </a:extLst>
-          </p:cNvPr>
-          <p:cNvPicPr>
-            <a:picLocks noChangeAspect="1"/>
-          </p:cNvPicPr>
-          <p:nvPr/>
-        </p:nvPicPr>
-        <p:blipFill>
-          <a:blip r:embed="rId4"/>
-          <a:stretch>
-            <a:fillRect/>
-          </a:stretch>
-        </p:blipFill>
-        <p:spPr>
-          <a:xfrm>
-            <a:off x="7442886" y="2753497"/>
-            <a:ext cx="1422400" cy="469900"/>
-          </a:xfrm>
-          <a:prstGeom prst="rect">
-            <a:avLst/>
-          </a:prstGeom>
-        </p:spPr>
-      </p:pic>
-      <p:pic>
-        <p:nvPicPr>
-          <p:cNvPr id="10" name="Picture 9">
-            <a:extLst>
-              <a:ext uri="{FF2B5EF4-FFF2-40B4-BE49-F238E27FC236}">
-                <a16:creationId xmlns:a16="http://schemas.microsoft.com/office/drawing/2014/main" id="{D507FFDB-6E8A-FB4D-875A-96214476EABC}"/>
-              </a:ext>
-            </a:extLst>
-          </p:cNvPr>
-          <p:cNvPicPr>
-            <a:picLocks noChangeAspect="1"/>
-          </p:cNvPicPr>
-          <p:nvPr/>
-        </p:nvPicPr>
-        <p:blipFill>
-          <a:blip r:embed="rId5"/>
-          <a:stretch>
-            <a:fillRect/>
-          </a:stretch>
-        </p:blipFill>
-        <p:spPr>
-          <a:xfrm>
-            <a:off x="3841937" y="1978627"/>
-            <a:ext cx="1422400" cy="469900"/>
-          </a:xfrm>
-          <a:prstGeom prst="rect">
-            <a:avLst/>
-          </a:prstGeom>
-        </p:spPr>
-      </p:pic>
-      <p:cxnSp>
-        <p:nvCxnSpPr>
-          <p:cNvPr id="12" name="Straight Connector 11">
-            <a:extLst>
-              <a:ext uri="{FF2B5EF4-FFF2-40B4-BE49-F238E27FC236}">
-                <a16:creationId xmlns:a16="http://schemas.microsoft.com/office/drawing/2014/main" id="{93CECA08-876E-A24C-B0D8-48C424393123}"/>
-              </a:ext>
-            </a:extLst>
-          </p:cNvPr>
-          <p:cNvCxnSpPr/>
-          <p:nvPr/>
-        </p:nvCxnSpPr>
-        <p:spPr>
-          <a:xfrm>
-            <a:off x="5861223" y="951469"/>
-            <a:ext cx="0" cy="4190142"/>
-          </a:xfrm>
-          <a:prstGeom prst="line">
-            <a:avLst/>
-          </a:prstGeom>
-          <a:ln>
-            <a:solidFill>
-              <a:schemeClr val="tx1">
-                <a:lumMod val="50000"/>
-                <a:lumOff val="50000"/>
-              </a:schemeClr>
-            </a:solidFill>
-            <a:prstDash val="dash"/>
-          </a:ln>
-        </p:spPr>
-        <p:style>
-          <a:lnRef idx="2">
-            <a:schemeClr val="accent1"/>
-          </a:lnRef>
-          <a:fillRef idx="0">
-            <a:schemeClr val="accent1"/>
-          </a:fillRef>
-          <a:effectRef idx="1">
-            <a:schemeClr val="accent1"/>
-          </a:effectRef>
-          <a:fontRef idx="minor">
-            <a:schemeClr val="tx1"/>
-          </a:fontRef>
-        </p:style>
-      </p:cxnSp>
-      <p:cxnSp>
-        <p:nvCxnSpPr>
-          <p:cNvPr id="13" name="Straight Connector 12">
-            <a:extLst>
-              <a:ext uri="{FF2B5EF4-FFF2-40B4-BE49-F238E27FC236}">
-                <a16:creationId xmlns:a16="http://schemas.microsoft.com/office/drawing/2014/main" id="{F23BCCF5-BF9B-F041-9EBB-89098CA1E732}"/>
-              </a:ext>
-            </a:extLst>
-          </p:cNvPr>
-          <p:cNvCxnSpPr>
-            <a:cxnSpLocks/>
-          </p:cNvCxnSpPr>
-          <p:nvPr/>
-        </p:nvCxnSpPr>
-        <p:spPr>
-          <a:xfrm>
-            <a:off x="6816818" y="1978628"/>
-            <a:ext cx="0" cy="3204171"/>
-          </a:xfrm>
-          <a:prstGeom prst="line">
-            <a:avLst/>
-          </a:prstGeom>
-          <a:ln>
-            <a:solidFill>
-              <a:schemeClr val="tx1">
-                <a:lumMod val="50000"/>
-                <a:lumOff val="50000"/>
-              </a:schemeClr>
-            </a:solidFill>
-            <a:prstDash val="dash"/>
-          </a:ln>
-        </p:spPr>
-        <p:style>
-          <a:lnRef idx="2">
-            <a:schemeClr val="accent1"/>
-          </a:lnRef>
-          <a:fillRef idx="0">
-            <a:schemeClr val="accent1"/>
-          </a:fillRef>
-          <a:effectRef idx="1">
-            <a:schemeClr val="accent1"/>
-          </a:effectRef>
-          <a:fontRef idx="minor">
-            <a:schemeClr val="tx1"/>
-          </a:fontRef>
-        </p:style>
-      </p:cxnSp>
-      <p:cxnSp>
-        <p:nvCxnSpPr>
-          <p:cNvPr id="16" name="Straight Arrow Connector 15">
-            <a:extLst>
-              <a:ext uri="{FF2B5EF4-FFF2-40B4-BE49-F238E27FC236}">
-                <a16:creationId xmlns:a16="http://schemas.microsoft.com/office/drawing/2014/main" id="{71EA17CF-A9EC-4B4E-9042-2763584A94FD}"/>
-              </a:ext>
-            </a:extLst>
-          </p:cNvPr>
-          <p:cNvCxnSpPr/>
-          <p:nvPr/>
-        </p:nvCxnSpPr>
-        <p:spPr>
-          <a:xfrm>
-            <a:off x="5525084" y="3138615"/>
-            <a:ext cx="620345" cy="0"/>
-          </a:xfrm>
-          <a:prstGeom prst="straightConnector1">
-            <a:avLst/>
-          </a:prstGeom>
-          <a:ln>
-            <a:headEnd type="triangle"/>
-            <a:tailEnd type="triangle"/>
-          </a:ln>
-        </p:spPr>
-        <p:style>
-          <a:lnRef idx="2">
-            <a:schemeClr val="accent1"/>
-          </a:lnRef>
-          <a:fillRef idx="0">
-            <a:schemeClr val="accent1"/>
-          </a:fillRef>
-          <a:effectRef idx="1">
-            <a:schemeClr val="accent1"/>
-          </a:effectRef>
-          <a:fontRef idx="minor">
-            <a:schemeClr val="tx1"/>
-          </a:fontRef>
-        </p:style>
-      </p:cxnSp>
-      <p:cxnSp>
-        <p:nvCxnSpPr>
-          <p:cNvPr id="17" name="Straight Arrow Connector 16">
-            <a:extLst>
-              <a:ext uri="{FF2B5EF4-FFF2-40B4-BE49-F238E27FC236}">
-                <a16:creationId xmlns:a16="http://schemas.microsoft.com/office/drawing/2014/main" id="{8117E5D7-C1CF-B241-A00F-49EBF16C34B0}"/>
-              </a:ext>
-            </a:extLst>
-          </p:cNvPr>
-          <p:cNvCxnSpPr>
-            <a:cxnSpLocks/>
-          </p:cNvCxnSpPr>
-          <p:nvPr/>
-        </p:nvCxnSpPr>
-        <p:spPr>
-          <a:xfrm>
-            <a:off x="6332392" y="3822355"/>
-            <a:ext cx="1110495" cy="0"/>
-          </a:xfrm>
-          <a:prstGeom prst="straightConnector1">
-            <a:avLst/>
-          </a:prstGeom>
-          <a:ln>
-            <a:headEnd type="triangle"/>
-            <a:tailEnd type="triangle"/>
-          </a:ln>
-        </p:spPr>
-        <p:style>
-          <a:lnRef idx="2">
-            <a:schemeClr val="accent1"/>
-          </a:lnRef>
-          <a:fillRef idx="0">
-            <a:schemeClr val="accent1"/>
-          </a:fillRef>
-          <a:effectRef idx="1">
-            <a:schemeClr val="accent1"/>
-          </a:effectRef>
-          <a:fontRef idx="minor">
-            <a:schemeClr val="tx1"/>
-          </a:fontRef>
-        </p:style>
-      </p:cxnSp>
-      <p:pic>
-        <p:nvPicPr>
-          <p:cNvPr id="19" name="Picture 18">
-            <a:extLst>
-              <a:ext uri="{FF2B5EF4-FFF2-40B4-BE49-F238E27FC236}">
-                <a16:creationId xmlns:a16="http://schemas.microsoft.com/office/drawing/2014/main" id="{00CF9D98-19B6-D641-BA98-2470BEEFB6DC}"/>
-              </a:ext>
-            </a:extLst>
-          </p:cNvPr>
-          <p:cNvPicPr>
-            <a:picLocks noChangeAspect="1"/>
-          </p:cNvPicPr>
-          <p:nvPr/>
-        </p:nvPicPr>
-        <p:blipFill>
-          <a:blip r:embed="rId6"/>
-          <a:stretch>
-            <a:fillRect/>
-          </a:stretch>
-        </p:blipFill>
-        <p:spPr>
-          <a:xfrm>
-            <a:off x="3192609" y="5477939"/>
-            <a:ext cx="2543258" cy="1010214"/>
-          </a:xfrm>
-          <a:prstGeom prst="rect">
-            <a:avLst/>
-          </a:prstGeom>
-        </p:spPr>
-      </p:pic>
-      <p:sp>
-        <p:nvSpPr>
-          <p:cNvPr id="20" name="TextBox 19">
-            <a:extLst>
-              <a:ext uri="{FF2B5EF4-FFF2-40B4-BE49-F238E27FC236}">
-                <a16:creationId xmlns:a16="http://schemas.microsoft.com/office/drawing/2014/main" id="{1C6B2205-157B-A449-9445-DB174438B4C4}"/>
-              </a:ext>
-            </a:extLst>
-          </p:cNvPr>
-          <p:cNvSpPr txBox="1"/>
-          <p:nvPr/>
-        </p:nvSpPr>
-        <p:spPr>
-          <a:xfrm>
-            <a:off x="7727763" y="5846199"/>
-            <a:ext cx="2946832" cy="369332"/>
-          </a:xfrm>
-          <a:prstGeom prst="rect">
-            <a:avLst/>
-          </a:prstGeom>
-          <a:noFill/>
-        </p:spPr>
-        <p:txBody>
-          <a:bodyPr wrap="none" rtlCol="0">
-            <a:spAutoFit/>
-          </a:bodyPr>
-          <a:lstStyle/>
-          <a:p>
-            <a:r>
-              <a:rPr lang="en-US" dirty="0" err="1">
-                <a:latin typeface="Gill Sans MT" panose="020B0502020104020203" pitchFamily="34" charset="77"/>
-              </a:rPr>
-              <a:t>Área</a:t>
-            </a:r>
-            <a:r>
-              <a:rPr lang="en-US" dirty="0">
-                <a:latin typeface="Gill Sans MT" panose="020B0502020104020203" pitchFamily="34" charset="77"/>
-              </a:rPr>
-              <a:t> de </a:t>
-            </a:r>
-            <a:r>
-              <a:rPr lang="en-US" dirty="0" err="1">
-                <a:latin typeface="Gill Sans MT" panose="020B0502020104020203" pitchFamily="34" charset="77"/>
-              </a:rPr>
-              <a:t>cada</a:t>
-            </a:r>
-            <a:r>
-              <a:rPr lang="en-US" dirty="0">
-                <a:latin typeface="Gill Sans MT" panose="020B0502020104020203" pitchFamily="34" charset="77"/>
-              </a:rPr>
-              <a:t> </a:t>
-            </a:r>
-            <a:r>
-              <a:rPr lang="en-US" dirty="0" err="1">
-                <a:latin typeface="Gill Sans MT" panose="020B0502020104020203" pitchFamily="34" charset="77"/>
-              </a:rPr>
-              <a:t>distribución</a:t>
-            </a:r>
-            <a:r>
-              <a:rPr lang="en-US" dirty="0">
-                <a:latin typeface="Gill Sans MT" panose="020B0502020104020203" pitchFamily="34" charset="77"/>
-              </a:rPr>
-              <a:t> = </a:t>
-            </a:r>
-            <a:r>
-              <a:rPr lang="en-US" dirty="0">
-                <a:latin typeface="Times New Roman" panose="02020603050405020304" pitchFamily="18" charset="0"/>
-                <a:cs typeface="Times New Roman" panose="02020603050405020304" pitchFamily="18" charset="0"/>
-              </a:rPr>
-              <a:t>1</a:t>
-            </a:r>
-          </a:p>
-        </p:txBody>
-      </p:sp>
-      <p:sp>
-        <p:nvSpPr>
-          <p:cNvPr id="21" name="TextBox 20">
-            <a:extLst>
-              <a:ext uri="{FF2B5EF4-FFF2-40B4-BE49-F238E27FC236}">
-                <a16:creationId xmlns:a16="http://schemas.microsoft.com/office/drawing/2014/main" id="{CB90B09F-055B-1240-975D-755499026C79}"/>
-              </a:ext>
-            </a:extLst>
-          </p:cNvPr>
-          <p:cNvSpPr txBox="1"/>
-          <p:nvPr/>
-        </p:nvSpPr>
-        <p:spPr>
-          <a:xfrm>
-            <a:off x="1820562" y="5325762"/>
-            <a:ext cx="1425390" cy="369332"/>
-          </a:xfrm>
-          <a:prstGeom prst="rect">
-            <a:avLst/>
-          </a:prstGeom>
-          <a:noFill/>
-        </p:spPr>
-        <p:txBody>
-          <a:bodyPr wrap="none" rtlCol="0">
-            <a:spAutoFit/>
-          </a:bodyPr>
-          <a:lstStyle/>
-          <a:p>
-            <a:r>
-              <a:rPr lang="en-US" dirty="0">
-                <a:latin typeface="Gill Sans MT" panose="020B0502020104020203" pitchFamily="34" charset="77"/>
-              </a:rPr>
-              <a:t>Performance:</a:t>
-            </a:r>
-          </a:p>
-        </p:txBody>
-      </p:sp>
-      <p:cxnSp>
-        <p:nvCxnSpPr>
-          <p:cNvPr id="23" name="Straight Arrow Connector 22">
-            <a:extLst>
-              <a:ext uri="{FF2B5EF4-FFF2-40B4-BE49-F238E27FC236}">
-                <a16:creationId xmlns:a16="http://schemas.microsoft.com/office/drawing/2014/main" id="{EE25BABD-D0DF-1349-988F-23A7A6452590}"/>
-              </a:ext>
-            </a:extLst>
-          </p:cNvPr>
-          <p:cNvCxnSpPr/>
-          <p:nvPr/>
-        </p:nvCxnSpPr>
-        <p:spPr>
-          <a:xfrm>
-            <a:off x="9259331" y="4868562"/>
-            <a:ext cx="902043" cy="0"/>
-          </a:xfrm>
-          <a:prstGeom prst="straightConnector1">
-            <a:avLst/>
-          </a:prstGeom>
-          <a:ln>
-            <a:tailEnd type="triangle"/>
-          </a:ln>
-        </p:spPr>
-        <p:style>
-          <a:lnRef idx="2">
-            <a:schemeClr val="accent1"/>
-          </a:lnRef>
-          <a:fillRef idx="0">
-            <a:schemeClr val="accent1"/>
-          </a:fillRef>
-          <a:effectRef idx="1">
-            <a:schemeClr val="accent1"/>
-          </a:effectRef>
-          <a:fontRef idx="minor">
-            <a:schemeClr val="tx1"/>
-          </a:fontRef>
-        </p:style>
-      </p:cxnSp>
-      <p:sp>
-        <p:nvSpPr>
-          <p:cNvPr id="24" name="TextBox 23">
-            <a:extLst>
-              <a:ext uri="{FF2B5EF4-FFF2-40B4-BE49-F238E27FC236}">
-                <a16:creationId xmlns:a16="http://schemas.microsoft.com/office/drawing/2014/main" id="{D80B645F-E6A3-9840-9B17-1979D7A76614}"/>
-              </a:ext>
-            </a:extLst>
-          </p:cNvPr>
-          <p:cNvSpPr txBox="1"/>
-          <p:nvPr/>
-        </p:nvSpPr>
-        <p:spPr>
-          <a:xfrm>
-            <a:off x="9630032" y="4972729"/>
-            <a:ext cx="290464" cy="369332"/>
-          </a:xfrm>
-          <a:prstGeom prst="rect">
-            <a:avLst/>
-          </a:prstGeom>
-          <a:noFill/>
-        </p:spPr>
-        <p:txBody>
-          <a:bodyPr wrap="none" rtlCol="0">
-            <a:spAutoFit/>
-          </a:bodyPr>
-          <a:lstStyle/>
-          <a:p>
-            <a:r>
-              <a:rPr lang="en-US" dirty="0">
-                <a:latin typeface="Gill Sans MT" panose="020B0502020104020203" pitchFamily="34" charset="77"/>
-              </a:rPr>
-              <a:t>S</a:t>
-            </a:r>
-          </a:p>
-        </p:txBody>
-      </p:sp>
-      <p:cxnSp>
-        <p:nvCxnSpPr>
-          <p:cNvPr id="25" name="Straight Arrow Connector 24">
-            <a:extLst>
-              <a:ext uri="{FF2B5EF4-FFF2-40B4-BE49-F238E27FC236}">
-                <a16:creationId xmlns:a16="http://schemas.microsoft.com/office/drawing/2014/main" id="{FBF96432-413A-9647-8411-CBCAF920547E}"/>
-              </a:ext>
-            </a:extLst>
-          </p:cNvPr>
-          <p:cNvCxnSpPr>
-            <a:cxnSpLocks/>
-          </p:cNvCxnSpPr>
-          <p:nvPr/>
-        </p:nvCxnSpPr>
-        <p:spPr>
-          <a:xfrm flipV="1">
-            <a:off x="2562415" y="2082802"/>
-            <a:ext cx="0" cy="1402147"/>
-          </a:xfrm>
-          <a:prstGeom prst="straightConnector1">
-            <a:avLst/>
-          </a:prstGeom>
-          <a:ln>
-            <a:tailEnd type="triangle"/>
-          </a:ln>
-        </p:spPr>
-        <p:style>
-          <a:lnRef idx="2">
-            <a:schemeClr val="accent1"/>
-          </a:lnRef>
-          <a:fillRef idx="0">
-            <a:schemeClr val="accent1"/>
-          </a:fillRef>
-          <a:effectRef idx="1">
-            <a:schemeClr val="accent1"/>
-          </a:effectRef>
-          <a:fontRef idx="minor">
-            <a:schemeClr val="tx1"/>
-          </a:fontRef>
-        </p:style>
-      </p:cxnSp>
-      <p:sp>
-        <p:nvSpPr>
-          <p:cNvPr id="27" name="TextBox 26">
-            <a:extLst>
-              <a:ext uri="{FF2B5EF4-FFF2-40B4-BE49-F238E27FC236}">
-                <a16:creationId xmlns:a16="http://schemas.microsoft.com/office/drawing/2014/main" id="{3612043D-3D59-5446-9501-E51794B0A6DD}"/>
-              </a:ext>
-            </a:extLst>
-          </p:cNvPr>
-          <p:cNvSpPr txBox="1"/>
-          <p:nvPr/>
-        </p:nvSpPr>
-        <p:spPr>
-          <a:xfrm rot="16200000">
-            <a:off x="802556" y="2664587"/>
-            <a:ext cx="2876941" cy="369332"/>
-          </a:xfrm>
-          <a:prstGeom prst="rect">
-            <a:avLst/>
-          </a:prstGeom>
-          <a:noFill/>
-        </p:spPr>
-        <p:txBody>
-          <a:bodyPr wrap="none" rtlCol="0">
-            <a:spAutoFit/>
-          </a:bodyPr>
-          <a:lstStyle/>
-          <a:p>
-            <a:r>
-              <a:rPr lang="en-US" dirty="0">
-                <a:latin typeface="Gill Sans MT" panose="020B0502020104020203" pitchFamily="34" charset="77"/>
-              </a:rPr>
-              <a:t>Probability density frequency</a:t>
-            </a:r>
-          </a:p>
-        </p:txBody>
-      </p:sp>
-    </p:spTree>
-    <p:extLst>
-      <p:ext uri="{BB962C8B-B14F-4D97-AF65-F5344CB8AC3E}">
-        <p14:creationId xmlns:p14="http://schemas.microsoft.com/office/powerpoint/2010/main" val="462762506"/>
       </p:ext>
     </p:extLst>
   </p:cSld>
@@ -42014,7 +42620,7 @@
                   <a:ea typeface="Trebuchet MS" charset="0"/>
                   <a:cs typeface="Trebuchet MS" charset="0"/>
                 </a:rPr>
-                <a:t> de </a:t>
+                <a:t> de la </a:t>
               </a:r>
               <a:r>
                 <a:rPr lang="en-US" dirty="0" err="1">
@@ -42478,6 +43084,799 @@
       </p:grpSpPr>
       <p:pic>
         <p:nvPicPr>
+          <p:cNvPr id="1026" name="Picture 2">
+            <a:extLst>
+              <a:ext uri="{FF2B5EF4-FFF2-40B4-BE49-F238E27FC236}">
+                <a16:creationId xmlns:a16="http://schemas.microsoft.com/office/drawing/2014/main" id="{0838955D-E97B-0545-9333-60278A8CCE50}"/>
+              </a:ext>
+            </a:extLst>
+          </p:cNvPr>
+          <p:cNvPicPr>
+            <a:picLocks noChangeAspect="1" noChangeArrowheads="1"/>
+          </p:cNvPicPr>
+          <p:nvPr/>
+        </p:nvPicPr>
+        <p:blipFill>
+          <a:blip r:embed="rId2">
+            <a:extLst>
+              <a:ext uri="{28A0092B-C50C-407E-A947-70E740481C1C}">
+                <a14:useLocalDpi xmlns:a14="http://schemas.microsoft.com/office/drawing/2010/main" val="0"/>
+              </a:ext>
+            </a:extLst>
+          </a:blip>
+          <a:srcRect/>
+          <a:stretch>
+            <a:fillRect/>
+          </a:stretch>
+        </p:blipFill>
+        <p:spPr bwMode="auto">
+          <a:xfrm>
+            <a:off x="2273300" y="880533"/>
+            <a:ext cx="7454900" cy="4969934"/>
+          </a:xfrm>
+          <a:prstGeom prst="rect">
+            <a:avLst/>
+          </a:prstGeom>
+          <a:noFill/>
+          <a:extLst>
+            <a:ext uri="{909E8E84-426E-40DD-AFC4-6F175D3DCCD1}">
+              <a14:hiddenFill xmlns:a14="http://schemas.microsoft.com/office/drawing/2010/main">
+                <a:solidFill>
+                  <a:srgbClr val="FFFFFF"/>
+                </a:solidFill>
+              </a14:hiddenFill>
+            </a:ext>
+          </a:extLst>
+        </p:spPr>
+      </p:pic>
+      <p:sp>
+        <p:nvSpPr>
+          <p:cNvPr id="4" name="Rectangle 3">
+            <a:extLst>
+              <a:ext uri="{FF2B5EF4-FFF2-40B4-BE49-F238E27FC236}">
+                <a16:creationId xmlns:a16="http://schemas.microsoft.com/office/drawing/2014/main" id="{755FC5E2-DAB2-1143-90ED-420A9F6335A8}"/>
+              </a:ext>
+            </a:extLst>
+          </p:cNvPr>
+          <p:cNvSpPr/>
+          <p:nvPr/>
+        </p:nvSpPr>
+        <p:spPr>
+          <a:xfrm>
+            <a:off x="5753100" y="4711700"/>
+            <a:ext cx="762000" cy="292100"/>
+          </a:xfrm>
+          <a:prstGeom prst="rect">
+            <a:avLst/>
+          </a:prstGeom>
+          <a:solidFill>
+            <a:srgbClr val="FFFFFF"/>
+          </a:solidFill>
+          <a:ln>
+            <a:noFill/>
+          </a:ln>
+          <a:effectLst/>
+        </p:spPr>
+        <p:style>
+          <a:lnRef idx="1">
+            <a:schemeClr val="accent1"/>
+          </a:lnRef>
+          <a:fillRef idx="3">
+            <a:schemeClr val="accent1"/>
+          </a:fillRef>
+          <a:effectRef idx="2">
+            <a:schemeClr val="accent1"/>
+          </a:effectRef>
+          <a:fontRef idx="minor">
+            <a:schemeClr val="lt1"/>
+          </a:fontRef>
+        </p:style>
+        <p:txBody>
+          <a:bodyPr rtlCol="0" anchor="ctr"/>
+          <a:lstStyle/>
+          <a:p>
+            <a:pPr algn="ctr"/>
+            <a:endParaRPr lang="en-US" dirty="0">
+              <a:latin typeface="Gill Sans MT" panose="020B0502020104020203" pitchFamily="34" charset="77"/>
+            </a:endParaRPr>
+          </a:p>
+        </p:txBody>
+      </p:sp>
+    </p:spTree>
+    <p:extLst>
+      <p:ext uri="{BB962C8B-B14F-4D97-AF65-F5344CB8AC3E}">
+        <p14:creationId xmlns:p14="http://schemas.microsoft.com/office/powerpoint/2010/main" val="1124829488"/>
+      </p:ext>
+    </p:extLst>
+  </p:cSld>
+  <p:clrMapOvr>
+    <a:masterClrMapping/>
+  </p:clrMapOvr>
+</p:sld>
+</file>
+
+<file path=ppt/slides/slide41.xml><?xml version="1.0" encoding="utf-8"?>
+<p:sld xmlns:a="http://schemas.openxmlformats.org/drawingml/2006/main" xmlns:r="http://schemas.openxmlformats.org/officeDocument/2006/relationships" xmlns:p="http://schemas.openxmlformats.org/presentationml/2006/main">
+  <p:cSld>
+    <p:spTree>
+      <p:nvGrpSpPr>
+        <p:cNvPr id="1" name=""/>
+        <p:cNvGrpSpPr/>
+        <p:nvPr/>
+      </p:nvGrpSpPr>
+      <p:grpSpPr>
+        <a:xfrm>
+          <a:off x="0" y="0"/>
+          <a:ext cx="0" cy="0"/>
+          <a:chOff x="0" y="0"/>
+          <a:chExt cx="0" cy="0"/>
+        </a:xfrm>
+      </p:grpSpPr>
+      <p:pic>
+        <p:nvPicPr>
+          <p:cNvPr id="5" name="Picture 4">
+            <a:extLst>
+              <a:ext uri="{FF2B5EF4-FFF2-40B4-BE49-F238E27FC236}">
+                <a16:creationId xmlns:a16="http://schemas.microsoft.com/office/drawing/2014/main" id="{CD4615F0-730A-5943-9922-C52853C60F0E}"/>
+              </a:ext>
+            </a:extLst>
+          </p:cNvPr>
+          <p:cNvPicPr>
+            <a:picLocks noChangeAspect="1"/>
+          </p:cNvPicPr>
+          <p:nvPr/>
+        </p:nvPicPr>
+        <p:blipFill>
+          <a:blip r:embed="rId3"/>
+          <a:stretch>
+            <a:fillRect/>
+          </a:stretch>
+        </p:blipFill>
+        <p:spPr>
+          <a:xfrm>
+            <a:off x="3111500" y="480711"/>
+            <a:ext cx="5969000" cy="4660900"/>
+          </a:xfrm>
+          <a:prstGeom prst="rect">
+            <a:avLst/>
+          </a:prstGeom>
+        </p:spPr>
+      </p:pic>
+      <p:sp>
+        <p:nvSpPr>
+          <p:cNvPr id="6" name="TextBox 5">
+            <a:extLst>
+              <a:ext uri="{FF2B5EF4-FFF2-40B4-BE49-F238E27FC236}">
+                <a16:creationId xmlns:a16="http://schemas.microsoft.com/office/drawing/2014/main" id="{C1E4D0A1-800E-DC40-8D25-F5465464CF55}"/>
+              </a:ext>
+            </a:extLst>
+          </p:cNvPr>
+          <p:cNvSpPr txBox="1"/>
+          <p:nvPr/>
+        </p:nvSpPr>
+        <p:spPr>
+          <a:xfrm>
+            <a:off x="7269888" y="2255107"/>
+            <a:ext cx="1898533" cy="369332"/>
+          </a:xfrm>
+          <a:prstGeom prst="rect">
+            <a:avLst/>
+          </a:prstGeom>
+          <a:noFill/>
+        </p:spPr>
+        <p:txBody>
+          <a:bodyPr wrap="none" rtlCol="0">
+            <a:spAutoFit/>
+          </a:bodyPr>
+          <a:lstStyle/>
+          <a:p>
+            <a:r>
+              <a:rPr lang="en-US" dirty="0">
+                <a:latin typeface="Gill Sans MT" panose="020B0502020104020203" pitchFamily="34" charset="77"/>
+              </a:rPr>
+              <a:t>Distribution of d+</a:t>
+            </a:r>
+          </a:p>
+        </p:txBody>
+      </p:sp>
+      <p:sp>
+        <p:nvSpPr>
+          <p:cNvPr id="7" name="TextBox 6">
+            <a:extLst>
+              <a:ext uri="{FF2B5EF4-FFF2-40B4-BE49-F238E27FC236}">
+                <a16:creationId xmlns:a16="http://schemas.microsoft.com/office/drawing/2014/main" id="{415FABAD-376F-4A48-8531-0F5F2E92ED49}"/>
+              </a:ext>
+            </a:extLst>
+          </p:cNvPr>
+          <p:cNvSpPr txBox="1"/>
+          <p:nvPr/>
+        </p:nvSpPr>
+        <p:spPr>
+          <a:xfrm>
+            <a:off x="3690552" y="1456037"/>
+            <a:ext cx="1853649" cy="369332"/>
+          </a:xfrm>
+          <a:prstGeom prst="rect">
+            <a:avLst/>
+          </a:prstGeom>
+          <a:noFill/>
+        </p:spPr>
+        <p:txBody>
+          <a:bodyPr wrap="none" rtlCol="0">
+            <a:spAutoFit/>
+          </a:bodyPr>
+          <a:lstStyle/>
+          <a:p>
+            <a:r>
+              <a:rPr lang="en-US" dirty="0">
+                <a:latin typeface="Gill Sans MT" panose="020B0502020104020203" pitchFamily="34" charset="77"/>
+              </a:rPr>
+              <a:t>Distribution of d-</a:t>
+            </a:r>
+          </a:p>
+        </p:txBody>
+      </p:sp>
+      <p:pic>
+        <p:nvPicPr>
+          <p:cNvPr id="9" name="Picture 8">
+            <a:extLst>
+              <a:ext uri="{FF2B5EF4-FFF2-40B4-BE49-F238E27FC236}">
+                <a16:creationId xmlns:a16="http://schemas.microsoft.com/office/drawing/2014/main" id="{2DFA2514-41A0-8B40-92B7-BBFB8904B207}"/>
+              </a:ext>
+            </a:extLst>
+          </p:cNvPr>
+          <p:cNvPicPr>
+            <a:picLocks noChangeAspect="1"/>
+          </p:cNvPicPr>
+          <p:nvPr/>
+        </p:nvPicPr>
+        <p:blipFill>
+          <a:blip r:embed="rId4"/>
+          <a:stretch>
+            <a:fillRect/>
+          </a:stretch>
+        </p:blipFill>
+        <p:spPr>
+          <a:xfrm>
+            <a:off x="7442886" y="2753497"/>
+            <a:ext cx="1422400" cy="469900"/>
+          </a:xfrm>
+          <a:prstGeom prst="rect">
+            <a:avLst/>
+          </a:prstGeom>
+        </p:spPr>
+      </p:pic>
+      <p:pic>
+        <p:nvPicPr>
+          <p:cNvPr id="10" name="Picture 9">
+            <a:extLst>
+              <a:ext uri="{FF2B5EF4-FFF2-40B4-BE49-F238E27FC236}">
+                <a16:creationId xmlns:a16="http://schemas.microsoft.com/office/drawing/2014/main" id="{D507FFDB-6E8A-FB4D-875A-96214476EABC}"/>
+              </a:ext>
+            </a:extLst>
+          </p:cNvPr>
+          <p:cNvPicPr>
+            <a:picLocks noChangeAspect="1"/>
+          </p:cNvPicPr>
+          <p:nvPr/>
+        </p:nvPicPr>
+        <p:blipFill>
+          <a:blip r:embed="rId5"/>
+          <a:stretch>
+            <a:fillRect/>
+          </a:stretch>
+        </p:blipFill>
+        <p:spPr>
+          <a:xfrm>
+            <a:off x="3841937" y="1978627"/>
+            <a:ext cx="1422400" cy="469900"/>
+          </a:xfrm>
+          <a:prstGeom prst="rect">
+            <a:avLst/>
+          </a:prstGeom>
+        </p:spPr>
+      </p:pic>
+      <p:cxnSp>
+        <p:nvCxnSpPr>
+          <p:cNvPr id="12" name="Straight Connector 11">
+            <a:extLst>
+              <a:ext uri="{FF2B5EF4-FFF2-40B4-BE49-F238E27FC236}">
+                <a16:creationId xmlns:a16="http://schemas.microsoft.com/office/drawing/2014/main" id="{93CECA08-876E-A24C-B0D8-48C424393123}"/>
+              </a:ext>
+            </a:extLst>
+          </p:cNvPr>
+          <p:cNvCxnSpPr/>
+          <p:nvPr/>
+        </p:nvCxnSpPr>
+        <p:spPr>
+          <a:xfrm>
+            <a:off x="5861223" y="951469"/>
+            <a:ext cx="0" cy="4190142"/>
+          </a:xfrm>
+          <a:prstGeom prst="line">
+            <a:avLst/>
+          </a:prstGeom>
+          <a:ln>
+            <a:solidFill>
+              <a:schemeClr val="tx1">
+                <a:lumMod val="50000"/>
+                <a:lumOff val="50000"/>
+              </a:schemeClr>
+            </a:solidFill>
+            <a:prstDash val="dash"/>
+          </a:ln>
+        </p:spPr>
+        <p:style>
+          <a:lnRef idx="2">
+            <a:schemeClr val="accent1"/>
+          </a:lnRef>
+          <a:fillRef idx="0">
+            <a:schemeClr val="accent1"/>
+          </a:fillRef>
+          <a:effectRef idx="1">
+            <a:schemeClr val="accent1"/>
+          </a:effectRef>
+          <a:fontRef idx="minor">
+            <a:schemeClr val="tx1"/>
+          </a:fontRef>
+        </p:style>
+      </p:cxnSp>
+      <p:cxnSp>
+        <p:nvCxnSpPr>
+          <p:cNvPr id="13" name="Straight Connector 12">
+            <a:extLst>
+              <a:ext uri="{FF2B5EF4-FFF2-40B4-BE49-F238E27FC236}">
+                <a16:creationId xmlns:a16="http://schemas.microsoft.com/office/drawing/2014/main" id="{F23BCCF5-BF9B-F041-9EBB-89098CA1E732}"/>
+              </a:ext>
+            </a:extLst>
+          </p:cNvPr>
+          <p:cNvCxnSpPr>
+            <a:cxnSpLocks/>
+          </p:cNvCxnSpPr>
+          <p:nvPr/>
+        </p:nvCxnSpPr>
+        <p:spPr>
+          <a:xfrm>
+            <a:off x="6816818" y="1978628"/>
+            <a:ext cx="0" cy="3204171"/>
+          </a:xfrm>
+          <a:prstGeom prst="line">
+            <a:avLst/>
+          </a:prstGeom>
+          <a:ln>
+            <a:solidFill>
+              <a:schemeClr val="tx1">
+                <a:lumMod val="50000"/>
+                <a:lumOff val="50000"/>
+              </a:schemeClr>
+            </a:solidFill>
+            <a:prstDash val="dash"/>
+          </a:ln>
+        </p:spPr>
+        <p:style>
+          <a:lnRef idx="2">
+            <a:schemeClr val="accent1"/>
+          </a:lnRef>
+          <a:fillRef idx="0">
+            <a:schemeClr val="accent1"/>
+          </a:fillRef>
+          <a:effectRef idx="1">
+            <a:schemeClr val="accent1"/>
+          </a:effectRef>
+          <a:fontRef idx="minor">
+            <a:schemeClr val="tx1"/>
+          </a:fontRef>
+        </p:style>
+      </p:cxnSp>
+      <p:cxnSp>
+        <p:nvCxnSpPr>
+          <p:cNvPr id="16" name="Straight Arrow Connector 15">
+            <a:extLst>
+              <a:ext uri="{FF2B5EF4-FFF2-40B4-BE49-F238E27FC236}">
+                <a16:creationId xmlns:a16="http://schemas.microsoft.com/office/drawing/2014/main" id="{71EA17CF-A9EC-4B4E-9042-2763584A94FD}"/>
+              </a:ext>
+            </a:extLst>
+          </p:cNvPr>
+          <p:cNvCxnSpPr/>
+          <p:nvPr/>
+        </p:nvCxnSpPr>
+        <p:spPr>
+          <a:xfrm>
+            <a:off x="5525084" y="3138615"/>
+            <a:ext cx="620345" cy="0"/>
+          </a:xfrm>
+          <a:prstGeom prst="straightConnector1">
+            <a:avLst/>
+          </a:prstGeom>
+          <a:ln>
+            <a:headEnd type="triangle"/>
+            <a:tailEnd type="triangle"/>
+          </a:ln>
+        </p:spPr>
+        <p:style>
+          <a:lnRef idx="2">
+            <a:schemeClr val="accent1"/>
+          </a:lnRef>
+          <a:fillRef idx="0">
+            <a:schemeClr val="accent1"/>
+          </a:fillRef>
+          <a:effectRef idx="1">
+            <a:schemeClr val="accent1"/>
+          </a:effectRef>
+          <a:fontRef idx="minor">
+            <a:schemeClr val="tx1"/>
+          </a:fontRef>
+        </p:style>
+      </p:cxnSp>
+      <p:cxnSp>
+        <p:nvCxnSpPr>
+          <p:cNvPr id="17" name="Straight Arrow Connector 16">
+            <a:extLst>
+              <a:ext uri="{FF2B5EF4-FFF2-40B4-BE49-F238E27FC236}">
+                <a16:creationId xmlns:a16="http://schemas.microsoft.com/office/drawing/2014/main" id="{8117E5D7-C1CF-B241-A00F-49EBF16C34B0}"/>
+              </a:ext>
+            </a:extLst>
+          </p:cNvPr>
+          <p:cNvCxnSpPr>
+            <a:cxnSpLocks/>
+          </p:cNvCxnSpPr>
+          <p:nvPr/>
+        </p:nvCxnSpPr>
+        <p:spPr>
+          <a:xfrm>
+            <a:off x="6332392" y="3822355"/>
+            <a:ext cx="1110495" cy="0"/>
+          </a:xfrm>
+          <a:prstGeom prst="straightConnector1">
+            <a:avLst/>
+          </a:prstGeom>
+          <a:ln>
+            <a:headEnd type="triangle"/>
+            <a:tailEnd type="triangle"/>
+          </a:ln>
+        </p:spPr>
+        <p:style>
+          <a:lnRef idx="2">
+            <a:schemeClr val="accent1"/>
+          </a:lnRef>
+          <a:fillRef idx="0">
+            <a:schemeClr val="accent1"/>
+          </a:fillRef>
+          <a:effectRef idx="1">
+            <a:schemeClr val="accent1"/>
+          </a:effectRef>
+          <a:fontRef idx="minor">
+            <a:schemeClr val="tx1"/>
+          </a:fontRef>
+        </p:style>
+      </p:cxnSp>
+      <p:pic>
+        <p:nvPicPr>
+          <p:cNvPr id="19" name="Picture 18">
+            <a:extLst>
+              <a:ext uri="{FF2B5EF4-FFF2-40B4-BE49-F238E27FC236}">
+                <a16:creationId xmlns:a16="http://schemas.microsoft.com/office/drawing/2014/main" id="{00CF9D98-19B6-D641-BA98-2470BEEFB6DC}"/>
+              </a:ext>
+            </a:extLst>
+          </p:cNvPr>
+          <p:cNvPicPr>
+            <a:picLocks noChangeAspect="1"/>
+          </p:cNvPicPr>
+          <p:nvPr/>
+        </p:nvPicPr>
+        <p:blipFill>
+          <a:blip r:embed="rId6"/>
+          <a:stretch>
+            <a:fillRect/>
+          </a:stretch>
+        </p:blipFill>
+        <p:spPr>
+          <a:xfrm>
+            <a:off x="3192609" y="5477939"/>
+            <a:ext cx="2543258" cy="1010214"/>
+          </a:xfrm>
+          <a:prstGeom prst="rect">
+            <a:avLst/>
+          </a:prstGeom>
+        </p:spPr>
+      </p:pic>
+      <p:sp>
+        <p:nvSpPr>
+          <p:cNvPr id="20" name="TextBox 19">
+            <a:extLst>
+              <a:ext uri="{FF2B5EF4-FFF2-40B4-BE49-F238E27FC236}">
+                <a16:creationId xmlns:a16="http://schemas.microsoft.com/office/drawing/2014/main" id="{1C6B2205-157B-A449-9445-DB174438B4C4}"/>
+              </a:ext>
+            </a:extLst>
+          </p:cNvPr>
+          <p:cNvSpPr txBox="1"/>
+          <p:nvPr/>
+        </p:nvSpPr>
+        <p:spPr>
+          <a:xfrm>
+            <a:off x="7727763" y="5846199"/>
+            <a:ext cx="2946832" cy="369332"/>
+          </a:xfrm>
+          <a:prstGeom prst="rect">
+            <a:avLst/>
+          </a:prstGeom>
+          <a:noFill/>
+        </p:spPr>
+        <p:txBody>
+          <a:bodyPr wrap="none" rtlCol="0">
+            <a:spAutoFit/>
+          </a:bodyPr>
+          <a:lstStyle/>
+          <a:p>
+            <a:r>
+              <a:rPr lang="en-US" dirty="0" err="1">
+                <a:latin typeface="Gill Sans MT" panose="020B0502020104020203" pitchFamily="34" charset="77"/>
+              </a:rPr>
+              <a:t>Área</a:t>
+            </a:r>
+            <a:r>
+              <a:rPr lang="en-US" dirty="0">
+                <a:latin typeface="Gill Sans MT" panose="020B0502020104020203" pitchFamily="34" charset="77"/>
+              </a:rPr>
+              <a:t> de </a:t>
+            </a:r>
+            <a:r>
+              <a:rPr lang="en-US" dirty="0" err="1">
+                <a:latin typeface="Gill Sans MT" panose="020B0502020104020203" pitchFamily="34" charset="77"/>
+              </a:rPr>
+              <a:t>cada</a:t>
+            </a:r>
+            <a:r>
+              <a:rPr lang="en-US" dirty="0">
+                <a:latin typeface="Gill Sans MT" panose="020B0502020104020203" pitchFamily="34" charset="77"/>
+              </a:rPr>
+              <a:t> </a:t>
+            </a:r>
+            <a:r>
+              <a:rPr lang="en-US" dirty="0" err="1">
+                <a:latin typeface="Gill Sans MT" panose="020B0502020104020203" pitchFamily="34" charset="77"/>
+              </a:rPr>
+              <a:t>distribución</a:t>
+            </a:r>
+            <a:r>
+              <a:rPr lang="en-US" dirty="0">
+                <a:latin typeface="Gill Sans MT" panose="020B0502020104020203" pitchFamily="34" charset="77"/>
+              </a:rPr>
+              <a:t> = </a:t>
+            </a:r>
+            <a:r>
+              <a:rPr lang="en-US" dirty="0">
+                <a:latin typeface="Times New Roman" panose="02020603050405020304" pitchFamily="18" charset="0"/>
+                <a:cs typeface="Times New Roman" panose="02020603050405020304" pitchFamily="18" charset="0"/>
+              </a:rPr>
+              <a:t>1</a:t>
+            </a:r>
+          </a:p>
+        </p:txBody>
+      </p:sp>
+      <p:sp>
+        <p:nvSpPr>
+          <p:cNvPr id="21" name="TextBox 20">
+            <a:extLst>
+              <a:ext uri="{FF2B5EF4-FFF2-40B4-BE49-F238E27FC236}">
+                <a16:creationId xmlns:a16="http://schemas.microsoft.com/office/drawing/2014/main" id="{CB90B09F-055B-1240-975D-755499026C79}"/>
+              </a:ext>
+            </a:extLst>
+          </p:cNvPr>
+          <p:cNvSpPr txBox="1"/>
+          <p:nvPr/>
+        </p:nvSpPr>
+        <p:spPr>
+          <a:xfrm>
+            <a:off x="1820562" y="5325762"/>
+            <a:ext cx="1425390" cy="369332"/>
+          </a:xfrm>
+          <a:prstGeom prst="rect">
+            <a:avLst/>
+          </a:prstGeom>
+          <a:noFill/>
+        </p:spPr>
+        <p:txBody>
+          <a:bodyPr wrap="none" rtlCol="0">
+            <a:spAutoFit/>
+          </a:bodyPr>
+          <a:lstStyle/>
+          <a:p>
+            <a:r>
+              <a:rPr lang="en-US" dirty="0">
+                <a:latin typeface="Gill Sans MT" panose="020B0502020104020203" pitchFamily="34" charset="77"/>
+              </a:rPr>
+              <a:t>Performance:</a:t>
+            </a:r>
+          </a:p>
+        </p:txBody>
+      </p:sp>
+      <p:cxnSp>
+        <p:nvCxnSpPr>
+          <p:cNvPr id="23" name="Straight Arrow Connector 22">
+            <a:extLst>
+              <a:ext uri="{FF2B5EF4-FFF2-40B4-BE49-F238E27FC236}">
+                <a16:creationId xmlns:a16="http://schemas.microsoft.com/office/drawing/2014/main" id="{EE25BABD-D0DF-1349-988F-23A7A6452590}"/>
+              </a:ext>
+            </a:extLst>
+          </p:cNvPr>
+          <p:cNvCxnSpPr/>
+          <p:nvPr/>
+        </p:nvCxnSpPr>
+        <p:spPr>
+          <a:xfrm>
+            <a:off x="9259331" y="4868562"/>
+            <a:ext cx="902043" cy="0"/>
+          </a:xfrm>
+          <a:prstGeom prst="straightConnector1">
+            <a:avLst/>
+          </a:prstGeom>
+          <a:ln>
+            <a:tailEnd type="triangle"/>
+          </a:ln>
+        </p:spPr>
+        <p:style>
+          <a:lnRef idx="2">
+            <a:schemeClr val="accent1"/>
+          </a:lnRef>
+          <a:fillRef idx="0">
+            <a:schemeClr val="accent1"/>
+          </a:fillRef>
+          <a:effectRef idx="1">
+            <a:schemeClr val="accent1"/>
+          </a:effectRef>
+          <a:fontRef idx="minor">
+            <a:schemeClr val="tx1"/>
+          </a:fontRef>
+        </p:style>
+      </p:cxnSp>
+      <p:sp>
+        <p:nvSpPr>
+          <p:cNvPr id="24" name="TextBox 23">
+            <a:extLst>
+              <a:ext uri="{FF2B5EF4-FFF2-40B4-BE49-F238E27FC236}">
+                <a16:creationId xmlns:a16="http://schemas.microsoft.com/office/drawing/2014/main" id="{D80B645F-E6A3-9840-9B17-1979D7A76614}"/>
+              </a:ext>
+            </a:extLst>
+          </p:cNvPr>
+          <p:cNvSpPr txBox="1"/>
+          <p:nvPr/>
+        </p:nvSpPr>
+        <p:spPr>
+          <a:xfrm>
+            <a:off x="9630032" y="4972729"/>
+            <a:ext cx="290464" cy="369332"/>
+          </a:xfrm>
+          <a:prstGeom prst="rect">
+            <a:avLst/>
+          </a:prstGeom>
+          <a:noFill/>
+        </p:spPr>
+        <p:txBody>
+          <a:bodyPr wrap="none" rtlCol="0">
+            <a:spAutoFit/>
+          </a:bodyPr>
+          <a:lstStyle/>
+          <a:p>
+            <a:r>
+              <a:rPr lang="en-US" dirty="0">
+                <a:latin typeface="Gill Sans MT" panose="020B0502020104020203" pitchFamily="34" charset="77"/>
+              </a:rPr>
+              <a:t>S</a:t>
+            </a:r>
+          </a:p>
+        </p:txBody>
+      </p:sp>
+      <p:cxnSp>
+        <p:nvCxnSpPr>
+          <p:cNvPr id="25" name="Straight Arrow Connector 24">
+            <a:extLst>
+              <a:ext uri="{FF2B5EF4-FFF2-40B4-BE49-F238E27FC236}">
+                <a16:creationId xmlns:a16="http://schemas.microsoft.com/office/drawing/2014/main" id="{FBF96432-413A-9647-8411-CBCAF920547E}"/>
+              </a:ext>
+            </a:extLst>
+          </p:cNvPr>
+          <p:cNvCxnSpPr>
+            <a:cxnSpLocks/>
+          </p:cNvCxnSpPr>
+          <p:nvPr/>
+        </p:nvCxnSpPr>
+        <p:spPr>
+          <a:xfrm flipV="1">
+            <a:off x="2562415" y="2082802"/>
+            <a:ext cx="0" cy="1402147"/>
+          </a:xfrm>
+          <a:prstGeom prst="straightConnector1">
+            <a:avLst/>
+          </a:prstGeom>
+          <a:ln>
+            <a:tailEnd type="triangle"/>
+          </a:ln>
+        </p:spPr>
+        <p:style>
+          <a:lnRef idx="2">
+            <a:schemeClr val="accent1"/>
+          </a:lnRef>
+          <a:fillRef idx="0">
+            <a:schemeClr val="accent1"/>
+          </a:fillRef>
+          <a:effectRef idx="1">
+            <a:schemeClr val="accent1"/>
+          </a:effectRef>
+          <a:fontRef idx="minor">
+            <a:schemeClr val="tx1"/>
+          </a:fontRef>
+        </p:style>
+      </p:cxnSp>
+      <p:sp>
+        <p:nvSpPr>
+          <p:cNvPr id="27" name="TextBox 26">
+            <a:extLst>
+              <a:ext uri="{FF2B5EF4-FFF2-40B4-BE49-F238E27FC236}">
+                <a16:creationId xmlns:a16="http://schemas.microsoft.com/office/drawing/2014/main" id="{3612043D-3D59-5446-9501-E51794B0A6DD}"/>
+              </a:ext>
+            </a:extLst>
+          </p:cNvPr>
+          <p:cNvSpPr txBox="1"/>
+          <p:nvPr/>
+        </p:nvSpPr>
+        <p:spPr>
+          <a:xfrm rot="16200000">
+            <a:off x="802556" y="2664587"/>
+            <a:ext cx="2876941" cy="369332"/>
+          </a:xfrm>
+          <a:prstGeom prst="rect">
+            <a:avLst/>
+          </a:prstGeom>
+          <a:noFill/>
+        </p:spPr>
+        <p:txBody>
+          <a:bodyPr wrap="none" rtlCol="0">
+            <a:spAutoFit/>
+          </a:bodyPr>
+          <a:lstStyle/>
+          <a:p>
+            <a:r>
+              <a:rPr lang="en-US" dirty="0">
+                <a:latin typeface="Gill Sans MT" panose="020B0502020104020203" pitchFamily="34" charset="77"/>
+              </a:rPr>
+              <a:t>Probability density frequency</a:t>
+            </a:r>
+          </a:p>
+        </p:txBody>
+      </p:sp>
+    </p:spTree>
+    <p:extLst>
+      <p:ext uri="{BB962C8B-B14F-4D97-AF65-F5344CB8AC3E}">
+        <p14:creationId xmlns:p14="http://schemas.microsoft.com/office/powerpoint/2010/main" val="462762506"/>
+      </p:ext>
+    </p:extLst>
+  </p:cSld>
+  <p:clrMapOvr>
+    <a:masterClrMapping/>
+  </p:clrMapOvr>
+</p:sld>
+</file>
+
+<file path=ppt/slides/slide42.xml><?xml version="1.0" encoding="utf-8"?>
+<p:sld xmlns:a="http://schemas.openxmlformats.org/drawingml/2006/main" xmlns:r="http://schemas.openxmlformats.org/officeDocument/2006/relationships" xmlns:p="http://schemas.openxmlformats.org/presentationml/2006/main">
+  <p:cSld>
+    <p:spTree>
+      <p:nvGrpSpPr>
+        <p:cNvPr id="1" name=""/>
+        <p:cNvGrpSpPr/>
+        <p:nvPr/>
+      </p:nvGrpSpPr>
+      <p:grpSpPr>
+        <a:xfrm>
+          <a:off x="0" y="0"/>
+          <a:ext cx="0" cy="0"/>
+          <a:chOff x="0" y="0"/>
+          <a:chExt cx="0" cy="0"/>
+        </a:xfrm>
+      </p:grpSpPr>
+      <p:pic>
+        <p:nvPicPr>
           <p:cNvPr id="4" name="Picture 3">
             <a:extLst>
               <a:ext uri="{FF2B5EF4-FFF2-40B4-BE49-F238E27FC236}">
@@ -42871,7 +44270,7 @@
 </p:sld>
 </file>
 
-<file path=ppt/slides/slide41.xml><?xml version="1.0" encoding="utf-8"?>
+<file path=ppt/slides/slide43.xml><?xml version="1.0" encoding="utf-8"?>
 <p:sld xmlns:a="http://schemas.openxmlformats.org/drawingml/2006/main" xmlns:r="http://schemas.openxmlformats.org/officeDocument/2006/relationships" xmlns:p="http://schemas.openxmlformats.org/presentationml/2006/main" show="0">
   <p:cSld>
     <p:spTree>
@@ -43188,7 +44587,7 @@
 </p:sld>
 </file>
 
-<file path=ppt/slides/slide42.xml><?xml version="1.0" encoding="utf-8"?>
+<file path=ppt/slides/slide44.xml><?xml version="1.0" encoding="utf-8"?>
 <p:sld xmlns:a="http://schemas.openxmlformats.org/drawingml/2006/main" xmlns:r="http://schemas.openxmlformats.org/officeDocument/2006/relationships" xmlns:p="http://schemas.openxmlformats.org/presentationml/2006/main" show="0">
   <p:cSld>
     <p:spTree>
@@ -43967,6 +45366,533 @@
 </file>
 
 <file path=ppt/slides/slide6.xml><?xml version="1.0" encoding="utf-8"?>
+<p:sld xmlns:a="http://schemas.openxmlformats.org/drawingml/2006/main" xmlns:r="http://schemas.openxmlformats.org/officeDocument/2006/relationships" xmlns:p="http://schemas.openxmlformats.org/presentationml/2006/main">
+  <p:cSld>
+    <p:spTree>
+      <p:nvGrpSpPr>
+        <p:cNvPr id="1" name=""/>
+        <p:cNvGrpSpPr/>
+        <p:nvPr/>
+      </p:nvGrpSpPr>
+      <p:grpSpPr>
+        <a:xfrm>
+          <a:off x="0" y="0"/>
+          <a:ext cx="0" cy="0"/>
+          <a:chOff x="0" y="0"/>
+          <a:chExt cx="0" cy="0"/>
+        </a:xfrm>
+      </p:grpSpPr>
+      <p:pic>
+        <p:nvPicPr>
+          <p:cNvPr id="4" name="Picture 3">
+            <a:extLst>
+              <a:ext uri="{FF2B5EF4-FFF2-40B4-BE49-F238E27FC236}">
+                <a16:creationId xmlns:a16="http://schemas.microsoft.com/office/drawing/2014/main" id="{98CBDBE0-3C5C-3763-7B68-043B487C9B0D}"/>
+              </a:ext>
+            </a:extLst>
+          </p:cNvPr>
+          <p:cNvPicPr>
+            <a:picLocks noChangeAspect="1"/>
+          </p:cNvPicPr>
+          <p:nvPr/>
+        </p:nvPicPr>
+        <p:blipFill>
+          <a:blip r:embed="rId2"/>
+          <a:stretch>
+            <a:fillRect/>
+          </a:stretch>
+        </p:blipFill>
+        <p:spPr>
+          <a:xfrm>
+            <a:off x="2209800" y="414773"/>
+            <a:ext cx="7772400" cy="6049984"/>
+          </a:xfrm>
+          <a:prstGeom prst="rect">
+            <a:avLst/>
+          </a:prstGeom>
+        </p:spPr>
+      </p:pic>
+      <p:cxnSp>
+        <p:nvCxnSpPr>
+          <p:cNvPr id="7" name="Straight Arrow Connector 6">
+            <a:extLst>
+              <a:ext uri="{FF2B5EF4-FFF2-40B4-BE49-F238E27FC236}">
+                <a16:creationId xmlns:a16="http://schemas.microsoft.com/office/drawing/2014/main" id="{0008A0A6-2B91-ADB8-9C6F-B8F791C40AF1}"/>
+              </a:ext>
+            </a:extLst>
+          </p:cNvPr>
+          <p:cNvCxnSpPr/>
+          <p:nvPr/>
+        </p:nvCxnSpPr>
+        <p:spPr>
+          <a:xfrm>
+            <a:off x="9982200" y="6643688"/>
+            <a:ext cx="962025" cy="0"/>
+          </a:xfrm>
+          <a:prstGeom prst="straightConnector1">
+            <a:avLst/>
+          </a:prstGeom>
+          <a:ln>
+            <a:tailEnd type="triangle"/>
+          </a:ln>
+        </p:spPr>
+        <p:style>
+          <a:lnRef idx="2">
+            <a:schemeClr val="accent1"/>
+          </a:lnRef>
+          <a:fillRef idx="0">
+            <a:schemeClr val="accent1"/>
+          </a:fillRef>
+          <a:effectRef idx="1">
+            <a:schemeClr val="accent1"/>
+          </a:effectRef>
+          <a:fontRef idx="minor">
+            <a:schemeClr val="tx1"/>
+          </a:fontRef>
+        </p:style>
+      </p:cxnSp>
+      <p:cxnSp>
+        <p:nvCxnSpPr>
+          <p:cNvPr id="8" name="Straight Arrow Connector 7">
+            <a:extLst>
+              <a:ext uri="{FF2B5EF4-FFF2-40B4-BE49-F238E27FC236}">
+                <a16:creationId xmlns:a16="http://schemas.microsoft.com/office/drawing/2014/main" id="{78FC25EF-3ED8-60FC-3491-FC1F3D76F9C3}"/>
+              </a:ext>
+            </a:extLst>
+          </p:cNvPr>
+          <p:cNvCxnSpPr>
+            <a:cxnSpLocks/>
+          </p:cNvCxnSpPr>
+          <p:nvPr/>
+        </p:nvCxnSpPr>
+        <p:spPr>
+          <a:xfrm flipV="1">
+            <a:off x="1819275" y="414773"/>
+            <a:ext cx="0" cy="909638"/>
+          </a:xfrm>
+          <a:prstGeom prst="straightConnector1">
+            <a:avLst/>
+          </a:prstGeom>
+          <a:ln>
+            <a:tailEnd type="triangle"/>
+          </a:ln>
+        </p:spPr>
+        <p:style>
+          <a:lnRef idx="2">
+            <a:schemeClr val="accent1"/>
+          </a:lnRef>
+          <a:fillRef idx="0">
+            <a:schemeClr val="accent1"/>
+          </a:fillRef>
+          <a:effectRef idx="1">
+            <a:schemeClr val="accent1"/>
+          </a:effectRef>
+          <a:fontRef idx="minor">
+            <a:schemeClr val="tx1"/>
+          </a:fontRef>
+        </p:style>
+      </p:cxnSp>
+      <p:sp>
+        <p:nvSpPr>
+          <p:cNvPr id="10" name="TextBox 9">
+            <a:extLst>
+              <a:ext uri="{FF2B5EF4-FFF2-40B4-BE49-F238E27FC236}">
+                <a16:creationId xmlns:a16="http://schemas.microsoft.com/office/drawing/2014/main" id="{E2600885-C5CC-F284-109B-D40C8386E767}"/>
+              </a:ext>
+            </a:extLst>
+          </p:cNvPr>
+          <p:cNvSpPr txBox="1"/>
+          <p:nvPr/>
+        </p:nvSpPr>
+        <p:spPr>
+          <a:xfrm>
+            <a:off x="1271588" y="771525"/>
+            <a:ext cx="369012" cy="369332"/>
+          </a:xfrm>
+          <a:prstGeom prst="rect">
+            <a:avLst/>
+          </a:prstGeom>
+          <a:noFill/>
+        </p:spPr>
+        <p:txBody>
+          <a:bodyPr wrap="none" rtlCol="0">
+            <a:spAutoFit/>
+          </a:bodyPr>
+          <a:lstStyle/>
+          <a:p>
+            <a:r>
+              <a:rPr lang="en-CL" dirty="0"/>
+              <a:t>x</a:t>
+            </a:r>
+            <a:r>
+              <a:rPr lang="en-CL" baseline="-25000" dirty="0"/>
+              <a:t>2</a:t>
+            </a:r>
+          </a:p>
+        </p:txBody>
+      </p:sp>
+      <p:sp>
+        <p:nvSpPr>
+          <p:cNvPr id="11" name="TextBox 10">
+            <a:extLst>
+              <a:ext uri="{FF2B5EF4-FFF2-40B4-BE49-F238E27FC236}">
+                <a16:creationId xmlns:a16="http://schemas.microsoft.com/office/drawing/2014/main" id="{DA0E11EA-A63B-6576-EB30-ACDFF9D9A5C8}"/>
+              </a:ext>
+            </a:extLst>
+          </p:cNvPr>
+          <p:cNvSpPr txBox="1"/>
+          <p:nvPr/>
+        </p:nvSpPr>
+        <p:spPr>
+          <a:xfrm>
+            <a:off x="10372724" y="6184891"/>
+            <a:ext cx="369012" cy="369332"/>
+          </a:xfrm>
+          <a:prstGeom prst="rect">
+            <a:avLst/>
+          </a:prstGeom>
+          <a:noFill/>
+        </p:spPr>
+        <p:txBody>
+          <a:bodyPr wrap="none" rtlCol="0">
+            <a:spAutoFit/>
+          </a:bodyPr>
+          <a:lstStyle/>
+          <a:p>
+            <a:r>
+              <a:rPr lang="en-CL" dirty="0"/>
+              <a:t>x</a:t>
+            </a:r>
+            <a:r>
+              <a:rPr lang="en-CL" baseline="-25000" dirty="0"/>
+              <a:t>1</a:t>
+            </a:r>
+          </a:p>
+        </p:txBody>
+      </p:sp>
+      <p:sp>
+        <p:nvSpPr>
+          <p:cNvPr id="12" name="TextBox 11">
+            <a:extLst>
+              <a:ext uri="{FF2B5EF4-FFF2-40B4-BE49-F238E27FC236}">
+                <a16:creationId xmlns:a16="http://schemas.microsoft.com/office/drawing/2014/main" id="{BAD51E7F-B4AB-2B81-D85C-5E745A4F4D34}"/>
+              </a:ext>
+            </a:extLst>
+          </p:cNvPr>
+          <p:cNvSpPr txBox="1"/>
+          <p:nvPr/>
+        </p:nvSpPr>
+        <p:spPr>
+          <a:xfrm>
+            <a:off x="10453746" y="546426"/>
+            <a:ext cx="933332" cy="646331"/>
+          </a:xfrm>
+          <a:prstGeom prst="rect">
+            <a:avLst/>
+          </a:prstGeom>
+          <a:noFill/>
+        </p:spPr>
+        <p:txBody>
+          <a:bodyPr wrap="none" rtlCol="0">
+            <a:spAutoFit/>
+          </a:bodyPr>
+          <a:lstStyle/>
+          <a:p>
+            <a:pPr algn="ctr"/>
+            <a:r>
+              <a:rPr lang="en-CL" dirty="0">
+                <a:latin typeface="Gill Sans MT" panose="020B0502020104020203" pitchFamily="34" charset="77"/>
+              </a:rPr>
+              <a:t>Ground</a:t>
+            </a:r>
+          </a:p>
+          <a:p>
+            <a:pPr algn="ctr"/>
+            <a:r>
+              <a:rPr lang="en-CL" dirty="0">
+                <a:latin typeface="Gill Sans MT" panose="020B0502020104020203" pitchFamily="34" charset="77"/>
+              </a:rPr>
+              <a:t>Truth</a:t>
+            </a:r>
+          </a:p>
+        </p:txBody>
+      </p:sp>
+    </p:spTree>
+    <p:extLst>
+      <p:ext uri="{BB962C8B-B14F-4D97-AF65-F5344CB8AC3E}">
+        <p14:creationId xmlns:p14="http://schemas.microsoft.com/office/powerpoint/2010/main" val="1683693486"/>
+      </p:ext>
+    </p:extLst>
+  </p:cSld>
+  <p:clrMapOvr>
+    <a:masterClrMapping/>
+  </p:clrMapOvr>
+</p:sld>
+</file>
+
+<file path=ppt/slides/slide7.xml><?xml version="1.0" encoding="utf-8"?>
+<p:sld xmlns:a="http://schemas.openxmlformats.org/drawingml/2006/main" xmlns:r="http://schemas.openxmlformats.org/officeDocument/2006/relationships" xmlns:p="http://schemas.openxmlformats.org/presentationml/2006/main">
+  <p:cSld>
+    <p:spTree>
+      <p:nvGrpSpPr>
+        <p:cNvPr id="1" name="">
+          <a:extLst>
+            <a:ext uri="{FF2B5EF4-FFF2-40B4-BE49-F238E27FC236}">
+              <a16:creationId xmlns:a16="http://schemas.microsoft.com/office/drawing/2014/main" id="{7A6DE405-F3BD-140C-63C5-C44CB66E9339}"/>
+            </a:ext>
+          </a:extLst>
+        </p:cNvPr>
+        <p:cNvGrpSpPr/>
+        <p:nvPr/>
+      </p:nvGrpSpPr>
+      <p:grpSpPr>
+        <a:xfrm>
+          <a:off x="0" y="0"/>
+          <a:ext cx="0" cy="0"/>
+          <a:chOff x="0" y="0"/>
+          <a:chExt cx="0" cy="0"/>
+        </a:xfrm>
+      </p:grpSpPr>
+      <p:cxnSp>
+        <p:nvCxnSpPr>
+          <p:cNvPr id="7" name="Straight Arrow Connector 6">
+            <a:extLst>
+              <a:ext uri="{FF2B5EF4-FFF2-40B4-BE49-F238E27FC236}">
+                <a16:creationId xmlns:a16="http://schemas.microsoft.com/office/drawing/2014/main" id="{1EEAE35E-7E1C-1FD0-5921-40610C728D25}"/>
+              </a:ext>
+            </a:extLst>
+          </p:cNvPr>
+          <p:cNvCxnSpPr/>
+          <p:nvPr/>
+        </p:nvCxnSpPr>
+        <p:spPr>
+          <a:xfrm>
+            <a:off x="9982200" y="6643688"/>
+            <a:ext cx="962025" cy="0"/>
+          </a:xfrm>
+          <a:prstGeom prst="straightConnector1">
+            <a:avLst/>
+          </a:prstGeom>
+          <a:ln>
+            <a:tailEnd type="triangle"/>
+          </a:ln>
+        </p:spPr>
+        <p:style>
+          <a:lnRef idx="2">
+            <a:schemeClr val="accent1"/>
+          </a:lnRef>
+          <a:fillRef idx="0">
+            <a:schemeClr val="accent1"/>
+          </a:fillRef>
+          <a:effectRef idx="1">
+            <a:schemeClr val="accent1"/>
+          </a:effectRef>
+          <a:fontRef idx="minor">
+            <a:schemeClr val="tx1"/>
+          </a:fontRef>
+        </p:style>
+      </p:cxnSp>
+      <p:cxnSp>
+        <p:nvCxnSpPr>
+          <p:cNvPr id="8" name="Straight Arrow Connector 7">
+            <a:extLst>
+              <a:ext uri="{FF2B5EF4-FFF2-40B4-BE49-F238E27FC236}">
+                <a16:creationId xmlns:a16="http://schemas.microsoft.com/office/drawing/2014/main" id="{69A718FC-9E52-15E5-6780-BDC4742B49B4}"/>
+              </a:ext>
+            </a:extLst>
+          </p:cNvPr>
+          <p:cNvCxnSpPr>
+            <a:cxnSpLocks/>
+          </p:cNvCxnSpPr>
+          <p:nvPr/>
+        </p:nvCxnSpPr>
+        <p:spPr>
+          <a:xfrm flipV="1">
+            <a:off x="1819275" y="414773"/>
+            <a:ext cx="0" cy="909638"/>
+          </a:xfrm>
+          <a:prstGeom prst="straightConnector1">
+            <a:avLst/>
+          </a:prstGeom>
+          <a:ln>
+            <a:tailEnd type="triangle"/>
+          </a:ln>
+        </p:spPr>
+        <p:style>
+          <a:lnRef idx="2">
+            <a:schemeClr val="accent1"/>
+          </a:lnRef>
+          <a:fillRef idx="0">
+            <a:schemeClr val="accent1"/>
+          </a:fillRef>
+          <a:effectRef idx="1">
+            <a:schemeClr val="accent1"/>
+          </a:effectRef>
+          <a:fontRef idx="minor">
+            <a:schemeClr val="tx1"/>
+          </a:fontRef>
+        </p:style>
+      </p:cxnSp>
+      <p:sp>
+        <p:nvSpPr>
+          <p:cNvPr id="10" name="TextBox 9">
+            <a:extLst>
+              <a:ext uri="{FF2B5EF4-FFF2-40B4-BE49-F238E27FC236}">
+                <a16:creationId xmlns:a16="http://schemas.microsoft.com/office/drawing/2014/main" id="{2B1D24EE-51E1-F1C1-19BF-3AA49B56D822}"/>
+              </a:ext>
+            </a:extLst>
+          </p:cNvPr>
+          <p:cNvSpPr txBox="1"/>
+          <p:nvPr/>
+        </p:nvSpPr>
+        <p:spPr>
+          <a:xfrm>
+            <a:off x="1271588" y="771525"/>
+            <a:ext cx="369012" cy="369332"/>
+          </a:xfrm>
+          <a:prstGeom prst="rect">
+            <a:avLst/>
+          </a:prstGeom>
+          <a:noFill/>
+        </p:spPr>
+        <p:txBody>
+          <a:bodyPr wrap="none" rtlCol="0">
+            <a:spAutoFit/>
+          </a:bodyPr>
+          <a:lstStyle/>
+          <a:p>
+            <a:r>
+              <a:rPr lang="en-CL" dirty="0"/>
+              <a:t>x</a:t>
+            </a:r>
+            <a:r>
+              <a:rPr lang="en-CL" baseline="-25000" dirty="0"/>
+              <a:t>2</a:t>
+            </a:r>
+          </a:p>
+        </p:txBody>
+      </p:sp>
+      <p:sp>
+        <p:nvSpPr>
+          <p:cNvPr id="11" name="TextBox 10">
+            <a:extLst>
+              <a:ext uri="{FF2B5EF4-FFF2-40B4-BE49-F238E27FC236}">
+                <a16:creationId xmlns:a16="http://schemas.microsoft.com/office/drawing/2014/main" id="{858C3CA0-B62B-9C79-6DF8-50BB356AC748}"/>
+              </a:ext>
+            </a:extLst>
+          </p:cNvPr>
+          <p:cNvSpPr txBox="1"/>
+          <p:nvPr/>
+        </p:nvSpPr>
+        <p:spPr>
+          <a:xfrm>
+            <a:off x="10372724" y="6184891"/>
+            <a:ext cx="369012" cy="369332"/>
+          </a:xfrm>
+          <a:prstGeom prst="rect">
+            <a:avLst/>
+          </a:prstGeom>
+          <a:noFill/>
+        </p:spPr>
+        <p:txBody>
+          <a:bodyPr wrap="none" rtlCol="0">
+            <a:spAutoFit/>
+          </a:bodyPr>
+          <a:lstStyle/>
+          <a:p>
+            <a:r>
+              <a:rPr lang="en-CL" dirty="0"/>
+              <a:t>x</a:t>
+            </a:r>
+            <a:r>
+              <a:rPr lang="en-CL" baseline="-25000" dirty="0"/>
+              <a:t>1</a:t>
+            </a:r>
+          </a:p>
+        </p:txBody>
+      </p:sp>
+      <p:pic>
+        <p:nvPicPr>
+          <p:cNvPr id="2" name="Picture 1">
+            <a:extLst>
+              <a:ext uri="{FF2B5EF4-FFF2-40B4-BE49-F238E27FC236}">
+                <a16:creationId xmlns:a16="http://schemas.microsoft.com/office/drawing/2014/main" id="{906A054B-2471-D1C0-DAB7-FE889A924A45}"/>
+              </a:ext>
+            </a:extLst>
+          </p:cNvPr>
+          <p:cNvPicPr>
+            <a:picLocks noChangeAspect="1"/>
+          </p:cNvPicPr>
+          <p:nvPr/>
+        </p:nvPicPr>
+        <p:blipFill>
+          <a:blip r:embed="rId2"/>
+          <a:stretch>
+            <a:fillRect/>
+          </a:stretch>
+        </p:blipFill>
+        <p:spPr>
+          <a:xfrm>
+            <a:off x="2209800" y="414773"/>
+            <a:ext cx="7772400" cy="6028454"/>
+          </a:xfrm>
+          <a:prstGeom prst="rect">
+            <a:avLst/>
+          </a:prstGeom>
+        </p:spPr>
+      </p:pic>
+      <p:sp>
+        <p:nvSpPr>
+          <p:cNvPr id="3" name="TextBox 2">
+            <a:extLst>
+              <a:ext uri="{FF2B5EF4-FFF2-40B4-BE49-F238E27FC236}">
+                <a16:creationId xmlns:a16="http://schemas.microsoft.com/office/drawing/2014/main" id="{BC0AD740-022C-875D-6BA8-A78CD521BF19}"/>
+              </a:ext>
+            </a:extLst>
+          </p:cNvPr>
+          <p:cNvSpPr txBox="1"/>
+          <p:nvPr/>
+        </p:nvSpPr>
+        <p:spPr>
+          <a:xfrm>
+            <a:off x="10344774" y="546426"/>
+            <a:ext cx="1151277" cy="369332"/>
+          </a:xfrm>
+          <a:prstGeom prst="rect">
+            <a:avLst/>
+          </a:prstGeom>
+          <a:noFill/>
+        </p:spPr>
+        <p:txBody>
+          <a:bodyPr wrap="none" rtlCol="0">
+            <a:spAutoFit/>
+          </a:bodyPr>
+          <a:lstStyle/>
+          <a:p>
+            <a:pPr algn="ctr"/>
+            <a:r>
+              <a:rPr lang="en-CL" dirty="0">
+                <a:latin typeface="Gill Sans MT" panose="020B0502020104020203" pitchFamily="34" charset="77"/>
+              </a:rPr>
+              <a:t>Detección</a:t>
+            </a:r>
+          </a:p>
+        </p:txBody>
+      </p:sp>
+    </p:spTree>
+    <p:extLst>
+      <p:ext uri="{BB962C8B-B14F-4D97-AF65-F5344CB8AC3E}">
+        <p14:creationId xmlns:p14="http://schemas.microsoft.com/office/powerpoint/2010/main" val="2720483745"/>
+      </p:ext>
+    </p:extLst>
+  </p:cSld>
+  <p:clrMapOvr>
+    <a:masterClrMapping/>
+  </p:clrMapOvr>
+</p:sld>
+</file>
+
+<file path=ppt/slides/slide8.xml><?xml version="1.0" encoding="utf-8"?>
 <p:sld xmlns:a="http://schemas.openxmlformats.org/drawingml/2006/main" xmlns:r="http://schemas.openxmlformats.org/officeDocument/2006/relationships" xmlns:p="http://schemas.openxmlformats.org/presentationml/2006/main">
   <p:cSld>
     <p:spTree>
@@ -44368,8 +46294,8 @@
         </p:nvSpPr>
         <p:spPr>
           <a:xfrm>
-            <a:off x="8724753" y="3655328"/>
-            <a:ext cx="2469715" cy="461665"/>
+            <a:off x="9238947" y="3615351"/>
+            <a:ext cx="2953053" cy="646331"/>
           </a:xfrm>
           <a:prstGeom prst="rect">
             <a:avLst/>
@@ -44383,22 +46309,13 @@
           <a:lstStyle/>
           <a:p>
             <a:r>
-              <a:rPr lang="en-US" sz="3600" baseline="-25000" dirty="0">
-                <a:solidFill>
-                  <a:srgbClr val="FF0000"/>
-                </a:solidFill>
-                <a:latin typeface="Gill Sans MT" panose="020B0502020104020203" pitchFamily="34" charset="77"/>
-              </a:rPr>
-              <a:t>*</a:t>
-            </a:r>
-            <a:r>
               <a:rPr lang="en-US" dirty="0">
                 <a:solidFill>
                   <a:srgbClr val="FF0000"/>
                 </a:solidFill>
                 <a:latin typeface="Gill Sans MT" panose="020B0502020104020203" pitchFamily="34" charset="77"/>
               </a:rPr>
-              <a:t> : class </a:t>
+              <a:t>class </a:t>
             </a:r>
             <a:r>
               <a:rPr lang="en-US" dirty="0">
@@ -44410,6 +46327,8 @@
               </a:rPr>
               <a:t>1 </a:t>
             </a:r>
+          </a:p>
+          <a:p>
             <a:r>
               <a:rPr lang="en-US" i="1" dirty="0">
                 <a:solidFill>
@@ -44438,27 +46357,7 @@
                 <a:latin typeface="Gill Sans MT" panose="020B0502020104020203" pitchFamily="34" charset="77"/>
                 <a:cs typeface="Times New Roman" panose="02020603050405020304" pitchFamily="18" charset="0"/>
               </a:rPr>
-              <a:t> </a:t>
-            </a:r>
-            <a:r>
-              <a:rPr lang="en-US" i="1" dirty="0" err="1">
-                <a:solidFill>
-                  <a:srgbClr val="FF0000"/>
-                </a:solidFill>
-                <a:latin typeface="Gill Sans MT" panose="020B0502020104020203" pitchFamily="34" charset="77"/>
-                <a:cs typeface="Times New Roman" panose="02020603050405020304" pitchFamily="18" charset="0"/>
-              </a:rPr>
-              <a:t>positiva</a:t>
-            </a:r>
-            <a:r>
-              <a:rPr lang="en-US" i="1" dirty="0">
-                <a:solidFill>
-                  <a:srgbClr val="FF0000"/>
-                </a:solidFill>
-                <a:latin typeface="Gill Sans MT" panose="020B0502020104020203" pitchFamily="34" charset="77"/>
-                <a:cs typeface="Times New Roman" panose="02020603050405020304" pitchFamily="18" charset="0"/>
-              </a:rPr>
-              <a:t>)</a:t>
+              <a:t> positive – Ground Truth)</a:t>
             </a:r>
             <a:r>
               <a:rPr lang="en-US" dirty="0">
@@ -44541,7 +46440,7 @@
           <a:p>
             <a:fld id="{9C0B2870-7350-8D40-A01A-CE539DF873CB}" type="slidenum">
               <a:rPr lang="en-US" smtClean="0"/>
-              <a:t>6</a:t>
+              <a:t>8</a:t>
             </a:fld>
             <a:endParaRPr lang="en-US"/>
           </a:p>
@@ -44560,7 +46459,7 @@
 </p:sld>
 </file>
 
-<file path=ppt/slides/slide7.xml><?xml version="1.0" encoding="utf-8"?>
+<file path=ppt/slides/slide9.xml><?xml version="1.0" encoding="utf-8"?>
 <p:sld xmlns:a="http://schemas.openxmlformats.org/drawingml/2006/main" xmlns:r="http://schemas.openxmlformats.org/officeDocument/2006/relationships" xmlns:p="http://schemas.openxmlformats.org/presentationml/2006/main">
   <p:cSld>
     <p:spTree>
@@ -45021,7 +46920,7 @@
           <a:p>
             <a:fld id="{9C0B2870-7350-8D40-A01A-CE539DF873CB}" type="slidenum">
               <a:rPr lang="en-US" smtClean="0"/>
-              <a:t>7</a:t>
+              <a:t>9</a:t>
             </a:fld>
             <a:endParaRPr lang="en-US"/>
           </a:p>
@@ -45081,1403 +46980,6 @@
     <p:extLst>
       <p:ext uri="{BB962C8B-B14F-4D97-AF65-F5344CB8AC3E}">
         <p14:creationId xmlns:p14="http://schemas.microsoft.com/office/powerpoint/2010/main" val="1147057008"/>
-      </p:ext>
-    </p:extLst>
-  </p:cSld>
-  <p:clrMapOvr>
-    <a:masterClrMapping/>
-  </p:clrMapOvr>
-</p:sld>
-</file>
-
-<file path=ppt/slides/slide8.xml><?xml version="1.0" encoding="utf-8"?>
-<p:sld xmlns:a="http://schemas.openxmlformats.org/drawingml/2006/main" xmlns:r="http://schemas.openxmlformats.org/officeDocument/2006/relationships" xmlns:p="http://schemas.openxmlformats.org/presentationml/2006/main">
-  <p:cSld>
-    <p:spTree>
-      <p:nvGrpSpPr>
-        <p:cNvPr id="1" name=""/>
-        <p:cNvGrpSpPr/>
-        <p:nvPr/>
-      </p:nvGrpSpPr>
-      <p:grpSpPr>
-        <a:xfrm>
-          <a:off x="0" y="0"/>
-          <a:ext cx="0" cy="0"/>
-          <a:chOff x="0" y="0"/>
-          <a:chExt cx="0" cy="0"/>
-        </a:xfrm>
-      </p:grpSpPr>
-      <p:sp>
-        <p:nvSpPr>
-          <p:cNvPr id="7" name="Rectangle 6"/>
-          <p:cNvSpPr/>
-          <p:nvPr/>
-        </p:nvSpPr>
-        <p:spPr>
-          <a:xfrm>
-            <a:off x="3912362" y="2169997"/>
-            <a:ext cx="4285397" cy="3766782"/>
-          </a:xfrm>
-          <a:prstGeom prst="rect">
-            <a:avLst/>
-          </a:prstGeom>
-          <a:solidFill>
-            <a:schemeClr val="bg1"/>
-          </a:solidFill>
-        </p:spPr>
-        <p:style>
-          <a:lnRef idx="1">
-            <a:schemeClr val="accent1"/>
-          </a:lnRef>
-          <a:fillRef idx="3">
-            <a:schemeClr val="accent1"/>
-          </a:fillRef>
-          <a:effectRef idx="2">
-            <a:schemeClr val="accent1"/>
-          </a:effectRef>
-          <a:fontRef idx="minor">
-            <a:schemeClr val="lt1"/>
-          </a:fontRef>
-        </p:style>
-        <p:txBody>
-          <a:bodyPr rtlCol="0" anchor="ctr"/>
-          <a:lstStyle/>
-          <a:p>
-            <a:pPr algn="ctr"/>
-            <a:endParaRPr lang="en-US" dirty="0">
-              <a:latin typeface="Gill Sans MT" panose="020B0502020104020203" pitchFamily="34" charset="77"/>
-            </a:endParaRPr>
-          </a:p>
-        </p:txBody>
-      </p:sp>
-      <p:sp>
-        <p:nvSpPr>
-          <p:cNvPr id="5" name="Freeform 4"/>
-          <p:cNvSpPr/>
-          <p:nvPr/>
-        </p:nvSpPr>
-        <p:spPr>
-          <a:xfrm>
-            <a:off x="4529157" y="3166216"/>
-            <a:ext cx="2729534" cy="1919913"/>
-          </a:xfrm>
-          <a:custGeom>
-            <a:avLst/>
-            <a:gdLst>
-              <a:gd name="connsiteX0" fmla="*/ 1034582 w 2729534"/>
-              <a:gd name="connsiteY0" fmla="*/ 341268 h 1919913"/>
-              <a:gd name="connsiteX1" fmla="*/ 1512254 w 2729534"/>
-              <a:gd name="connsiteY1" fmla="*/ 13722 h 1919913"/>
-              <a:gd name="connsiteX2" fmla="*/ 2726905 w 2729534"/>
-              <a:gd name="connsiteY2" fmla="*/ 832588 h 1919913"/>
-              <a:gd name="connsiteX3" fmla="*/ 1798857 w 2729534"/>
-              <a:gd name="connsiteY3" fmla="*/ 1897113 h 1919913"/>
-              <a:gd name="connsiteX4" fmla="*/ 556911 w 2729534"/>
-              <a:gd name="connsiteY4" fmla="*/ 1487680 h 1919913"/>
-              <a:gd name="connsiteX5" fmla="*/ 11000 w 2729534"/>
-              <a:gd name="connsiteY5" fmla="*/ 627871 h 1919913"/>
-              <a:gd name="connsiteX6" fmla="*/ 1034582 w 2729534"/>
-              <a:gd name="connsiteY6" fmla="*/ 341268 h 1919913"/>
-            </a:gdLst>
-            <a:ahLst/>
-            <a:cxnLst>
-              <a:cxn ang="0">
-                <a:pos x="connsiteX0" y="connsiteY0"/>
-              </a:cxn>
-              <a:cxn ang="0">
-                <a:pos x="connsiteX1" y="connsiteY1"/>
-              </a:cxn>
-              <a:cxn ang="0">
-                <a:pos x="connsiteX2" y="connsiteY2"/>
-              </a:cxn>
-              <a:cxn ang="0">
-                <a:pos x="connsiteX3" y="connsiteY3"/>
-              </a:cxn>
-              <a:cxn ang="0">
-                <a:pos x="connsiteX4" y="connsiteY4"/>
-              </a:cxn>
-              <a:cxn ang="0">
-                <a:pos x="connsiteX5" y="connsiteY5"/>
-              </a:cxn>
-              <a:cxn ang="0">
-                <a:pos x="connsiteX6" y="connsiteY6"/>
-              </a:cxn>
-            </a:cxnLst>
-            <a:rect l="l" t="t" r="r" b="b"/>
-            <a:pathLst>
-              <a:path w="2729534" h="1919913">
-                <a:moveTo>
-                  <a:pt x="1034582" y="341268"/>
-                </a:moveTo>
-                <a:cubicBezTo>
-                  <a:pt x="1284791" y="238910"/>
-                  <a:pt x="1230200" y="-68165"/>
-                  <a:pt x="1512254" y="13722"/>
-                </a:cubicBezTo>
-                <a:cubicBezTo>
-                  <a:pt x="1794308" y="95609"/>
-                  <a:pt x="2679138" y="518690"/>
-                  <a:pt x="2726905" y="832588"/>
-                </a:cubicBezTo>
-                <a:cubicBezTo>
-                  <a:pt x="2774672" y="1146486"/>
-                  <a:pt x="2160523" y="1787931"/>
-                  <a:pt x="1798857" y="1897113"/>
-                </a:cubicBezTo>
-                <a:cubicBezTo>
-                  <a:pt x="1437191" y="2006295"/>
-                  <a:pt x="854887" y="1699220"/>
-                  <a:pt x="556911" y="1487680"/>
-                </a:cubicBezTo>
-                <a:cubicBezTo>
-                  <a:pt x="258935" y="1276140"/>
-                  <a:pt x="-64063" y="816665"/>
-                  <a:pt x="11000" y="627871"/>
-                </a:cubicBezTo>
-                <a:cubicBezTo>
-                  <a:pt x="86063" y="439077"/>
-                  <a:pt x="784373" y="443626"/>
-                  <a:pt x="1034582" y="341268"/>
-                </a:cubicBezTo>
-                <a:close/>
-              </a:path>
-            </a:pathLst>
-          </a:custGeom>
-          <a:solidFill>
-            <a:srgbClr val="FF0000"/>
-          </a:solidFill>
-        </p:spPr>
-        <p:style>
-          <a:lnRef idx="1">
-            <a:schemeClr val="accent1"/>
-          </a:lnRef>
-          <a:fillRef idx="3">
-            <a:schemeClr val="accent1"/>
-          </a:fillRef>
-          <a:effectRef idx="2">
-            <a:schemeClr val="accent1"/>
-          </a:effectRef>
-          <a:fontRef idx="minor">
-            <a:schemeClr val="lt1"/>
-          </a:fontRef>
-        </p:style>
-        <p:txBody>
-          <a:bodyPr rtlCol="0" anchor="ctr"/>
-          <a:lstStyle/>
-          <a:p>
-            <a:pPr algn="ctr"/>
-            <a:endParaRPr lang="en-US" dirty="0">
-              <a:latin typeface="Gill Sans MT" panose="020B0502020104020203" pitchFamily="34" charset="77"/>
-            </a:endParaRPr>
-          </a:p>
-        </p:txBody>
-      </p:sp>
-      <p:sp>
-        <p:nvSpPr>
-          <p:cNvPr id="6" name="Freeform 5"/>
-          <p:cNvSpPr/>
-          <p:nvPr/>
-        </p:nvSpPr>
-        <p:spPr>
-          <a:xfrm>
-            <a:off x="4811400" y="3074556"/>
-            <a:ext cx="2589777" cy="2029155"/>
-          </a:xfrm>
-          <a:custGeom>
-            <a:avLst/>
-            <a:gdLst>
-              <a:gd name="connsiteX0" fmla="*/ 1034582 w 2729534"/>
-              <a:gd name="connsiteY0" fmla="*/ 341268 h 1919913"/>
-              <a:gd name="connsiteX1" fmla="*/ 1512254 w 2729534"/>
-              <a:gd name="connsiteY1" fmla="*/ 13722 h 1919913"/>
-              <a:gd name="connsiteX2" fmla="*/ 2726905 w 2729534"/>
-              <a:gd name="connsiteY2" fmla="*/ 832588 h 1919913"/>
-              <a:gd name="connsiteX3" fmla="*/ 1798857 w 2729534"/>
-              <a:gd name="connsiteY3" fmla="*/ 1897113 h 1919913"/>
-              <a:gd name="connsiteX4" fmla="*/ 556911 w 2729534"/>
-              <a:gd name="connsiteY4" fmla="*/ 1487680 h 1919913"/>
-              <a:gd name="connsiteX5" fmla="*/ 11000 w 2729534"/>
-              <a:gd name="connsiteY5" fmla="*/ 627871 h 1919913"/>
-              <a:gd name="connsiteX6" fmla="*/ 1034582 w 2729534"/>
-              <a:gd name="connsiteY6" fmla="*/ 341268 h 1919913"/>
-              <a:gd name="connsiteX0" fmla="*/ 1034582 w 2242520"/>
-              <a:gd name="connsiteY0" fmla="*/ 343152 h 1919663"/>
-              <a:gd name="connsiteX1" fmla="*/ 1512254 w 2242520"/>
-              <a:gd name="connsiteY1" fmla="*/ 15606 h 1919663"/>
-              <a:gd name="connsiteX2" fmla="*/ 2235585 w 2242520"/>
-              <a:gd name="connsiteY2" fmla="*/ 875416 h 1919663"/>
-              <a:gd name="connsiteX3" fmla="*/ 1798857 w 2242520"/>
-              <a:gd name="connsiteY3" fmla="*/ 1898997 h 1919663"/>
-              <a:gd name="connsiteX4" fmla="*/ 556911 w 2242520"/>
-              <a:gd name="connsiteY4" fmla="*/ 1489564 h 1919663"/>
-              <a:gd name="connsiteX5" fmla="*/ 11000 w 2242520"/>
-              <a:gd name="connsiteY5" fmla="*/ 629755 h 1919663"/>
-              <a:gd name="connsiteX6" fmla="*/ 1034582 w 2242520"/>
-              <a:gd name="connsiteY6" fmla="*/ 343152 h 1919663"/>
-              <a:gd name="connsiteX0" fmla="*/ 1034582 w 2253299"/>
-              <a:gd name="connsiteY0" fmla="*/ 435985 h 2012496"/>
-              <a:gd name="connsiteX1" fmla="*/ 1280242 w 2253299"/>
-              <a:gd name="connsiteY1" fmla="*/ 12904 h 2012496"/>
-              <a:gd name="connsiteX2" fmla="*/ 2235585 w 2253299"/>
-              <a:gd name="connsiteY2" fmla="*/ 968249 h 2012496"/>
-              <a:gd name="connsiteX3" fmla="*/ 1798857 w 2253299"/>
-              <a:gd name="connsiteY3" fmla="*/ 1991830 h 2012496"/>
-              <a:gd name="connsiteX4" fmla="*/ 556911 w 2253299"/>
-              <a:gd name="connsiteY4" fmla="*/ 1582397 h 2012496"/>
-              <a:gd name="connsiteX5" fmla="*/ 11000 w 2253299"/>
-              <a:gd name="connsiteY5" fmla="*/ 722588 h 2012496"/>
-              <a:gd name="connsiteX6" fmla="*/ 1034582 w 2253299"/>
-              <a:gd name="connsiteY6" fmla="*/ 435985 h 2012496"/>
-              <a:gd name="connsiteX0" fmla="*/ 586989 w 2242434"/>
-              <a:gd name="connsiteY0" fmla="*/ 487258 h 2009178"/>
-              <a:gd name="connsiteX1" fmla="*/ 1269377 w 2242434"/>
-              <a:gd name="connsiteY1" fmla="*/ 9586 h 2009178"/>
-              <a:gd name="connsiteX2" fmla="*/ 2224720 w 2242434"/>
-              <a:gd name="connsiteY2" fmla="*/ 964931 h 2009178"/>
-              <a:gd name="connsiteX3" fmla="*/ 1787992 w 2242434"/>
-              <a:gd name="connsiteY3" fmla="*/ 1988512 h 2009178"/>
-              <a:gd name="connsiteX4" fmla="*/ 546046 w 2242434"/>
-              <a:gd name="connsiteY4" fmla="*/ 1579079 h 2009178"/>
-              <a:gd name="connsiteX5" fmla="*/ 135 w 2242434"/>
-              <a:gd name="connsiteY5" fmla="*/ 719270 h 2009178"/>
-              <a:gd name="connsiteX6" fmla="*/ 586989 w 2242434"/>
-              <a:gd name="connsiteY6" fmla="*/ 487258 h 2009178"/>
-              <a:gd name="connsiteX0" fmla="*/ 602616 w 2260356"/>
-              <a:gd name="connsiteY0" fmla="*/ 487258 h 2028895"/>
-              <a:gd name="connsiteX1" fmla="*/ 1285004 w 2260356"/>
-              <a:gd name="connsiteY1" fmla="*/ 9586 h 2028895"/>
-              <a:gd name="connsiteX2" fmla="*/ 2240347 w 2260356"/>
-              <a:gd name="connsiteY2" fmla="*/ 964931 h 2028895"/>
-              <a:gd name="connsiteX3" fmla="*/ 1803619 w 2260356"/>
-              <a:gd name="connsiteY3" fmla="*/ 1988512 h 2028895"/>
-              <a:gd name="connsiteX4" fmla="*/ 316014 w 2260356"/>
-              <a:gd name="connsiteY4" fmla="*/ 1715556 h 2028895"/>
-              <a:gd name="connsiteX5" fmla="*/ 15762 w 2260356"/>
-              <a:gd name="connsiteY5" fmla="*/ 719270 h 2028895"/>
-              <a:gd name="connsiteX6" fmla="*/ 602616 w 2260356"/>
-              <a:gd name="connsiteY6" fmla="*/ 487258 h 2028895"/>
-              <a:gd name="connsiteX0" fmla="*/ 1121883 w 2779623"/>
-              <a:gd name="connsiteY0" fmla="*/ 487386 h 2029023"/>
-              <a:gd name="connsiteX1" fmla="*/ 1804271 w 2779623"/>
-              <a:gd name="connsiteY1" fmla="*/ 9714 h 2029023"/>
-              <a:gd name="connsiteX2" fmla="*/ 2759614 w 2779623"/>
-              <a:gd name="connsiteY2" fmla="*/ 965059 h 2029023"/>
-              <a:gd name="connsiteX3" fmla="*/ 2322886 w 2779623"/>
-              <a:gd name="connsiteY3" fmla="*/ 1988640 h 2029023"/>
-              <a:gd name="connsiteX4" fmla="*/ 835281 w 2779623"/>
-              <a:gd name="connsiteY4" fmla="*/ 1715684 h 2029023"/>
-              <a:gd name="connsiteX5" fmla="*/ 2767 w 2779623"/>
-              <a:gd name="connsiteY5" fmla="*/ 760342 h 2029023"/>
-              <a:gd name="connsiteX6" fmla="*/ 1121883 w 2779623"/>
-              <a:gd name="connsiteY6" fmla="*/ 487386 h 2029023"/>
-              <a:gd name="connsiteX0" fmla="*/ 932037 w 2589777"/>
-              <a:gd name="connsiteY0" fmla="*/ 487518 h 2029155"/>
-              <a:gd name="connsiteX1" fmla="*/ 1614425 w 2589777"/>
-              <a:gd name="connsiteY1" fmla="*/ 9846 h 2029155"/>
-              <a:gd name="connsiteX2" fmla="*/ 2569768 w 2589777"/>
-              <a:gd name="connsiteY2" fmla="*/ 965191 h 2029155"/>
-              <a:gd name="connsiteX3" fmla="*/ 2133040 w 2589777"/>
-              <a:gd name="connsiteY3" fmla="*/ 1988772 h 2029155"/>
-              <a:gd name="connsiteX4" fmla="*/ 645435 w 2589777"/>
-              <a:gd name="connsiteY4" fmla="*/ 1715816 h 2029155"/>
-              <a:gd name="connsiteX5" fmla="*/ 3989 w 2589777"/>
-              <a:gd name="connsiteY5" fmla="*/ 801418 h 2029155"/>
-              <a:gd name="connsiteX6" fmla="*/ 932037 w 2589777"/>
-              <a:gd name="connsiteY6" fmla="*/ 487518 h 2029155"/>
-            </a:gdLst>
-            <a:ahLst/>
-            <a:cxnLst>
-              <a:cxn ang="0">
-                <a:pos x="connsiteX0" y="connsiteY0"/>
-              </a:cxn>
-              <a:cxn ang="0">
-                <a:pos x="connsiteX1" y="connsiteY1"/>
-              </a:cxn>
-              <a:cxn ang="0">
-                <a:pos x="connsiteX2" y="connsiteY2"/>
-              </a:cxn>
-              <a:cxn ang="0">
-                <a:pos x="connsiteX3" y="connsiteY3"/>
-              </a:cxn>
-              <a:cxn ang="0">
-                <a:pos x="connsiteX4" y="connsiteY4"/>
-              </a:cxn>
-              <a:cxn ang="0">
-                <a:pos x="connsiteX5" y="connsiteY5"/>
-              </a:cxn>
-              <a:cxn ang="0">
-                <a:pos x="connsiteX6" y="connsiteY6"/>
-              </a:cxn>
-            </a:cxnLst>
-            <a:rect l="l" t="t" r="r" b="b"/>
-            <a:pathLst>
-              <a:path w="2589777" h="2029155">
-                <a:moveTo>
-                  <a:pt x="932037" y="487518"/>
-                </a:moveTo>
-                <a:cubicBezTo>
-                  <a:pt x="1200443" y="355589"/>
-                  <a:pt x="1341470" y="-69766"/>
-                  <a:pt x="1614425" y="9846"/>
-                </a:cubicBezTo>
-                <a:cubicBezTo>
-                  <a:pt x="1887380" y="89458"/>
-                  <a:pt x="2483332" y="635370"/>
-                  <a:pt x="2569768" y="965191"/>
-                </a:cubicBezTo>
-                <a:cubicBezTo>
-                  <a:pt x="2656204" y="1295012"/>
-                  <a:pt x="2453762" y="1863668"/>
-                  <a:pt x="2133040" y="1988772"/>
-                </a:cubicBezTo>
-                <a:cubicBezTo>
-                  <a:pt x="1812318" y="2113876"/>
-                  <a:pt x="943411" y="1927356"/>
-                  <a:pt x="645435" y="1715816"/>
-                </a:cubicBezTo>
-                <a:cubicBezTo>
-                  <a:pt x="347459" y="1504276"/>
-                  <a:pt x="-43778" y="1006134"/>
-                  <a:pt x="3989" y="801418"/>
-                </a:cubicBezTo>
-                <a:cubicBezTo>
-                  <a:pt x="51756" y="596702"/>
-                  <a:pt x="663631" y="619447"/>
-                  <a:pt x="932037" y="487518"/>
-                </a:cubicBezTo>
-                <a:close/>
-              </a:path>
-            </a:pathLst>
-          </a:custGeom>
-          <a:solidFill>
-            <a:srgbClr val="2249CD">
-              <a:alpha val="36000"/>
-            </a:srgbClr>
-          </a:solidFill>
-        </p:spPr>
-        <p:style>
-          <a:lnRef idx="1">
-            <a:schemeClr val="accent1"/>
-          </a:lnRef>
-          <a:fillRef idx="3">
-            <a:schemeClr val="accent1"/>
-          </a:fillRef>
-          <a:effectRef idx="2">
-            <a:schemeClr val="accent1"/>
-          </a:effectRef>
-          <a:fontRef idx="minor">
-            <a:schemeClr val="lt1"/>
-          </a:fontRef>
-        </p:style>
-        <p:txBody>
-          <a:bodyPr rtlCol="0" anchor="ctr"/>
-          <a:lstStyle/>
-          <a:p>
-            <a:pPr algn="ctr"/>
-            <a:endParaRPr lang="en-US" dirty="0">
-              <a:latin typeface="Gill Sans MT" panose="020B0502020104020203" pitchFamily="34" charset="77"/>
-            </a:endParaRPr>
-          </a:p>
-        </p:txBody>
-      </p:sp>
-      <p:sp>
-        <p:nvSpPr>
-          <p:cNvPr id="8" name="TextBox 7"/>
-          <p:cNvSpPr txBox="1"/>
-          <p:nvPr/>
-        </p:nvSpPr>
-        <p:spPr>
-          <a:xfrm>
-            <a:off x="4427668" y="5991371"/>
-            <a:ext cx="3267241" cy="369332"/>
-          </a:xfrm>
-          <a:prstGeom prst="rect">
-            <a:avLst/>
-          </a:prstGeom>
-          <a:noFill/>
-        </p:spPr>
-        <p:txBody>
-          <a:bodyPr wrap="none" rtlCol="0">
-            <a:spAutoFit/>
-          </a:bodyPr>
-          <a:lstStyle/>
-          <a:p>
-            <a:r>
-              <a:rPr lang="en-US" dirty="0" err="1">
-                <a:latin typeface="Gill Sans MT" panose="020B0502020104020203" pitchFamily="34" charset="77"/>
-                <a:ea typeface="Trebuchet MS" charset="0"/>
-                <a:cs typeface="Trebuchet MS" charset="0"/>
-              </a:rPr>
-              <a:t>Detección</a:t>
-            </a:r>
-            <a:r>
-              <a:rPr lang="en-US" dirty="0">
-                <a:latin typeface="Gill Sans MT" panose="020B0502020104020203" pitchFamily="34" charset="77"/>
-                <a:ea typeface="Trebuchet MS" charset="0"/>
-                <a:cs typeface="Trebuchet MS" charset="0"/>
-              </a:rPr>
-              <a:t> </a:t>
-            </a:r>
-            <a:r>
-              <a:rPr lang="en-US" dirty="0" err="1">
-                <a:latin typeface="Gill Sans MT" panose="020B0502020104020203" pitchFamily="34" charset="77"/>
-                <a:ea typeface="Trebuchet MS" charset="0"/>
-                <a:cs typeface="Trebuchet MS" charset="0"/>
-              </a:rPr>
-              <a:t>usando</a:t>
-            </a:r>
-            <a:r>
-              <a:rPr lang="en-US" dirty="0">
-                <a:latin typeface="Gill Sans MT" panose="020B0502020104020203" pitchFamily="34" charset="77"/>
-                <a:ea typeface="Trebuchet MS" charset="0"/>
-                <a:cs typeface="Trebuchet MS" charset="0"/>
-              </a:rPr>
-              <a:t> un </a:t>
-            </a:r>
-            <a:r>
-              <a:rPr lang="en-US" dirty="0" err="1">
-                <a:latin typeface="Gill Sans MT" panose="020B0502020104020203" pitchFamily="34" charset="77"/>
-                <a:ea typeface="Trebuchet MS" charset="0"/>
-                <a:cs typeface="Trebuchet MS" charset="0"/>
-              </a:rPr>
-              <a:t>clasificador</a:t>
-            </a:r>
-            <a:endParaRPr lang="en-US" dirty="0">
-              <a:latin typeface="Gill Sans MT" panose="020B0502020104020203" pitchFamily="34" charset="77"/>
-              <a:ea typeface="Trebuchet MS" charset="0"/>
-              <a:cs typeface="Trebuchet MS" charset="0"/>
-            </a:endParaRPr>
-          </a:p>
-        </p:txBody>
-      </p:sp>
-      <p:sp>
-        <p:nvSpPr>
-          <p:cNvPr id="9" name="TextBox 8"/>
-          <p:cNvSpPr txBox="1"/>
-          <p:nvPr/>
-        </p:nvSpPr>
-        <p:spPr>
-          <a:xfrm>
-            <a:off x="8468139" y="2796883"/>
-            <a:ext cx="1539204" cy="369332"/>
-          </a:xfrm>
-          <a:prstGeom prst="rect">
-            <a:avLst/>
-          </a:prstGeom>
-          <a:noFill/>
-        </p:spPr>
-        <p:txBody>
-          <a:bodyPr wrap="none" rtlCol="0">
-            <a:spAutoFit/>
-          </a:bodyPr>
-          <a:lstStyle/>
-          <a:p>
-            <a:r>
-              <a:rPr lang="en-US">
-                <a:latin typeface="Gill Sans MT" panose="020B0502020104020203" pitchFamily="34" charset="77"/>
-                <a:ea typeface="Trebuchet MS" charset="0"/>
-                <a:cs typeface="Trebuchet MS" charset="0"/>
-              </a:rPr>
-              <a:t>Detección (D)</a:t>
-            </a:r>
-            <a:endParaRPr lang="en-US" dirty="0">
-              <a:latin typeface="Gill Sans MT" panose="020B0502020104020203" pitchFamily="34" charset="77"/>
-              <a:ea typeface="Trebuchet MS" charset="0"/>
-              <a:cs typeface="Trebuchet MS" charset="0"/>
-            </a:endParaRPr>
-          </a:p>
-        </p:txBody>
-      </p:sp>
-      <p:cxnSp>
-        <p:nvCxnSpPr>
-          <p:cNvPr id="10" name="Straight Connector 9"/>
-          <p:cNvCxnSpPr/>
-          <p:nvPr/>
-        </p:nvCxnSpPr>
-        <p:spPr>
-          <a:xfrm flipH="1">
-            <a:off x="6544302" y="3166216"/>
-            <a:ext cx="1935698" cy="122417"/>
-          </a:xfrm>
-          <a:prstGeom prst="line">
-            <a:avLst/>
-          </a:prstGeom>
-          <a:ln w="12700">
-            <a:solidFill>
-              <a:schemeClr val="tx1"/>
-            </a:solidFill>
-            <a:prstDash val="solid"/>
-          </a:ln>
-        </p:spPr>
-        <p:style>
-          <a:lnRef idx="2">
-            <a:schemeClr val="accent1"/>
-          </a:lnRef>
-          <a:fillRef idx="0">
-            <a:schemeClr val="accent1"/>
-          </a:fillRef>
-          <a:effectRef idx="1">
-            <a:schemeClr val="accent1"/>
-          </a:effectRef>
-          <a:fontRef idx="minor">
-            <a:schemeClr val="tx1"/>
-          </a:fontRef>
-        </p:style>
-      </p:cxnSp>
-      <p:sp>
-        <p:nvSpPr>
-          <p:cNvPr id="11" name="TextBox 10"/>
-          <p:cNvSpPr txBox="1"/>
-          <p:nvPr/>
-        </p:nvSpPr>
-        <p:spPr>
-          <a:xfrm>
-            <a:off x="1898897" y="3879724"/>
-            <a:ext cx="1461297" cy="369332"/>
-          </a:xfrm>
-          <a:prstGeom prst="rect">
-            <a:avLst/>
-          </a:prstGeom>
-          <a:noFill/>
-        </p:spPr>
-        <p:txBody>
-          <a:bodyPr wrap="none" rtlCol="0">
-            <a:spAutoFit/>
-          </a:bodyPr>
-          <a:lstStyle/>
-          <a:p>
-            <a:r>
-              <a:rPr lang="en-US" dirty="0">
-                <a:latin typeface="Gill Sans MT" panose="020B0502020104020203" pitchFamily="34" charset="77"/>
-                <a:ea typeface="Trebuchet MS" charset="0"/>
-                <a:cs typeface="Trebuchet MS" charset="0"/>
-              </a:rPr>
-              <a:t>Ground Truth</a:t>
-            </a:r>
-          </a:p>
-        </p:txBody>
-      </p:sp>
-      <p:cxnSp>
-        <p:nvCxnSpPr>
-          <p:cNvPr id="12" name="Straight Connector 11"/>
-          <p:cNvCxnSpPr/>
-          <p:nvPr/>
-        </p:nvCxnSpPr>
-        <p:spPr>
-          <a:xfrm flipH="1">
-            <a:off x="2894723" y="4249057"/>
-            <a:ext cx="1935698" cy="122417"/>
-          </a:xfrm>
-          <a:prstGeom prst="line">
-            <a:avLst/>
-          </a:prstGeom>
-          <a:ln w="12700">
-            <a:solidFill>
-              <a:schemeClr val="tx1"/>
-            </a:solidFill>
-            <a:prstDash val="solid"/>
-          </a:ln>
-        </p:spPr>
-        <p:style>
-          <a:lnRef idx="2">
-            <a:schemeClr val="accent1"/>
-          </a:lnRef>
-          <a:fillRef idx="0">
-            <a:schemeClr val="accent1"/>
-          </a:fillRef>
-          <a:effectRef idx="1">
-            <a:schemeClr val="accent1"/>
-          </a:effectRef>
-          <a:fontRef idx="minor">
-            <a:schemeClr val="tx1"/>
-          </a:fontRef>
-        </p:style>
-      </p:cxnSp>
-      <p:sp>
-        <p:nvSpPr>
-          <p:cNvPr id="2" name="Slide Number Placeholder 1">
-            <a:extLst>
-              <a:ext uri="{FF2B5EF4-FFF2-40B4-BE49-F238E27FC236}">
-                <a16:creationId xmlns:a16="http://schemas.microsoft.com/office/drawing/2014/main" id="{629EC51D-8E69-7248-B6D2-713DC2C7BD60}"/>
-              </a:ext>
-            </a:extLst>
-          </p:cNvPr>
-          <p:cNvSpPr>
-            <a:spLocks noGrp="1"/>
-          </p:cNvSpPr>
-          <p:nvPr>
-            <p:ph type="sldNum" sz="quarter" idx="12"/>
-          </p:nvPr>
-        </p:nvSpPr>
-        <p:spPr/>
-        <p:txBody>
-          <a:bodyPr/>
-          <a:lstStyle/>
-          <a:p>
-            <a:fld id="{9C0B2870-7350-8D40-A01A-CE539DF873CB}" type="slidenum">
-              <a:rPr lang="en-US" smtClean="0"/>
-              <a:t>8</a:t>
-            </a:fld>
-            <a:endParaRPr lang="en-US"/>
-          </a:p>
-        </p:txBody>
-      </p:sp>
-      <p:sp>
-        <p:nvSpPr>
-          <p:cNvPr id="3" name="TextBox 2">
-            <a:extLst>
-              <a:ext uri="{FF2B5EF4-FFF2-40B4-BE49-F238E27FC236}">
-                <a16:creationId xmlns:a16="http://schemas.microsoft.com/office/drawing/2014/main" id="{A9AE4155-9271-8466-9555-4D70A3EBB7AD}"/>
-              </a:ext>
-            </a:extLst>
-          </p:cNvPr>
-          <p:cNvSpPr txBox="1"/>
-          <p:nvPr/>
-        </p:nvSpPr>
-        <p:spPr>
-          <a:xfrm>
-            <a:off x="1687773" y="696035"/>
-            <a:ext cx="1348446" cy="523220"/>
-          </a:xfrm>
-          <a:prstGeom prst="rect">
-            <a:avLst/>
-          </a:prstGeom>
-          <a:noFill/>
-        </p:spPr>
-        <p:txBody>
-          <a:bodyPr wrap="none" rtlCol="0">
-            <a:spAutoFit/>
-          </a:bodyPr>
-          <a:lstStyle/>
-          <a:p>
-            <a:r>
-              <a:rPr lang="en-US" sz="2800" dirty="0" err="1">
-                <a:solidFill>
-                  <a:schemeClr val="accent2"/>
-                </a:solidFill>
-                <a:latin typeface="Gill Sans MT" panose="020B0502020104020203" pitchFamily="34" charset="77"/>
-                <a:ea typeface="Trebuchet MS" charset="0"/>
-                <a:cs typeface="Trebuchet MS" charset="0"/>
-              </a:rPr>
-              <a:t>Ejemplo</a:t>
-            </a:r>
-            <a:endParaRPr lang="en-US" sz="2800" dirty="0">
-              <a:solidFill>
-                <a:schemeClr val="accent2"/>
-              </a:solidFill>
-              <a:latin typeface="Gill Sans MT" panose="020B0502020104020203" pitchFamily="34" charset="77"/>
-              <a:ea typeface="Trebuchet MS" charset="0"/>
-              <a:cs typeface="Trebuchet MS" charset="0"/>
-            </a:endParaRPr>
-          </a:p>
-        </p:txBody>
-      </p:sp>
-    </p:spTree>
-    <p:extLst>
-      <p:ext uri="{BB962C8B-B14F-4D97-AF65-F5344CB8AC3E}">
-        <p14:creationId xmlns:p14="http://schemas.microsoft.com/office/powerpoint/2010/main" val="45036021"/>
-      </p:ext>
-    </p:extLst>
-  </p:cSld>
-  <p:clrMapOvr>
-    <a:masterClrMapping/>
-  </p:clrMapOvr>
-</p:sld>
-</file>
-
-<file path=ppt/slides/slide9.xml><?xml version="1.0" encoding="utf-8"?>
-<p:sld xmlns:a="http://schemas.openxmlformats.org/drawingml/2006/main" xmlns:r="http://schemas.openxmlformats.org/officeDocument/2006/relationships" xmlns:p="http://schemas.openxmlformats.org/presentationml/2006/main">
-  <p:cSld>
-    <p:spTree>
-      <p:nvGrpSpPr>
-        <p:cNvPr id="1" name=""/>
-        <p:cNvGrpSpPr/>
-        <p:nvPr/>
-      </p:nvGrpSpPr>
-      <p:grpSpPr>
-        <a:xfrm>
-          <a:off x="0" y="0"/>
-          <a:ext cx="0" cy="0"/>
-          <a:chOff x="0" y="0"/>
-          <a:chExt cx="0" cy="0"/>
-        </a:xfrm>
-      </p:grpSpPr>
-      <p:sp>
-        <p:nvSpPr>
-          <p:cNvPr id="7" name="Rectangle 6"/>
-          <p:cNvSpPr/>
-          <p:nvPr/>
-        </p:nvSpPr>
-        <p:spPr>
-          <a:xfrm>
-            <a:off x="3912362" y="2169997"/>
-            <a:ext cx="4285397" cy="3766782"/>
-          </a:xfrm>
-          <a:prstGeom prst="rect">
-            <a:avLst/>
-          </a:prstGeom>
-          <a:solidFill>
-            <a:schemeClr val="bg1"/>
-          </a:solidFill>
-        </p:spPr>
-        <p:style>
-          <a:lnRef idx="1">
-            <a:schemeClr val="accent1"/>
-          </a:lnRef>
-          <a:fillRef idx="3">
-            <a:schemeClr val="accent1"/>
-          </a:fillRef>
-          <a:effectRef idx="2">
-            <a:schemeClr val="accent1"/>
-          </a:effectRef>
-          <a:fontRef idx="minor">
-            <a:schemeClr val="lt1"/>
-          </a:fontRef>
-        </p:style>
-        <p:txBody>
-          <a:bodyPr rtlCol="0" anchor="ctr"/>
-          <a:lstStyle/>
-          <a:p>
-            <a:pPr algn="ctr"/>
-            <a:endParaRPr lang="en-US" dirty="0">
-              <a:latin typeface="Gill Sans MT" panose="020B0502020104020203" pitchFamily="34" charset="77"/>
-            </a:endParaRPr>
-          </a:p>
-        </p:txBody>
-      </p:sp>
-      <p:sp>
-        <p:nvSpPr>
-          <p:cNvPr id="5" name="Freeform 4"/>
-          <p:cNvSpPr/>
-          <p:nvPr/>
-        </p:nvSpPr>
-        <p:spPr>
-          <a:xfrm>
-            <a:off x="4529157" y="3166216"/>
-            <a:ext cx="2729534" cy="1919913"/>
-          </a:xfrm>
-          <a:custGeom>
-            <a:avLst/>
-            <a:gdLst>
-              <a:gd name="connsiteX0" fmla="*/ 1034582 w 2729534"/>
-              <a:gd name="connsiteY0" fmla="*/ 341268 h 1919913"/>
-              <a:gd name="connsiteX1" fmla="*/ 1512254 w 2729534"/>
-              <a:gd name="connsiteY1" fmla="*/ 13722 h 1919913"/>
-              <a:gd name="connsiteX2" fmla="*/ 2726905 w 2729534"/>
-              <a:gd name="connsiteY2" fmla="*/ 832588 h 1919913"/>
-              <a:gd name="connsiteX3" fmla="*/ 1798857 w 2729534"/>
-              <a:gd name="connsiteY3" fmla="*/ 1897113 h 1919913"/>
-              <a:gd name="connsiteX4" fmla="*/ 556911 w 2729534"/>
-              <a:gd name="connsiteY4" fmla="*/ 1487680 h 1919913"/>
-              <a:gd name="connsiteX5" fmla="*/ 11000 w 2729534"/>
-              <a:gd name="connsiteY5" fmla="*/ 627871 h 1919913"/>
-              <a:gd name="connsiteX6" fmla="*/ 1034582 w 2729534"/>
-              <a:gd name="connsiteY6" fmla="*/ 341268 h 1919913"/>
-            </a:gdLst>
-            <a:ahLst/>
-            <a:cxnLst>
-              <a:cxn ang="0">
-                <a:pos x="connsiteX0" y="connsiteY0"/>
-              </a:cxn>
-              <a:cxn ang="0">
-                <a:pos x="connsiteX1" y="connsiteY1"/>
-              </a:cxn>
-              <a:cxn ang="0">
-                <a:pos x="connsiteX2" y="connsiteY2"/>
-              </a:cxn>
-              <a:cxn ang="0">
-                <a:pos x="connsiteX3" y="connsiteY3"/>
-              </a:cxn>
-              <a:cxn ang="0">
-                <a:pos x="connsiteX4" y="connsiteY4"/>
-              </a:cxn>
-              <a:cxn ang="0">
-                <a:pos x="connsiteX5" y="connsiteY5"/>
-              </a:cxn>
-              <a:cxn ang="0">
-                <a:pos x="connsiteX6" y="connsiteY6"/>
-              </a:cxn>
-            </a:cxnLst>
-            <a:rect l="l" t="t" r="r" b="b"/>
-            <a:pathLst>
-              <a:path w="2729534" h="1919913">
-                <a:moveTo>
-                  <a:pt x="1034582" y="341268"/>
-                </a:moveTo>
-                <a:cubicBezTo>
-                  <a:pt x="1284791" y="238910"/>
-                  <a:pt x="1230200" y="-68165"/>
-                  <a:pt x="1512254" y="13722"/>
-                </a:cubicBezTo>
-                <a:cubicBezTo>
-                  <a:pt x="1794308" y="95609"/>
-                  <a:pt x="2679138" y="518690"/>
-                  <a:pt x="2726905" y="832588"/>
-                </a:cubicBezTo>
-                <a:cubicBezTo>
-                  <a:pt x="2774672" y="1146486"/>
-                  <a:pt x="2160523" y="1787931"/>
-                  <a:pt x="1798857" y="1897113"/>
-                </a:cubicBezTo>
-                <a:cubicBezTo>
-                  <a:pt x="1437191" y="2006295"/>
-                  <a:pt x="854887" y="1699220"/>
-                  <a:pt x="556911" y="1487680"/>
-                </a:cubicBezTo>
-                <a:cubicBezTo>
-                  <a:pt x="258935" y="1276140"/>
-                  <a:pt x="-64063" y="816665"/>
-                  <a:pt x="11000" y="627871"/>
-                </a:cubicBezTo>
-                <a:cubicBezTo>
-                  <a:pt x="86063" y="439077"/>
-                  <a:pt x="784373" y="443626"/>
-                  <a:pt x="1034582" y="341268"/>
-                </a:cubicBezTo>
-                <a:close/>
-              </a:path>
-            </a:pathLst>
-          </a:custGeom>
-          <a:noFill/>
-          <a:ln>
-            <a:prstDash val="dash"/>
-          </a:ln>
-        </p:spPr>
-        <p:style>
-          <a:lnRef idx="1">
-            <a:schemeClr val="accent1"/>
-          </a:lnRef>
-          <a:fillRef idx="3">
-            <a:schemeClr val="accent1"/>
-          </a:fillRef>
-          <a:effectRef idx="2">
-            <a:schemeClr val="accent1"/>
-          </a:effectRef>
-          <a:fontRef idx="minor">
-            <a:schemeClr val="lt1"/>
-          </a:fontRef>
-        </p:style>
-        <p:txBody>
-          <a:bodyPr rtlCol="0" anchor="ctr"/>
-          <a:lstStyle/>
-          <a:p>
-            <a:pPr algn="ctr"/>
-            <a:endParaRPr lang="en-US" dirty="0">
-              <a:latin typeface="Gill Sans MT" panose="020B0502020104020203" pitchFamily="34" charset="77"/>
-            </a:endParaRPr>
-          </a:p>
-        </p:txBody>
-      </p:sp>
-      <p:sp>
-        <p:nvSpPr>
-          <p:cNvPr id="6" name="Freeform 5"/>
-          <p:cNvSpPr/>
-          <p:nvPr/>
-        </p:nvSpPr>
-        <p:spPr>
-          <a:xfrm>
-            <a:off x="4811400" y="3074556"/>
-            <a:ext cx="2589777" cy="2029155"/>
-          </a:xfrm>
-          <a:custGeom>
-            <a:avLst/>
-            <a:gdLst>
-              <a:gd name="connsiteX0" fmla="*/ 1034582 w 2729534"/>
-              <a:gd name="connsiteY0" fmla="*/ 341268 h 1919913"/>
-              <a:gd name="connsiteX1" fmla="*/ 1512254 w 2729534"/>
-              <a:gd name="connsiteY1" fmla="*/ 13722 h 1919913"/>
-              <a:gd name="connsiteX2" fmla="*/ 2726905 w 2729534"/>
-              <a:gd name="connsiteY2" fmla="*/ 832588 h 1919913"/>
-              <a:gd name="connsiteX3" fmla="*/ 1798857 w 2729534"/>
-              <a:gd name="connsiteY3" fmla="*/ 1897113 h 1919913"/>
-              <a:gd name="connsiteX4" fmla="*/ 556911 w 2729534"/>
-              <a:gd name="connsiteY4" fmla="*/ 1487680 h 1919913"/>
-              <a:gd name="connsiteX5" fmla="*/ 11000 w 2729534"/>
-              <a:gd name="connsiteY5" fmla="*/ 627871 h 1919913"/>
-              <a:gd name="connsiteX6" fmla="*/ 1034582 w 2729534"/>
-              <a:gd name="connsiteY6" fmla="*/ 341268 h 1919913"/>
-              <a:gd name="connsiteX0" fmla="*/ 1034582 w 2242520"/>
-              <a:gd name="connsiteY0" fmla="*/ 343152 h 1919663"/>
-              <a:gd name="connsiteX1" fmla="*/ 1512254 w 2242520"/>
-              <a:gd name="connsiteY1" fmla="*/ 15606 h 1919663"/>
-              <a:gd name="connsiteX2" fmla="*/ 2235585 w 2242520"/>
-              <a:gd name="connsiteY2" fmla="*/ 875416 h 1919663"/>
-              <a:gd name="connsiteX3" fmla="*/ 1798857 w 2242520"/>
-              <a:gd name="connsiteY3" fmla="*/ 1898997 h 1919663"/>
-              <a:gd name="connsiteX4" fmla="*/ 556911 w 2242520"/>
-              <a:gd name="connsiteY4" fmla="*/ 1489564 h 1919663"/>
-              <a:gd name="connsiteX5" fmla="*/ 11000 w 2242520"/>
-              <a:gd name="connsiteY5" fmla="*/ 629755 h 1919663"/>
-              <a:gd name="connsiteX6" fmla="*/ 1034582 w 2242520"/>
-              <a:gd name="connsiteY6" fmla="*/ 343152 h 1919663"/>
-              <a:gd name="connsiteX0" fmla="*/ 1034582 w 2253299"/>
-              <a:gd name="connsiteY0" fmla="*/ 435985 h 2012496"/>
-              <a:gd name="connsiteX1" fmla="*/ 1280242 w 2253299"/>
-              <a:gd name="connsiteY1" fmla="*/ 12904 h 2012496"/>
-              <a:gd name="connsiteX2" fmla="*/ 2235585 w 2253299"/>
-              <a:gd name="connsiteY2" fmla="*/ 968249 h 2012496"/>
-              <a:gd name="connsiteX3" fmla="*/ 1798857 w 2253299"/>
-              <a:gd name="connsiteY3" fmla="*/ 1991830 h 2012496"/>
-              <a:gd name="connsiteX4" fmla="*/ 556911 w 2253299"/>
-              <a:gd name="connsiteY4" fmla="*/ 1582397 h 2012496"/>
-              <a:gd name="connsiteX5" fmla="*/ 11000 w 2253299"/>
-              <a:gd name="connsiteY5" fmla="*/ 722588 h 2012496"/>
-              <a:gd name="connsiteX6" fmla="*/ 1034582 w 2253299"/>
-              <a:gd name="connsiteY6" fmla="*/ 435985 h 2012496"/>
-              <a:gd name="connsiteX0" fmla="*/ 586989 w 2242434"/>
-              <a:gd name="connsiteY0" fmla="*/ 487258 h 2009178"/>
-              <a:gd name="connsiteX1" fmla="*/ 1269377 w 2242434"/>
-              <a:gd name="connsiteY1" fmla="*/ 9586 h 2009178"/>
-              <a:gd name="connsiteX2" fmla="*/ 2224720 w 2242434"/>
-              <a:gd name="connsiteY2" fmla="*/ 964931 h 2009178"/>
-              <a:gd name="connsiteX3" fmla="*/ 1787992 w 2242434"/>
-              <a:gd name="connsiteY3" fmla="*/ 1988512 h 2009178"/>
-              <a:gd name="connsiteX4" fmla="*/ 546046 w 2242434"/>
-              <a:gd name="connsiteY4" fmla="*/ 1579079 h 2009178"/>
-              <a:gd name="connsiteX5" fmla="*/ 135 w 2242434"/>
-              <a:gd name="connsiteY5" fmla="*/ 719270 h 2009178"/>
-              <a:gd name="connsiteX6" fmla="*/ 586989 w 2242434"/>
-              <a:gd name="connsiteY6" fmla="*/ 487258 h 2009178"/>
-              <a:gd name="connsiteX0" fmla="*/ 602616 w 2260356"/>
-              <a:gd name="connsiteY0" fmla="*/ 487258 h 2028895"/>
-              <a:gd name="connsiteX1" fmla="*/ 1285004 w 2260356"/>
-              <a:gd name="connsiteY1" fmla="*/ 9586 h 2028895"/>
-              <a:gd name="connsiteX2" fmla="*/ 2240347 w 2260356"/>
-              <a:gd name="connsiteY2" fmla="*/ 964931 h 2028895"/>
-              <a:gd name="connsiteX3" fmla="*/ 1803619 w 2260356"/>
-              <a:gd name="connsiteY3" fmla="*/ 1988512 h 2028895"/>
-              <a:gd name="connsiteX4" fmla="*/ 316014 w 2260356"/>
-              <a:gd name="connsiteY4" fmla="*/ 1715556 h 2028895"/>
-              <a:gd name="connsiteX5" fmla="*/ 15762 w 2260356"/>
-              <a:gd name="connsiteY5" fmla="*/ 719270 h 2028895"/>
-              <a:gd name="connsiteX6" fmla="*/ 602616 w 2260356"/>
-              <a:gd name="connsiteY6" fmla="*/ 487258 h 2028895"/>
-              <a:gd name="connsiteX0" fmla="*/ 1121883 w 2779623"/>
-              <a:gd name="connsiteY0" fmla="*/ 487386 h 2029023"/>
-              <a:gd name="connsiteX1" fmla="*/ 1804271 w 2779623"/>
-              <a:gd name="connsiteY1" fmla="*/ 9714 h 2029023"/>
-              <a:gd name="connsiteX2" fmla="*/ 2759614 w 2779623"/>
-              <a:gd name="connsiteY2" fmla="*/ 965059 h 2029023"/>
-              <a:gd name="connsiteX3" fmla="*/ 2322886 w 2779623"/>
-              <a:gd name="connsiteY3" fmla="*/ 1988640 h 2029023"/>
-              <a:gd name="connsiteX4" fmla="*/ 835281 w 2779623"/>
-              <a:gd name="connsiteY4" fmla="*/ 1715684 h 2029023"/>
-              <a:gd name="connsiteX5" fmla="*/ 2767 w 2779623"/>
-              <a:gd name="connsiteY5" fmla="*/ 760342 h 2029023"/>
-              <a:gd name="connsiteX6" fmla="*/ 1121883 w 2779623"/>
-              <a:gd name="connsiteY6" fmla="*/ 487386 h 2029023"/>
-              <a:gd name="connsiteX0" fmla="*/ 932037 w 2589777"/>
-              <a:gd name="connsiteY0" fmla="*/ 487518 h 2029155"/>
-              <a:gd name="connsiteX1" fmla="*/ 1614425 w 2589777"/>
-              <a:gd name="connsiteY1" fmla="*/ 9846 h 2029155"/>
-              <a:gd name="connsiteX2" fmla="*/ 2569768 w 2589777"/>
-              <a:gd name="connsiteY2" fmla="*/ 965191 h 2029155"/>
-              <a:gd name="connsiteX3" fmla="*/ 2133040 w 2589777"/>
-              <a:gd name="connsiteY3" fmla="*/ 1988772 h 2029155"/>
-              <a:gd name="connsiteX4" fmla="*/ 645435 w 2589777"/>
-              <a:gd name="connsiteY4" fmla="*/ 1715816 h 2029155"/>
-              <a:gd name="connsiteX5" fmla="*/ 3989 w 2589777"/>
-              <a:gd name="connsiteY5" fmla="*/ 801418 h 2029155"/>
-              <a:gd name="connsiteX6" fmla="*/ 932037 w 2589777"/>
-              <a:gd name="connsiteY6" fmla="*/ 487518 h 2029155"/>
-            </a:gdLst>
-            <a:ahLst/>
-            <a:cxnLst>
-              <a:cxn ang="0">
-                <a:pos x="connsiteX0" y="connsiteY0"/>
-              </a:cxn>
-              <a:cxn ang="0">
-                <a:pos x="connsiteX1" y="connsiteY1"/>
-              </a:cxn>
-              <a:cxn ang="0">
-                <a:pos x="connsiteX2" y="connsiteY2"/>
-              </a:cxn>
-              <a:cxn ang="0">
-                <a:pos x="connsiteX3" y="connsiteY3"/>
-              </a:cxn>
-              <a:cxn ang="0">
-                <a:pos x="connsiteX4" y="connsiteY4"/>
-              </a:cxn>
-              <a:cxn ang="0">
-                <a:pos x="connsiteX5" y="connsiteY5"/>
-              </a:cxn>
-              <a:cxn ang="0">
-                <a:pos x="connsiteX6" y="connsiteY6"/>
-              </a:cxn>
-            </a:cxnLst>
-            <a:rect l="l" t="t" r="r" b="b"/>
-            <a:pathLst>
-              <a:path w="2589777" h="2029155">
-                <a:moveTo>
-                  <a:pt x="932037" y="487518"/>
-                </a:moveTo>
-                <a:cubicBezTo>
-                  <a:pt x="1200443" y="355589"/>
-                  <a:pt x="1341470" y="-69766"/>
-                  <a:pt x="1614425" y="9846"/>
-                </a:cubicBezTo>
-                <a:cubicBezTo>
-                  <a:pt x="1887380" y="89458"/>
-                  <a:pt x="2483332" y="635370"/>
-                  <a:pt x="2569768" y="965191"/>
-                </a:cubicBezTo>
-                <a:cubicBezTo>
-                  <a:pt x="2656204" y="1295012"/>
-                  <a:pt x="2453762" y="1863668"/>
-                  <a:pt x="2133040" y="1988772"/>
-                </a:cubicBezTo>
-                <a:cubicBezTo>
-                  <a:pt x="1812318" y="2113876"/>
-                  <a:pt x="943411" y="1927356"/>
-                  <a:pt x="645435" y="1715816"/>
-                </a:cubicBezTo>
-                <a:cubicBezTo>
-                  <a:pt x="347459" y="1504276"/>
-                  <a:pt x="-43778" y="1006134"/>
-                  <a:pt x="3989" y="801418"/>
-                </a:cubicBezTo>
-                <a:cubicBezTo>
-                  <a:pt x="51756" y="596702"/>
-                  <a:pt x="663631" y="619447"/>
-                  <a:pt x="932037" y="487518"/>
-                </a:cubicBezTo>
-                <a:close/>
-              </a:path>
-            </a:pathLst>
-          </a:custGeom>
-          <a:solidFill>
-            <a:srgbClr val="2249CD">
-              <a:alpha val="36000"/>
-            </a:srgbClr>
-          </a:solidFill>
-        </p:spPr>
-        <p:style>
-          <a:lnRef idx="1">
-            <a:schemeClr val="accent1"/>
-          </a:lnRef>
-          <a:fillRef idx="3">
-            <a:schemeClr val="accent1"/>
-          </a:fillRef>
-          <a:effectRef idx="2">
-            <a:schemeClr val="accent1"/>
-          </a:effectRef>
-          <a:fontRef idx="minor">
-            <a:schemeClr val="lt1"/>
-          </a:fontRef>
-        </p:style>
-        <p:txBody>
-          <a:bodyPr rtlCol="0" anchor="ctr"/>
-          <a:lstStyle/>
-          <a:p>
-            <a:pPr algn="ctr"/>
-            <a:endParaRPr lang="en-US" dirty="0">
-              <a:latin typeface="Gill Sans MT" panose="020B0502020104020203" pitchFamily="34" charset="77"/>
-            </a:endParaRPr>
-          </a:p>
-        </p:txBody>
-      </p:sp>
-      <p:sp>
-        <p:nvSpPr>
-          <p:cNvPr id="9" name="TextBox 8"/>
-          <p:cNvSpPr txBox="1"/>
-          <p:nvPr/>
-        </p:nvSpPr>
-        <p:spPr>
-          <a:xfrm>
-            <a:off x="8468139" y="2796883"/>
-            <a:ext cx="1539204" cy="369332"/>
-          </a:xfrm>
-          <a:prstGeom prst="rect">
-            <a:avLst/>
-          </a:prstGeom>
-          <a:noFill/>
-        </p:spPr>
-        <p:txBody>
-          <a:bodyPr wrap="none" rtlCol="0">
-            <a:spAutoFit/>
-          </a:bodyPr>
-          <a:lstStyle/>
-          <a:p>
-            <a:r>
-              <a:rPr lang="en-US">
-                <a:latin typeface="Gill Sans MT" panose="020B0502020104020203" pitchFamily="34" charset="77"/>
-                <a:ea typeface="Trebuchet MS" charset="0"/>
-                <a:cs typeface="Trebuchet MS" charset="0"/>
-              </a:rPr>
-              <a:t>Detección (D)</a:t>
-            </a:r>
-            <a:endParaRPr lang="en-US" dirty="0">
-              <a:latin typeface="Gill Sans MT" panose="020B0502020104020203" pitchFamily="34" charset="77"/>
-              <a:ea typeface="Trebuchet MS" charset="0"/>
-              <a:cs typeface="Trebuchet MS" charset="0"/>
-            </a:endParaRPr>
-          </a:p>
-        </p:txBody>
-      </p:sp>
-      <p:cxnSp>
-        <p:nvCxnSpPr>
-          <p:cNvPr id="3" name="Straight Connector 2"/>
-          <p:cNvCxnSpPr/>
-          <p:nvPr/>
-        </p:nvCxnSpPr>
-        <p:spPr>
-          <a:xfrm flipH="1">
-            <a:off x="6544302" y="3166216"/>
-            <a:ext cx="1935698" cy="122417"/>
-          </a:xfrm>
-          <a:prstGeom prst="line">
-            <a:avLst/>
-          </a:prstGeom>
-          <a:ln w="12700">
-            <a:solidFill>
-              <a:schemeClr val="tx1"/>
-            </a:solidFill>
-            <a:prstDash val="solid"/>
-          </a:ln>
-        </p:spPr>
-        <p:style>
-          <a:lnRef idx="2">
-            <a:schemeClr val="accent1"/>
-          </a:lnRef>
-          <a:fillRef idx="0">
-            <a:schemeClr val="accent1"/>
-          </a:fillRef>
-          <a:effectRef idx="1">
-            <a:schemeClr val="accent1"/>
-          </a:effectRef>
-          <a:fontRef idx="minor">
-            <a:schemeClr val="tx1"/>
-          </a:fontRef>
-        </p:style>
-      </p:cxnSp>
-      <p:sp>
-        <p:nvSpPr>
-          <p:cNvPr id="11" name="TextBox 10"/>
-          <p:cNvSpPr txBox="1"/>
-          <p:nvPr/>
-        </p:nvSpPr>
-        <p:spPr>
-          <a:xfrm>
-            <a:off x="1898897" y="3879724"/>
-            <a:ext cx="1461297" cy="369332"/>
-          </a:xfrm>
-          <a:prstGeom prst="rect">
-            <a:avLst/>
-          </a:prstGeom>
-          <a:noFill/>
-        </p:spPr>
-        <p:txBody>
-          <a:bodyPr wrap="none" rtlCol="0">
-            <a:spAutoFit/>
-          </a:bodyPr>
-          <a:lstStyle/>
-          <a:p>
-            <a:r>
-              <a:rPr lang="en-US" dirty="0">
-                <a:latin typeface="Gill Sans MT" panose="020B0502020104020203" pitchFamily="34" charset="77"/>
-                <a:ea typeface="Trebuchet MS" charset="0"/>
-                <a:cs typeface="Trebuchet MS" charset="0"/>
-              </a:rPr>
-              <a:t>Ground Truth</a:t>
-            </a:r>
-          </a:p>
-        </p:txBody>
-      </p:sp>
-      <p:cxnSp>
-        <p:nvCxnSpPr>
-          <p:cNvPr id="12" name="Straight Connector 11"/>
-          <p:cNvCxnSpPr/>
-          <p:nvPr/>
-        </p:nvCxnSpPr>
-        <p:spPr>
-          <a:xfrm flipH="1">
-            <a:off x="2894723" y="4249057"/>
-            <a:ext cx="1935698" cy="122417"/>
-          </a:xfrm>
-          <a:prstGeom prst="line">
-            <a:avLst/>
-          </a:prstGeom>
-          <a:ln w="12700">
-            <a:solidFill>
-              <a:schemeClr val="tx1"/>
-            </a:solidFill>
-            <a:prstDash val="solid"/>
-          </a:ln>
-        </p:spPr>
-        <p:style>
-          <a:lnRef idx="2">
-            <a:schemeClr val="accent1"/>
-          </a:lnRef>
-          <a:fillRef idx="0">
-            <a:schemeClr val="accent1"/>
-          </a:fillRef>
-          <a:effectRef idx="1">
-            <a:schemeClr val="accent1"/>
-          </a:effectRef>
-          <a:fontRef idx="minor">
-            <a:schemeClr val="tx1"/>
-          </a:fontRef>
-        </p:style>
-      </p:cxnSp>
-      <p:sp>
-        <p:nvSpPr>
-          <p:cNvPr id="2" name="Slide Number Placeholder 1">
-            <a:extLst>
-              <a:ext uri="{FF2B5EF4-FFF2-40B4-BE49-F238E27FC236}">
-                <a16:creationId xmlns:a16="http://schemas.microsoft.com/office/drawing/2014/main" id="{03057C8D-E7AC-7B4F-8595-3EA8B512CB40}"/>
-              </a:ext>
-            </a:extLst>
-          </p:cNvPr>
-          <p:cNvSpPr>
-            <a:spLocks noGrp="1"/>
-          </p:cNvSpPr>
-          <p:nvPr>
-            <p:ph type="sldNum" sz="quarter" idx="12"/>
-          </p:nvPr>
-        </p:nvSpPr>
-        <p:spPr/>
-        <p:txBody>
-          <a:bodyPr/>
-          <a:lstStyle/>
-          <a:p>
-            <a:fld id="{9C0B2870-7350-8D40-A01A-CE539DF873CB}" type="slidenum">
-              <a:rPr lang="en-US" smtClean="0"/>
-              <a:t>9</a:t>
-            </a:fld>
-            <a:endParaRPr lang="en-US"/>
-          </a:p>
-        </p:txBody>
-      </p:sp>
-      <p:sp>
-        <p:nvSpPr>
-          <p:cNvPr id="8" name="TextBox 7">
-            <a:extLst>
-              <a:ext uri="{FF2B5EF4-FFF2-40B4-BE49-F238E27FC236}">
-                <a16:creationId xmlns:a16="http://schemas.microsoft.com/office/drawing/2014/main" id="{4912C8E4-547B-5A1B-54B3-C82FE7A3A44F}"/>
-              </a:ext>
-            </a:extLst>
-          </p:cNvPr>
-          <p:cNvSpPr txBox="1"/>
-          <p:nvPr/>
-        </p:nvSpPr>
-        <p:spPr>
-          <a:xfrm>
-            <a:off x="1687773" y="696035"/>
-            <a:ext cx="1348446" cy="523220"/>
-          </a:xfrm>
-          <a:prstGeom prst="rect">
-            <a:avLst/>
-          </a:prstGeom>
-          <a:noFill/>
-        </p:spPr>
-        <p:txBody>
-          <a:bodyPr wrap="none" rtlCol="0">
-            <a:spAutoFit/>
-          </a:bodyPr>
-          <a:lstStyle/>
-          <a:p>
-            <a:r>
-              <a:rPr lang="en-US" sz="2800" dirty="0" err="1">
-                <a:solidFill>
-                  <a:schemeClr val="accent2"/>
-                </a:solidFill>
-                <a:latin typeface="Gill Sans MT" panose="020B0502020104020203" pitchFamily="34" charset="77"/>
-                <a:ea typeface="Trebuchet MS" charset="0"/>
-                <a:cs typeface="Trebuchet MS" charset="0"/>
-              </a:rPr>
-              <a:t>Ejemplo</a:t>
-            </a:r>
-            <a:endParaRPr lang="en-US" sz="2800" dirty="0">
-              <a:solidFill>
-                <a:schemeClr val="accent2"/>
-              </a:solidFill>
-              <a:latin typeface="Gill Sans MT" panose="020B0502020104020203" pitchFamily="34" charset="77"/>
-              <a:ea typeface="Trebuchet MS" charset="0"/>
-              <a:cs typeface="Trebuchet MS" charset="0"/>
-            </a:endParaRPr>
-          </a:p>
-        </p:txBody>
-      </p:sp>
-      <p:sp>
-        <p:nvSpPr>
-          <p:cNvPr id="14" name="TextBox 13">
-            <a:extLst>
-              <a:ext uri="{FF2B5EF4-FFF2-40B4-BE49-F238E27FC236}">
-                <a16:creationId xmlns:a16="http://schemas.microsoft.com/office/drawing/2014/main" id="{0220E890-9B5E-8234-DFDB-1096CA8C876E}"/>
-              </a:ext>
-            </a:extLst>
-          </p:cNvPr>
-          <p:cNvSpPr txBox="1"/>
-          <p:nvPr/>
-        </p:nvSpPr>
-        <p:spPr>
-          <a:xfrm>
-            <a:off x="4427668" y="5991371"/>
-            <a:ext cx="3267241" cy="369332"/>
-          </a:xfrm>
-          <a:prstGeom prst="rect">
-            <a:avLst/>
-          </a:prstGeom>
-          <a:noFill/>
-        </p:spPr>
-        <p:txBody>
-          <a:bodyPr wrap="none" rtlCol="0">
-            <a:spAutoFit/>
-          </a:bodyPr>
-          <a:lstStyle/>
-          <a:p>
-            <a:r>
-              <a:rPr lang="en-US" dirty="0" err="1">
-                <a:latin typeface="Gill Sans MT" panose="020B0502020104020203" pitchFamily="34" charset="77"/>
-                <a:ea typeface="Trebuchet MS" charset="0"/>
-                <a:cs typeface="Trebuchet MS" charset="0"/>
-              </a:rPr>
-              <a:t>Detección</a:t>
-            </a:r>
-            <a:r>
-              <a:rPr lang="en-US" dirty="0">
-                <a:latin typeface="Gill Sans MT" panose="020B0502020104020203" pitchFamily="34" charset="77"/>
-                <a:ea typeface="Trebuchet MS" charset="0"/>
-                <a:cs typeface="Trebuchet MS" charset="0"/>
-              </a:rPr>
-              <a:t> </a:t>
-            </a:r>
-            <a:r>
-              <a:rPr lang="en-US" dirty="0" err="1">
-                <a:latin typeface="Gill Sans MT" panose="020B0502020104020203" pitchFamily="34" charset="77"/>
-                <a:ea typeface="Trebuchet MS" charset="0"/>
-                <a:cs typeface="Trebuchet MS" charset="0"/>
-              </a:rPr>
-              <a:t>usando</a:t>
-            </a:r>
-            <a:r>
-              <a:rPr lang="en-US" dirty="0">
-                <a:latin typeface="Gill Sans MT" panose="020B0502020104020203" pitchFamily="34" charset="77"/>
-                <a:ea typeface="Trebuchet MS" charset="0"/>
-                <a:cs typeface="Trebuchet MS" charset="0"/>
-              </a:rPr>
-              <a:t> un </a:t>
-            </a:r>
-            <a:r>
-              <a:rPr lang="en-US" dirty="0" err="1">
-                <a:latin typeface="Gill Sans MT" panose="020B0502020104020203" pitchFamily="34" charset="77"/>
-                <a:ea typeface="Trebuchet MS" charset="0"/>
-                <a:cs typeface="Trebuchet MS" charset="0"/>
-              </a:rPr>
-              <a:t>clasificador</a:t>
-            </a:r>
-            <a:endParaRPr lang="en-US" dirty="0">
-              <a:latin typeface="Gill Sans MT" panose="020B0502020104020203" pitchFamily="34" charset="77"/>
-              <a:ea typeface="Trebuchet MS" charset="0"/>
-              <a:cs typeface="Trebuchet MS" charset="0"/>
-            </a:endParaRPr>
-          </a:p>
-        </p:txBody>
-      </p:sp>
-    </p:spTree>
-    <p:extLst>
-      <p:ext uri="{BB962C8B-B14F-4D97-AF65-F5344CB8AC3E}">
-        <p14:creationId xmlns:p14="http://schemas.microsoft.com/office/powerpoint/2010/main" val="317973866"/>
       </p:ext>
     </p:extLst>
   </p:cSld>
